--- a/slides/3-2_iv_anesthetics/3-2_iv_anesthetics.pptx
+++ b/slides/3-2_iv_anesthetics/3-2_iv_anesthetics.pptx
@@ -1456,7 +1456,7 @@
         <p:spPr>
           <a:xfrm>
             <a:off x="502920" y="320040"/>
-            <a:ext cx="8503920" cy="868680"/>
+            <a:ext cx="7562088" cy="868680"/>
           </a:xfrm>
           <a:prstGeom prst="rect">
             <a:avLst/>
@@ -2062,7 +2062,7 @@
         <p:spPr>
           <a:xfrm>
             <a:off x="502920" y="320040"/>
-            <a:ext cx="8503920" cy="868680"/>
+            <a:ext cx="7562088" cy="868680"/>
           </a:xfrm>
           <a:prstGeom prst="rect">
             <a:avLst/>
@@ -2128,28 +2128,28 @@
         </p:nvSpPr>
         <p:spPr>
           <a:xfrm>
-            <a:off x="8677656" y="54864"/>
-            <a:ext cx="621792" cy="585216"/>
+            <a:off x="8110728" y="457200"/>
+            <a:ext cx="685800" cy="585216"/>
           </a:xfrm>
           <a:prstGeom prst="roundRect">
             <a:avLst>
-              <a:gd name="adj" fmla="val 15625"/>
+              <a:gd name="adj" fmla="val 12500"/>
             </a:avLst>
           </a:prstGeom>
           <a:solidFill>
-            <a:srgbClr val="00A8AA"/>
+            <a:srgbClr val="007C80"/>
           </a:solidFill>
           <a:ln/>
         </p:spPr>
         <p:txBody>
-          <a:bodyPr wrap="square" lIns="0" tIns="0" rIns="0" bIns="0" rtlCol="0" anchor="ctr"/>
+          <a:bodyPr wrap="none" lIns="0" tIns="0" rIns="0" bIns="0" rtlCol="0" anchor="ctr"/>
           <a:lstStyle/>
           <a:p>
             <a:pPr algn="ctr" indent="0" marL="0">
               <a:buNone/>
             </a:pPr>
             <a:r>
-              <a:rPr lang="ja-JP" altLang="en-US" sz="1100" b="1" dirty="0">
+              <a:rPr lang="ja-JP" altLang="en-US" sz="1200" b="1" dirty="0">
                 <a:solidFill>
                   <a:srgbClr val="FFFFFF"/>
                 </a:solidFill>
@@ -2159,7 +2159,7 @@
               </a:rPr>
               <a:t>共通</a:t>
             </a:r>
-            <a:endParaRPr lang="ja-JP" sz="1100" dirty="0"/>
+            <a:endParaRPr lang="ja-JP" sz="1200" dirty="0"/>
           </a:p>
         </p:txBody>
       </p:sp>
@@ -2171,12 +2171,12 @@
         </p:nvSpPr>
         <p:spPr>
           <a:xfrm>
-            <a:off x="9354312" y="54864"/>
-            <a:ext cx="621792" cy="585216"/>
+            <a:off x="8833104" y="457200"/>
+            <a:ext cx="685800" cy="585216"/>
           </a:xfrm>
           <a:prstGeom prst="roundRect">
             <a:avLst>
-              <a:gd name="adj" fmla="val 15625"/>
+              <a:gd name="adj" fmla="val 12500"/>
             </a:avLst>
           </a:prstGeom>
           <a:solidFill>
@@ -2185,14 +2185,14 @@
           <a:ln/>
         </p:spPr>
         <p:txBody>
-          <a:bodyPr wrap="square" lIns="0" tIns="0" rIns="0" bIns="0" rtlCol="0" anchor="ctr"/>
+          <a:bodyPr wrap="none" lIns="0" tIns="0" rIns="0" bIns="0" rtlCol="0" anchor="ctr"/>
           <a:lstStyle/>
           <a:p>
             <a:pPr algn="ctr" indent="0" marL="0">
               <a:buNone/>
             </a:pPr>
             <a:r>
-              <a:rPr lang="ja-JP" altLang="en-US" sz="1100" dirty="0">
+              <a:rPr lang="ja-JP" altLang="en-US" sz="1200" dirty="0">
                 <a:solidFill>
                   <a:srgbClr val="404040"/>
                 </a:solidFill>
@@ -2202,14 +2202,14 @@
               </a:rPr>
               <a:t>プロポ</a:t>
             </a:r>
-            <a:endParaRPr lang="ja-JP" sz="1100" dirty="0"/>
+            <a:endParaRPr lang="ja-JP" sz="1200" dirty="0"/>
           </a:p>
           <a:p>
             <a:pPr algn="ctr" indent="0" marL="0">
               <a:buNone/>
             </a:pPr>
             <a:r>
-              <a:rPr lang="ja-JP" altLang="en-US" sz="1100" dirty="0">
+              <a:rPr lang="ja-JP" altLang="en-US" sz="1200" dirty="0">
                 <a:solidFill>
                   <a:srgbClr val="404040"/>
                 </a:solidFill>
@@ -2219,7 +2219,7 @@
               </a:rPr>
               <a:t>フォール</a:t>
             </a:r>
-            <a:endParaRPr lang="ja-JP" sz="1100" dirty="0"/>
+            <a:endParaRPr lang="ja-JP" sz="1200" dirty="0"/>
           </a:p>
         </p:txBody>
       </p:sp>
@@ -2231,12 +2231,12 @@
         </p:nvSpPr>
         <p:spPr>
           <a:xfrm>
-            <a:off x="10030968" y="54864"/>
-            <a:ext cx="621792" cy="585216"/>
+            <a:off x="9555480" y="457200"/>
+            <a:ext cx="685800" cy="585216"/>
           </a:xfrm>
           <a:prstGeom prst="roundRect">
             <a:avLst>
-              <a:gd name="adj" fmla="val 15625"/>
+              <a:gd name="adj" fmla="val 12500"/>
             </a:avLst>
           </a:prstGeom>
           <a:solidFill>
@@ -2245,14 +2245,14 @@
           <a:ln/>
         </p:spPr>
         <p:txBody>
-          <a:bodyPr wrap="square" lIns="0" tIns="0" rIns="0" bIns="0" rtlCol="0" anchor="ctr"/>
+          <a:bodyPr wrap="none" lIns="0" tIns="0" rIns="0" bIns="0" rtlCol="0" anchor="ctr"/>
           <a:lstStyle/>
           <a:p>
             <a:pPr algn="ctr" indent="0" marL="0">
               <a:buNone/>
             </a:pPr>
             <a:r>
-              <a:rPr lang="ja-JP" altLang="en-US" sz="1100" dirty="0">
+              <a:rPr lang="ja-JP" altLang="en-US" sz="1200" dirty="0">
                 <a:solidFill>
                   <a:srgbClr val="404040"/>
                 </a:solidFill>
@@ -2262,14 +2262,14 @@
               </a:rPr>
               <a:t>レミマ</a:t>
             </a:r>
-            <a:endParaRPr lang="ja-JP" sz="1100" dirty="0"/>
+            <a:endParaRPr lang="ja-JP" sz="1200" dirty="0"/>
           </a:p>
           <a:p>
             <a:pPr algn="ctr" indent="0" marL="0">
               <a:buNone/>
             </a:pPr>
             <a:r>
-              <a:rPr lang="ja-JP" altLang="en-US" sz="1100" dirty="0">
+              <a:rPr lang="ja-JP" altLang="en-US" sz="1200" dirty="0">
                 <a:solidFill>
                   <a:srgbClr val="404040"/>
                 </a:solidFill>
@@ -2279,7 +2279,7 @@
               </a:rPr>
               <a:t>ゾラム</a:t>
             </a:r>
-            <a:endParaRPr lang="ja-JP" sz="1100" dirty="0"/>
+            <a:endParaRPr lang="ja-JP" sz="1200" dirty="0"/>
           </a:p>
         </p:txBody>
       </p:sp>
@@ -2291,12 +2291,12 @@
         </p:nvSpPr>
         <p:spPr>
           <a:xfrm>
-            <a:off x="10707624" y="54864"/>
-            <a:ext cx="621792" cy="585216"/>
+            <a:off x="10277856" y="457200"/>
+            <a:ext cx="685800" cy="585216"/>
           </a:xfrm>
           <a:prstGeom prst="roundRect">
             <a:avLst>
-              <a:gd name="adj" fmla="val 15625"/>
+              <a:gd name="adj" fmla="val 12500"/>
             </a:avLst>
           </a:prstGeom>
           <a:solidFill>
@@ -2305,14 +2305,14 @@
           <a:ln/>
         </p:spPr>
         <p:txBody>
-          <a:bodyPr wrap="square" lIns="0" tIns="0" rIns="0" bIns="0" rtlCol="0" anchor="ctr"/>
+          <a:bodyPr wrap="none" lIns="0" tIns="0" rIns="0" bIns="0" rtlCol="0" anchor="ctr"/>
           <a:lstStyle/>
           <a:p>
             <a:pPr algn="ctr" indent="0" marL="0">
               <a:buNone/>
             </a:pPr>
             <a:r>
-              <a:rPr lang="ja-JP" altLang="en-US" sz="1100" dirty="0">
+              <a:rPr lang="ja-JP" altLang="en-US" sz="1200" dirty="0">
                 <a:solidFill>
                   <a:srgbClr val="404040"/>
                 </a:solidFill>
@@ -2322,14 +2322,14 @@
               </a:rPr>
               <a:t>ミダ・</a:t>
             </a:r>
-            <a:endParaRPr lang="ja-JP" sz="1100" dirty="0"/>
+            <a:endParaRPr lang="ja-JP" sz="1200" dirty="0"/>
           </a:p>
           <a:p>
             <a:pPr algn="ctr" indent="0" marL="0">
               <a:buNone/>
             </a:pPr>
             <a:r>
-              <a:rPr lang="ja-JP" altLang="en-US" sz="1100" dirty="0">
+              <a:rPr lang="ja-JP" altLang="en-US" sz="1200" dirty="0">
                 <a:solidFill>
                   <a:srgbClr val="404040"/>
                 </a:solidFill>
@@ -2339,7 +2339,7 @@
               </a:rPr>
               <a:t>ケタ</a:t>
             </a:r>
-            <a:endParaRPr lang="ja-JP" sz="1100" dirty="0"/>
+            <a:endParaRPr lang="ja-JP" sz="1200" dirty="0"/>
           </a:p>
         </p:txBody>
       </p:sp>
@@ -2351,12 +2351,12 @@
         </p:nvSpPr>
         <p:spPr>
           <a:xfrm>
-            <a:off x="11384280" y="54864"/>
-            <a:ext cx="621792" cy="585216"/>
+            <a:off x="11000232" y="457200"/>
+            <a:ext cx="685800" cy="585216"/>
           </a:xfrm>
           <a:prstGeom prst="roundRect">
             <a:avLst>
-              <a:gd name="adj" fmla="val 15625"/>
+              <a:gd name="adj" fmla="val 12500"/>
             </a:avLst>
           </a:prstGeom>
           <a:solidFill>
@@ -2365,14 +2365,14 @@
           <a:ln/>
         </p:spPr>
         <p:txBody>
-          <a:bodyPr wrap="square" lIns="0" tIns="0" rIns="0" bIns="0" rtlCol="0" anchor="ctr"/>
+          <a:bodyPr wrap="none" lIns="0" tIns="0" rIns="0" bIns="0" rtlCol="0" anchor="ctr"/>
           <a:lstStyle/>
           <a:p>
             <a:pPr algn="ctr" indent="0" marL="0">
               <a:buNone/>
             </a:pPr>
             <a:r>
-              <a:rPr lang="ja-JP" altLang="en-US" sz="1100" dirty="0">
+              <a:rPr lang="ja-JP" altLang="en-US" sz="1200" dirty="0">
                 <a:solidFill>
                   <a:srgbClr val="404040"/>
                 </a:solidFill>
@@ -2382,7 +2382,7 @@
               </a:rPr>
               <a:t>使い分け</a:t>
             </a:r>
-            <a:endParaRPr lang="ja-JP" sz="1100" dirty="0"/>
+            <a:endParaRPr lang="ja-JP" sz="1200" dirty="0"/>
           </a:p>
         </p:txBody>
       </p:sp>
@@ -2394,7 +2394,7 @@
         </p:nvSpPr>
         <p:spPr>
           <a:xfrm>
-            <a:off x="11247120" y="6446520"/>
+            <a:off x="11247120" y="6263640"/>
             <a:ext cx="731520" cy="320040"/>
           </a:xfrm>
           <a:prstGeom prst="rect">
@@ -2434,7 +2434,7 @@
         <p:spPr>
           <a:xfrm>
             <a:off x="502920" y="6263640"/>
-            <a:ext cx="10607040" cy="457200"/>
+            <a:ext cx="10424160" cy="320040"/>
           </a:xfrm>
           <a:prstGeom prst="rect">
             <a:avLst/>
@@ -2944,7 +2944,7 @@
         <p:spPr>
           <a:xfrm>
             <a:off x="502920" y="320040"/>
-            <a:ext cx="8503920" cy="868680"/>
+            <a:ext cx="7562088" cy="868680"/>
           </a:xfrm>
           <a:prstGeom prst="rect">
             <a:avLst/>
@@ -3010,12 +3010,12 @@
         </p:nvSpPr>
         <p:spPr>
           <a:xfrm>
-            <a:off x="8677656" y="54864"/>
-            <a:ext cx="621792" cy="585216"/>
+            <a:off x="8110728" y="457200"/>
+            <a:ext cx="685800" cy="585216"/>
           </a:xfrm>
           <a:prstGeom prst="roundRect">
             <a:avLst>
-              <a:gd name="adj" fmla="val 15625"/>
+              <a:gd name="adj" fmla="val 12500"/>
             </a:avLst>
           </a:prstGeom>
           <a:solidFill>
@@ -3024,14 +3024,14 @@
           <a:ln/>
         </p:spPr>
         <p:txBody>
-          <a:bodyPr wrap="square" lIns="0" tIns="0" rIns="0" bIns="0" rtlCol="0" anchor="ctr"/>
+          <a:bodyPr wrap="none" lIns="0" tIns="0" rIns="0" bIns="0" rtlCol="0" anchor="ctr"/>
           <a:lstStyle/>
           <a:p>
             <a:pPr algn="ctr" indent="0" marL="0">
               <a:buNone/>
             </a:pPr>
             <a:r>
-              <a:rPr lang="ja-JP" altLang="en-US" sz="1100" dirty="0">
+              <a:rPr lang="ja-JP" altLang="en-US" sz="1200" dirty="0">
                 <a:solidFill>
                   <a:srgbClr val="404040"/>
                 </a:solidFill>
@@ -3041,7 +3041,7 @@
               </a:rPr>
               <a:t>共通</a:t>
             </a:r>
-            <a:endParaRPr lang="ja-JP" sz="1100" dirty="0"/>
+            <a:endParaRPr lang="ja-JP" sz="1200" dirty="0"/>
           </a:p>
         </p:txBody>
       </p:sp>
@@ -3053,28 +3053,28 @@
         </p:nvSpPr>
         <p:spPr>
           <a:xfrm>
-            <a:off x="9354312" y="54864"/>
-            <a:ext cx="621792" cy="585216"/>
+            <a:off x="8833104" y="457200"/>
+            <a:ext cx="685800" cy="585216"/>
           </a:xfrm>
           <a:prstGeom prst="roundRect">
             <a:avLst>
-              <a:gd name="adj" fmla="val 15625"/>
+              <a:gd name="adj" fmla="val 12500"/>
             </a:avLst>
           </a:prstGeom>
           <a:solidFill>
-            <a:srgbClr val="00A8AA"/>
+            <a:srgbClr val="007C80"/>
           </a:solidFill>
           <a:ln/>
         </p:spPr>
         <p:txBody>
-          <a:bodyPr wrap="square" lIns="0" tIns="0" rIns="0" bIns="0" rtlCol="0" anchor="ctr"/>
+          <a:bodyPr wrap="none" lIns="0" tIns="0" rIns="0" bIns="0" rtlCol="0" anchor="ctr"/>
           <a:lstStyle/>
           <a:p>
             <a:pPr algn="ctr" indent="0" marL="0">
               <a:buNone/>
             </a:pPr>
             <a:r>
-              <a:rPr lang="ja-JP" altLang="en-US" sz="1100" b="1" dirty="0">
+              <a:rPr lang="ja-JP" altLang="en-US" sz="1200" b="1" dirty="0">
                 <a:solidFill>
                   <a:srgbClr val="FFFFFF"/>
                 </a:solidFill>
@@ -3084,14 +3084,14 @@
               </a:rPr>
               <a:t>プロポ</a:t>
             </a:r>
-            <a:endParaRPr lang="ja-JP" sz="1100" dirty="0"/>
+            <a:endParaRPr lang="ja-JP" sz="1200" dirty="0"/>
           </a:p>
           <a:p>
             <a:pPr algn="ctr" indent="0" marL="0">
               <a:buNone/>
             </a:pPr>
             <a:r>
-              <a:rPr lang="ja-JP" altLang="en-US" sz="1100" b="1" dirty="0">
+              <a:rPr lang="ja-JP" altLang="en-US" sz="1200" b="1" dirty="0">
                 <a:solidFill>
                   <a:srgbClr val="FFFFFF"/>
                 </a:solidFill>
@@ -3101,7 +3101,7 @@
               </a:rPr>
               <a:t>フォール</a:t>
             </a:r>
-            <a:endParaRPr lang="ja-JP" sz="1100" dirty="0"/>
+            <a:endParaRPr lang="ja-JP" sz="1200" dirty="0"/>
           </a:p>
         </p:txBody>
       </p:sp>
@@ -3113,12 +3113,12 @@
         </p:nvSpPr>
         <p:spPr>
           <a:xfrm>
-            <a:off x="10030968" y="54864"/>
-            <a:ext cx="621792" cy="585216"/>
+            <a:off x="9555480" y="457200"/>
+            <a:ext cx="685800" cy="585216"/>
           </a:xfrm>
           <a:prstGeom prst="roundRect">
             <a:avLst>
-              <a:gd name="adj" fmla="val 15625"/>
+              <a:gd name="adj" fmla="val 12500"/>
             </a:avLst>
           </a:prstGeom>
           <a:solidFill>
@@ -3127,14 +3127,14 @@
           <a:ln/>
         </p:spPr>
         <p:txBody>
-          <a:bodyPr wrap="square" lIns="0" tIns="0" rIns="0" bIns="0" rtlCol="0" anchor="ctr"/>
+          <a:bodyPr wrap="none" lIns="0" tIns="0" rIns="0" bIns="0" rtlCol="0" anchor="ctr"/>
           <a:lstStyle/>
           <a:p>
             <a:pPr algn="ctr" indent="0" marL="0">
               <a:buNone/>
             </a:pPr>
             <a:r>
-              <a:rPr lang="ja-JP" altLang="en-US" sz="1100" dirty="0">
+              <a:rPr lang="ja-JP" altLang="en-US" sz="1200" dirty="0">
                 <a:solidFill>
                   <a:srgbClr val="404040"/>
                 </a:solidFill>
@@ -3144,14 +3144,14 @@
               </a:rPr>
               <a:t>レミマ</a:t>
             </a:r>
-            <a:endParaRPr lang="ja-JP" sz="1100" dirty="0"/>
+            <a:endParaRPr lang="ja-JP" sz="1200" dirty="0"/>
           </a:p>
           <a:p>
             <a:pPr algn="ctr" indent="0" marL="0">
               <a:buNone/>
             </a:pPr>
             <a:r>
-              <a:rPr lang="ja-JP" altLang="en-US" sz="1100" dirty="0">
+              <a:rPr lang="ja-JP" altLang="en-US" sz="1200" dirty="0">
                 <a:solidFill>
                   <a:srgbClr val="404040"/>
                 </a:solidFill>
@@ -3161,7 +3161,7 @@
               </a:rPr>
               <a:t>ゾラム</a:t>
             </a:r>
-            <a:endParaRPr lang="ja-JP" sz="1100" dirty="0"/>
+            <a:endParaRPr lang="ja-JP" sz="1200" dirty="0"/>
           </a:p>
         </p:txBody>
       </p:sp>
@@ -3173,12 +3173,12 @@
         </p:nvSpPr>
         <p:spPr>
           <a:xfrm>
-            <a:off x="10707624" y="54864"/>
-            <a:ext cx="621792" cy="585216"/>
+            <a:off x="10277856" y="457200"/>
+            <a:ext cx="685800" cy="585216"/>
           </a:xfrm>
           <a:prstGeom prst="roundRect">
             <a:avLst>
-              <a:gd name="adj" fmla="val 15625"/>
+              <a:gd name="adj" fmla="val 12500"/>
             </a:avLst>
           </a:prstGeom>
           <a:solidFill>
@@ -3187,14 +3187,14 @@
           <a:ln/>
         </p:spPr>
         <p:txBody>
-          <a:bodyPr wrap="square" lIns="0" tIns="0" rIns="0" bIns="0" rtlCol="0" anchor="ctr"/>
+          <a:bodyPr wrap="none" lIns="0" tIns="0" rIns="0" bIns="0" rtlCol="0" anchor="ctr"/>
           <a:lstStyle/>
           <a:p>
             <a:pPr algn="ctr" indent="0" marL="0">
               <a:buNone/>
             </a:pPr>
             <a:r>
-              <a:rPr lang="ja-JP" altLang="en-US" sz="1100" dirty="0">
+              <a:rPr lang="ja-JP" altLang="en-US" sz="1200" dirty="0">
                 <a:solidFill>
                   <a:srgbClr val="404040"/>
                 </a:solidFill>
@@ -3204,14 +3204,14 @@
               </a:rPr>
               <a:t>ミダ・</a:t>
             </a:r>
-            <a:endParaRPr lang="ja-JP" sz="1100" dirty="0"/>
+            <a:endParaRPr lang="ja-JP" sz="1200" dirty="0"/>
           </a:p>
           <a:p>
             <a:pPr algn="ctr" indent="0" marL="0">
               <a:buNone/>
             </a:pPr>
             <a:r>
-              <a:rPr lang="ja-JP" altLang="en-US" sz="1100" dirty="0">
+              <a:rPr lang="ja-JP" altLang="en-US" sz="1200" dirty="0">
                 <a:solidFill>
                   <a:srgbClr val="404040"/>
                 </a:solidFill>
@@ -3221,7 +3221,7 @@
               </a:rPr>
               <a:t>ケタ</a:t>
             </a:r>
-            <a:endParaRPr lang="ja-JP" sz="1100" dirty="0"/>
+            <a:endParaRPr lang="ja-JP" sz="1200" dirty="0"/>
           </a:p>
         </p:txBody>
       </p:sp>
@@ -3233,12 +3233,12 @@
         </p:nvSpPr>
         <p:spPr>
           <a:xfrm>
-            <a:off x="11384280" y="54864"/>
-            <a:ext cx="621792" cy="585216"/>
+            <a:off x="11000232" y="457200"/>
+            <a:ext cx="685800" cy="585216"/>
           </a:xfrm>
           <a:prstGeom prst="roundRect">
             <a:avLst>
-              <a:gd name="adj" fmla="val 15625"/>
+              <a:gd name="adj" fmla="val 12500"/>
             </a:avLst>
           </a:prstGeom>
           <a:solidFill>
@@ -3247,14 +3247,14 @@
           <a:ln/>
         </p:spPr>
         <p:txBody>
-          <a:bodyPr wrap="square" lIns="0" tIns="0" rIns="0" bIns="0" rtlCol="0" anchor="ctr"/>
+          <a:bodyPr wrap="none" lIns="0" tIns="0" rIns="0" bIns="0" rtlCol="0" anchor="ctr"/>
           <a:lstStyle/>
           <a:p>
             <a:pPr algn="ctr" indent="0" marL="0">
               <a:buNone/>
             </a:pPr>
             <a:r>
-              <a:rPr lang="ja-JP" altLang="en-US" sz="1100" dirty="0">
+              <a:rPr lang="ja-JP" altLang="en-US" sz="1200" dirty="0">
                 <a:solidFill>
                   <a:srgbClr val="404040"/>
                 </a:solidFill>
@@ -3264,7 +3264,7 @@
               </a:rPr>
               <a:t>使い分け</a:t>
             </a:r>
-            <a:endParaRPr lang="ja-JP" sz="1100" dirty="0"/>
+            <a:endParaRPr lang="ja-JP" sz="1200" dirty="0"/>
           </a:p>
         </p:txBody>
       </p:sp>
@@ -3276,7 +3276,7 @@
         </p:nvSpPr>
         <p:spPr>
           <a:xfrm>
-            <a:off x="11247120" y="6446520"/>
+            <a:off x="11247120" y="6263640"/>
             <a:ext cx="731520" cy="320040"/>
           </a:xfrm>
           <a:prstGeom prst="rect">
@@ -3316,7 +3316,7 @@
         <p:spPr>
           <a:xfrm>
             <a:off x="502920" y="5943600"/>
-            <a:ext cx="10607040" cy="777240"/>
+            <a:ext cx="10424160" cy="640080"/>
           </a:xfrm>
           <a:prstGeom prst="rect">
             <a:avLst/>
@@ -3372,11 +3372,11 @@
         <p:spPr>
           <a:xfrm>
             <a:off x="502920" y="1691640"/>
-            <a:ext cx="4000541" cy="4032504"/>
+            <a:ext cx="4010132" cy="4032504"/>
           </a:xfrm>
           <a:prstGeom prst="roundRect">
             <a:avLst>
-              <a:gd name="adj" fmla="val 1829"/>
+              <a:gd name="adj" fmla="val 1824"/>
             </a:avLst>
           </a:prstGeom>
           <a:solidFill>
@@ -3393,8 +3393,8 @@
         </p:nvSpPr>
         <p:spPr>
           <a:xfrm>
-            <a:off x="612648" y="1819656"/>
-            <a:ext cx="3781085" cy="457200"/>
+            <a:off x="667512" y="1819656"/>
+            <a:ext cx="3680948" cy="457200"/>
           </a:xfrm>
           <a:prstGeom prst="rect">
             <a:avLst/>
@@ -3432,8 +3432,8 @@
         </p:nvSpPr>
         <p:spPr>
           <a:xfrm>
-            <a:off x="612648" y="2386584"/>
-            <a:ext cx="3781085" cy="420624"/>
+            <a:off x="667512" y="2528316"/>
+            <a:ext cx="3680948" cy="420624"/>
           </a:xfrm>
           <a:prstGeom prst="rect">
             <a:avLst/>
@@ -3493,8 +3493,8 @@
         </p:nvSpPr>
         <p:spPr>
           <a:xfrm>
-            <a:off x="886968" y="2807208"/>
-            <a:ext cx="3506765" cy="420624"/>
+            <a:off x="941832" y="2948940"/>
+            <a:ext cx="3406628" cy="420624"/>
           </a:xfrm>
           <a:prstGeom prst="rect">
             <a:avLst/>
@@ -3532,8 +3532,8 @@
         </p:nvSpPr>
         <p:spPr>
           <a:xfrm>
-            <a:off x="612648" y="3502152"/>
-            <a:ext cx="3781085" cy="420624"/>
+            <a:off x="667512" y="3781044"/>
+            <a:ext cx="3680948" cy="420624"/>
           </a:xfrm>
           <a:prstGeom prst="rect">
             <a:avLst/>
@@ -3582,8 +3582,8 @@
         </p:nvSpPr>
         <p:spPr>
           <a:xfrm>
-            <a:off x="612648" y="4197096"/>
-            <a:ext cx="3781085" cy="420624"/>
+            <a:off x="667512" y="4613148"/>
+            <a:ext cx="3680948" cy="420624"/>
           </a:xfrm>
           <a:prstGeom prst="rect">
             <a:avLst/>
@@ -3607,7 +3607,7 @@
                 <a:ea typeface="メイリオ" pitchFamily="34" charset="-122"/>
                 <a:cs typeface="メイリオ" pitchFamily="34" charset="-120"/>
               </a:rPr>
-              <a:t>ASA III・IV はより緩徐に</a:t>
+              <a:t>ASA III・IV は</a:t>
             </a:r>
             <a:endParaRPr lang="ja-JP" sz="2200" dirty="0"/>
           </a:p>
@@ -3615,18 +3615,57 @@
       </p:sp>
       <p:sp>
         <p:nvSpPr>
-          <p:cNvPr id="17" name="Shape 15"/>
+          <p:cNvPr id="17" name="Text 15"/>
+          <p:cNvSpPr txBox="1"/>
+          <p:nvPr/>
+        </p:nvSpPr>
+        <p:spPr>
+          <a:xfrm>
+            <a:off x="941832" y="5033772"/>
+            <a:ext cx="3406628" cy="420624"/>
+          </a:xfrm>
+          <a:prstGeom prst="rect">
+            <a:avLst/>
+          </a:prstGeom>
+          <a:noFill/>
+          <a:ln/>
+        </p:spPr>
+        <p:txBody>
+          <a:bodyPr wrap="square" lIns="0" tIns="0" rIns="0" bIns="0" rtlCol="0" anchor="t"/>
+          <a:lstStyle/>
+          <a:p>
+            <a:pPr algn="l" indent="0" marL="0">
+              <a:buNone/>
+            </a:pPr>
+            <a:r>
+              <a:rPr lang="ja-JP" altLang="en-US" sz="2200" dirty="0">
+                <a:solidFill>
+                  <a:srgbClr val="262626"/>
+                </a:solidFill>
+                <a:latin typeface="メイリオ" pitchFamily="34" charset="0"/>
+                <a:ea typeface="メイリオ" pitchFamily="34" charset="-122"/>
+                <a:cs typeface="メイリオ" pitchFamily="34" charset="-120"/>
+              </a:rPr>
+              <a:t>より緩徐に</a:t>
+            </a:r>
+            <a:endParaRPr lang="ja-JP" sz="2200" dirty="0"/>
+          </a:p>
+        </p:txBody>
+      </p:sp>
+      <p:sp>
+        <p:nvSpPr>
+          <p:cNvPr id="18" name="Shape 16"/>
           <p:cNvSpPr/>
           <p:nvPr/>
         </p:nvSpPr>
         <p:spPr>
           <a:xfrm>
-            <a:off x="4722917" y="1691640"/>
-            <a:ext cx="2806761" cy="4032504"/>
+            <a:off x="4732508" y="1691640"/>
+            <a:ext cx="2874142" cy="4032504"/>
           </a:xfrm>
           <a:prstGeom prst="roundRect">
             <a:avLst>
-              <a:gd name="adj" fmla="val 2606"/>
+              <a:gd name="adj" fmla="val 2545"/>
             </a:avLst>
           </a:prstGeom>
           <a:solidFill>
@@ -3637,53 +3676,14 @@
       </p:sp>
       <p:sp>
         <p:nvSpPr>
-          <p:cNvPr id="18" name="Text 16"/>
-          <p:cNvSpPr txBox="1"/>
-          <p:nvPr/>
-        </p:nvSpPr>
-        <p:spPr>
-          <a:xfrm>
-            <a:off x="4832645" y="1819656"/>
-            <a:ext cx="2587305" cy="457200"/>
-          </a:xfrm>
-          <a:prstGeom prst="rect">
-            <a:avLst/>
-          </a:prstGeom>
-          <a:noFill/>
-          <a:ln/>
-        </p:spPr>
-        <p:txBody>
-          <a:bodyPr wrap="square" lIns="0" tIns="0" rIns="0" bIns="0" rtlCol="0" anchor="t"/>
-          <a:lstStyle/>
-          <a:p>
-            <a:pPr algn="l" indent="0" marL="0">
-              <a:buNone/>
-            </a:pPr>
-            <a:r>
-              <a:rPr lang="ja-JP" altLang="en-US" sz="2400" b="1" dirty="0">
-                <a:solidFill>
-                  <a:srgbClr val="0072B2"/>
-                </a:solidFill>
-                <a:latin typeface="メイリオ" pitchFamily="34" charset="0"/>
-                <a:ea typeface="メイリオ" pitchFamily="34" charset="-122"/>
-                <a:cs typeface="メイリオ" pitchFamily="34" charset="-120"/>
-              </a:rPr>
-              <a:t>特徴</a:t>
-            </a:r>
-            <a:endParaRPr lang="ja-JP" sz="2400" dirty="0"/>
-          </a:p>
-        </p:txBody>
-      </p:sp>
-      <p:sp>
-        <p:nvSpPr>
           <p:cNvPr id="19" name="Text 17"/>
           <p:cNvSpPr txBox="1"/>
           <p:nvPr/>
         </p:nvSpPr>
         <p:spPr>
           <a:xfrm>
-            <a:off x="4832645" y="2386584"/>
-            <a:ext cx="2587305" cy="420624"/>
+            <a:off x="4897100" y="1819656"/>
+            <a:ext cx="2544958" cy="457200"/>
           </a:xfrm>
           <a:prstGeom prst="rect">
             <a:avLst/>
@@ -3699,17 +3699,17 @@
               <a:buNone/>
             </a:pPr>
             <a:r>
-              <a:rPr lang="ja-JP" altLang="en-US" sz="2200" dirty="0">
-                <a:solidFill>
-                  <a:srgbClr val="262626"/>
-                </a:solidFill>
-                <a:latin typeface="メイリオ" pitchFamily="34" charset="0"/>
-                <a:ea typeface="メイリオ" pitchFamily="34" charset="-122"/>
-                <a:cs typeface="メイリオ" pitchFamily="34" charset="-120"/>
-              </a:rPr>
-              <a:t>覚醒が速く、</a:t>
-            </a:r>
-            <a:endParaRPr lang="ja-JP" sz="2200" dirty="0"/>
+              <a:rPr lang="ja-JP" altLang="en-US" sz="2400" b="1" dirty="0">
+                <a:solidFill>
+                  <a:srgbClr val="0072B2"/>
+                </a:solidFill>
+                <a:latin typeface="メイリオ" pitchFamily="34" charset="0"/>
+                <a:ea typeface="メイリオ" pitchFamily="34" charset="-122"/>
+                <a:cs typeface="メイリオ" pitchFamily="34" charset="-120"/>
+              </a:rPr>
+              <a:t>特徴</a:t>
+            </a:r>
+            <a:endParaRPr lang="ja-JP" sz="2400" dirty="0"/>
           </a:p>
         </p:txBody>
       </p:sp>
@@ -3721,8 +3721,8 @@
         </p:nvSpPr>
         <p:spPr>
           <a:xfrm>
-            <a:off x="5106965" y="2807208"/>
-            <a:ext cx="2312985" cy="420624"/>
+            <a:off x="4897100" y="2386584"/>
+            <a:ext cx="2544958" cy="420624"/>
           </a:xfrm>
           <a:prstGeom prst="rect">
             <a:avLst/>
@@ -3746,7 +3746,7 @@
                 <a:ea typeface="メイリオ" pitchFamily="34" charset="-122"/>
                 <a:cs typeface="メイリオ" pitchFamily="34" charset="-120"/>
               </a:rPr>
-              <a:t>すっきり</a:t>
+              <a:t>覚醒が速く、</a:t>
             </a:r>
             <a:endParaRPr lang="ja-JP" sz="2200" dirty="0"/>
           </a:p>
@@ -3760,8 +3760,8 @@
         </p:nvSpPr>
         <p:spPr>
           <a:xfrm>
-            <a:off x="4832645" y="3456432"/>
-            <a:ext cx="2587305" cy="420624"/>
+            <a:off x="5171420" y="2807208"/>
+            <a:ext cx="2270638" cy="420624"/>
           </a:xfrm>
           <a:prstGeom prst="rect">
             <a:avLst/>
@@ -3785,7 +3785,7 @@
                 <a:ea typeface="メイリオ" pitchFamily="34" charset="-122"/>
                 <a:cs typeface="メイリオ" pitchFamily="34" charset="-120"/>
               </a:rPr>
-              <a:t>PONV が少ない</a:t>
+              <a:t>すっきり</a:t>
             </a:r>
             <a:endParaRPr lang="ja-JP" sz="2200" dirty="0"/>
           </a:p>
@@ -3799,8 +3799,8 @@
         </p:nvSpPr>
         <p:spPr>
           <a:xfrm>
-            <a:off x="4832645" y="4105656"/>
-            <a:ext cx="2587305" cy="420624"/>
+            <a:off x="4897100" y="3456432"/>
+            <a:ext cx="2544958" cy="420624"/>
           </a:xfrm>
           <a:prstGeom prst="rect">
             <a:avLst/>
@@ -3824,7 +3824,7 @@
                 <a:ea typeface="メイリオ" pitchFamily="34" charset="-122"/>
                 <a:cs typeface="メイリオ" pitchFamily="34" charset="-120"/>
               </a:rPr>
-              <a:t>血圧低下・</a:t>
+              <a:t>PONV が少ない</a:t>
             </a:r>
             <a:endParaRPr lang="ja-JP" sz="2200" dirty="0"/>
           </a:p>
@@ -3838,8 +3838,8 @@
         </p:nvSpPr>
         <p:spPr>
           <a:xfrm>
-            <a:off x="5106965" y="4526280"/>
-            <a:ext cx="2312985" cy="420624"/>
+            <a:off x="4897100" y="4105656"/>
+            <a:ext cx="2544958" cy="420624"/>
           </a:xfrm>
           <a:prstGeom prst="rect">
             <a:avLst/>
@@ -3863,7 +3863,7 @@
                 <a:ea typeface="メイリオ" pitchFamily="34" charset="-122"/>
                 <a:cs typeface="メイリオ" pitchFamily="34" charset="-120"/>
               </a:rPr>
-              <a:t>呼吸抑制が強い</a:t>
+              <a:t>血圧低下・</a:t>
             </a:r>
             <a:endParaRPr lang="ja-JP" sz="2200" dirty="0"/>
           </a:p>
@@ -3877,8 +3877,8 @@
         </p:nvSpPr>
         <p:spPr>
           <a:xfrm>
-            <a:off x="4832645" y="5175504"/>
-            <a:ext cx="2587305" cy="420624"/>
+            <a:off x="5171420" y="4526280"/>
+            <a:ext cx="2270638" cy="420624"/>
           </a:xfrm>
           <a:prstGeom prst="rect">
             <a:avLst/>
@@ -3902,6 +3902,45 @@
                 <a:ea typeface="メイリオ" pitchFamily="34" charset="-122"/>
                 <a:cs typeface="メイリオ" pitchFamily="34" charset="-120"/>
               </a:rPr>
+              <a:t>呼吸抑制が強い</a:t>
+            </a:r>
+            <a:endParaRPr lang="ja-JP" sz="2200" dirty="0"/>
+          </a:p>
+        </p:txBody>
+      </p:sp>
+      <p:sp>
+        <p:nvSpPr>
+          <p:cNvPr id="25" name="Text 23"/>
+          <p:cNvSpPr txBox="1"/>
+          <p:nvPr/>
+        </p:nvSpPr>
+        <p:spPr>
+          <a:xfrm>
+            <a:off x="4897100" y="5175504"/>
+            <a:ext cx="2544958" cy="420624"/>
+          </a:xfrm>
+          <a:prstGeom prst="rect">
+            <a:avLst/>
+          </a:prstGeom>
+          <a:noFill/>
+          <a:ln/>
+        </p:spPr>
+        <p:txBody>
+          <a:bodyPr wrap="square" lIns="0" tIns="0" rIns="0" bIns="0" rtlCol="0" anchor="t"/>
+          <a:lstStyle/>
+          <a:p>
+            <a:pPr algn="l" indent="0" marL="0">
+              <a:buNone/>
+            </a:pPr>
+            <a:r>
+              <a:rPr lang="ja-JP" altLang="en-US" sz="2200" dirty="0">
+                <a:solidFill>
+                  <a:srgbClr val="262626"/>
+                </a:solidFill>
+                <a:latin typeface="メイリオ" pitchFamily="34" charset="0"/>
+                <a:ea typeface="メイリオ" pitchFamily="34" charset="-122"/>
+                <a:cs typeface="メイリオ" pitchFamily="34" charset="-120"/>
+              </a:rPr>
               <a:t>注射痛</a:t>
             </a:r>
             <a:endParaRPr lang="ja-JP" sz="2200" dirty="0"/>
@@ -3910,18 +3949,18 @@
       </p:sp>
       <p:sp>
         <p:nvSpPr>
-          <p:cNvPr id="25" name="Shape 23"/>
+          <p:cNvPr id="26" name="Shape 24"/>
           <p:cNvSpPr/>
           <p:nvPr/>
         </p:nvSpPr>
         <p:spPr>
           <a:xfrm>
-            <a:off x="7749134" y="1691640"/>
-            <a:ext cx="3936898" cy="4032504"/>
+            <a:off x="7826106" y="1691640"/>
+            <a:ext cx="3859926" cy="4032504"/>
           </a:xfrm>
           <a:prstGeom prst="roundRect">
             <a:avLst>
-              <a:gd name="adj" fmla="val 1858"/>
+              <a:gd name="adj" fmla="val 1895"/>
             </a:avLst>
           </a:prstGeom>
           <a:solidFill>
@@ -3932,53 +3971,14 @@
       </p:sp>
       <p:sp>
         <p:nvSpPr>
-          <p:cNvPr id="26" name="Text 24"/>
-          <p:cNvSpPr txBox="1"/>
-          <p:nvPr/>
-        </p:nvSpPr>
-        <p:spPr>
-          <a:xfrm>
-            <a:off x="7858862" y="1819656"/>
-            <a:ext cx="3717442" cy="457200"/>
-          </a:xfrm>
-          <a:prstGeom prst="rect">
-            <a:avLst/>
-          </a:prstGeom>
-          <a:noFill/>
-          <a:ln/>
-        </p:spPr>
-        <p:txBody>
-          <a:bodyPr wrap="square" lIns="0" tIns="0" rIns="0" bIns="0" rtlCol="0" anchor="t"/>
-          <a:lstStyle/>
-          <a:p>
-            <a:pPr algn="l" indent="0" marL="0">
-              <a:buNone/>
-            </a:pPr>
-            <a:r>
-              <a:rPr lang="ja-JP" altLang="en-US" sz="2400" b="1" dirty="0">
-                <a:solidFill>
-                  <a:srgbClr val="D55E00"/>
-                </a:solidFill>
-                <a:latin typeface="メイリオ" pitchFamily="34" charset="0"/>
-                <a:ea typeface="メイリオ" pitchFamily="34" charset="-122"/>
-                <a:cs typeface="メイリオ" pitchFamily="34" charset="-120"/>
-              </a:rPr>
-              <a:t>注意</a:t>
-            </a:r>
-            <a:endParaRPr lang="ja-JP" sz="2400" dirty="0"/>
-          </a:p>
-        </p:txBody>
-      </p:sp>
-      <p:sp>
-        <p:nvSpPr>
           <p:cNvPr id="27" name="Text 25"/>
           <p:cNvSpPr txBox="1"/>
           <p:nvPr/>
         </p:nvSpPr>
         <p:spPr>
           <a:xfrm>
-            <a:off x="7858862" y="2386584"/>
-            <a:ext cx="3717442" cy="420624"/>
+            <a:off x="7990698" y="1819656"/>
+            <a:ext cx="3530742" cy="457200"/>
           </a:xfrm>
           <a:prstGeom prst="rect">
             <a:avLst/>
@@ -3994,17 +3994,17 @@
               <a:buNone/>
             </a:pPr>
             <a:r>
-              <a:rPr lang="ja-JP" altLang="en-US" sz="2200" dirty="0">
-                <a:solidFill>
-                  <a:srgbClr val="262626"/>
-                </a:solidFill>
-                <a:latin typeface="メイリオ" pitchFamily="34" charset="0"/>
-                <a:ea typeface="メイリオ" pitchFamily="34" charset="-122"/>
-                <a:cs typeface="メイリオ" pitchFamily="34" charset="-120"/>
-              </a:rPr>
-              <a:t>脂肪乳剤：清潔操作、</a:t>
-            </a:r>
-            <a:endParaRPr lang="ja-JP" sz="2200" dirty="0"/>
+              <a:rPr lang="ja-JP" altLang="en-US" sz="2400" b="1" dirty="0">
+                <a:solidFill>
+                  <a:srgbClr val="D55E00"/>
+                </a:solidFill>
+                <a:latin typeface="メイリオ" pitchFamily="34" charset="0"/>
+                <a:ea typeface="メイリオ" pitchFamily="34" charset="-122"/>
+                <a:cs typeface="メイリオ" pitchFamily="34" charset="-120"/>
+              </a:rPr>
+              <a:t>注意</a:t>
+            </a:r>
+            <a:endParaRPr lang="ja-JP" sz="2400" dirty="0"/>
           </a:p>
         </p:txBody>
       </p:sp>
@@ -4016,8 +4016,8 @@
         </p:nvSpPr>
         <p:spPr>
           <a:xfrm>
-            <a:off x="8133182" y="2807208"/>
-            <a:ext cx="3443122" cy="420624"/>
+            <a:off x="7990698" y="2386584"/>
+            <a:ext cx="3530742" cy="420624"/>
           </a:xfrm>
           <a:prstGeom prst="rect">
             <a:avLst/>
@@ -4041,7 +4041,7 @@
                 <a:ea typeface="メイリオ" pitchFamily="34" charset="-122"/>
                 <a:cs typeface="メイリオ" pitchFamily="34" charset="-120"/>
               </a:rPr>
-              <a:t>開封後すぐ使う</a:t>
+              <a:t>脂肪乳剤：清潔操作、</a:t>
             </a:r>
             <a:endParaRPr lang="ja-JP" sz="2200" dirty="0"/>
           </a:p>
@@ -4055,8 +4055,8 @@
         </p:nvSpPr>
         <p:spPr>
           <a:xfrm>
-            <a:off x="7858862" y="3502152"/>
-            <a:ext cx="3717442" cy="420624"/>
+            <a:off x="8265018" y="2807208"/>
+            <a:ext cx="3256422" cy="420624"/>
           </a:xfrm>
           <a:prstGeom prst="rect">
             <a:avLst/>
@@ -4080,7 +4080,7 @@
                 <a:ea typeface="メイリオ" pitchFamily="34" charset="-122"/>
                 <a:cs typeface="メイリオ" pitchFamily="34" charset="-120"/>
               </a:rPr>
-              <a:t>小児の ICU</a:t>
+              <a:t>開封後すぐ使う</a:t>
             </a:r>
             <a:endParaRPr lang="ja-JP" sz="2200" dirty="0"/>
           </a:p>
@@ -4094,8 +4094,8 @@
         </p:nvSpPr>
         <p:spPr>
           <a:xfrm>
-            <a:off x="8133182" y="3922776"/>
-            <a:ext cx="3443122" cy="420624"/>
+            <a:off x="7990698" y="3570732"/>
+            <a:ext cx="3530742" cy="420624"/>
           </a:xfrm>
           <a:prstGeom prst="rect">
             <a:avLst/>
@@ -4119,18 +4119,7 @@
                 <a:ea typeface="メイリオ" pitchFamily="34" charset="-122"/>
                 <a:cs typeface="メイリオ" pitchFamily="34" charset="-120"/>
               </a:rPr>
-              <a:t>人工呼吸中の鎮静は</a:t>
-            </a:r>
-            <a:r>
-              <a:rPr lang="ja-JP" altLang="en-US" sz="2200" b="1" dirty="0">
-                <a:solidFill>
-                  <a:srgbClr val="C00000"/>
-                </a:solidFill>
-                <a:latin typeface="メイリオ" pitchFamily="34" charset="0"/>
-                <a:ea typeface="メイリオ" pitchFamily="34" charset="-122"/>
-                <a:cs typeface="メイリオ" pitchFamily="34" charset="-120"/>
-              </a:rPr>
-              <a:t>禁忌</a:t>
+              <a:t>小児の ICU 人工呼吸中の</a:t>
             </a:r>
             <a:endParaRPr lang="ja-JP" sz="2200" dirty="0"/>
           </a:p>
@@ -4144,8 +4133,8 @@
         </p:nvSpPr>
         <p:spPr>
           <a:xfrm>
-            <a:off x="7858862" y="4617720"/>
-            <a:ext cx="3717442" cy="420624"/>
+            <a:off x="8265018" y="3991356"/>
+            <a:ext cx="3256422" cy="420624"/>
           </a:xfrm>
           <a:prstGeom prst="rect">
             <a:avLst/>
@@ -4169,7 +4158,18 @@
                 <a:ea typeface="メイリオ" pitchFamily="34" charset="-122"/>
                 <a:cs typeface="メイリオ" pitchFamily="34" charset="-120"/>
               </a:rPr>
-              <a:t>本剤・成分への</a:t>
+              <a:t>鎮静は</a:t>
+            </a:r>
+            <a:r>
+              <a:rPr lang="ja-JP" altLang="en-US" sz="2200" b="1" dirty="0">
+                <a:solidFill>
+                  <a:srgbClr val="C00000"/>
+                </a:solidFill>
+                <a:latin typeface="メイリオ" pitchFamily="34" charset="0"/>
+                <a:ea typeface="メイリオ" pitchFamily="34" charset="-122"/>
+                <a:cs typeface="メイリオ" pitchFamily="34" charset="-120"/>
+              </a:rPr>
+              <a:t>禁忌</a:t>
             </a:r>
             <a:endParaRPr lang="ja-JP" sz="2200" dirty="0"/>
           </a:p>
@@ -4183,8 +4183,47 @@
         </p:nvSpPr>
         <p:spPr>
           <a:xfrm>
-            <a:off x="8133182" y="5038344"/>
-            <a:ext cx="3443122" cy="420624"/>
+            <a:off x="7990698" y="4754880"/>
+            <a:ext cx="3530742" cy="420624"/>
+          </a:xfrm>
+          <a:prstGeom prst="rect">
+            <a:avLst/>
+          </a:prstGeom>
+          <a:noFill/>
+          <a:ln/>
+        </p:spPr>
+        <p:txBody>
+          <a:bodyPr wrap="square" lIns="0" tIns="0" rIns="0" bIns="0" rtlCol="0" anchor="t"/>
+          <a:lstStyle/>
+          <a:p>
+            <a:pPr algn="l" indent="0" marL="0">
+              <a:buNone/>
+            </a:pPr>
+            <a:r>
+              <a:rPr lang="ja-JP" altLang="en-US" sz="2200" dirty="0">
+                <a:solidFill>
+                  <a:srgbClr val="262626"/>
+                </a:solidFill>
+                <a:latin typeface="メイリオ" pitchFamily="34" charset="0"/>
+                <a:ea typeface="メイリオ" pitchFamily="34" charset="-122"/>
+                <a:cs typeface="メイリオ" pitchFamily="34" charset="-120"/>
+              </a:rPr>
+              <a:t>本剤・成分への</a:t>
+            </a:r>
+            <a:endParaRPr lang="ja-JP" sz="2200" dirty="0"/>
+          </a:p>
+        </p:txBody>
+      </p:sp>
+      <p:sp>
+        <p:nvSpPr>
+          <p:cNvPr id="33" name="Text 31"/>
+          <p:cNvSpPr txBox="1"/>
+          <p:nvPr/>
+        </p:nvSpPr>
+        <p:spPr>
+          <a:xfrm>
+            <a:off x="8265018" y="5175504"/>
+            <a:ext cx="3256422" cy="420624"/>
           </a:xfrm>
           <a:prstGeom prst="rect">
             <a:avLst/>
@@ -4274,7 +4313,7 @@
         <p:spPr>
           <a:xfrm>
             <a:off x="502920" y="320040"/>
-            <a:ext cx="8503920" cy="868680"/>
+            <a:ext cx="7562088" cy="868680"/>
           </a:xfrm>
           <a:prstGeom prst="rect">
             <a:avLst/>
@@ -4340,12 +4379,12 @@
         </p:nvSpPr>
         <p:spPr>
           <a:xfrm>
-            <a:off x="8677656" y="54864"/>
-            <a:ext cx="621792" cy="585216"/>
+            <a:off x="8110728" y="457200"/>
+            <a:ext cx="685800" cy="585216"/>
           </a:xfrm>
           <a:prstGeom prst="roundRect">
             <a:avLst>
-              <a:gd name="adj" fmla="val 15625"/>
+              <a:gd name="adj" fmla="val 12500"/>
             </a:avLst>
           </a:prstGeom>
           <a:solidFill>
@@ -4354,14 +4393,14 @@
           <a:ln/>
         </p:spPr>
         <p:txBody>
-          <a:bodyPr wrap="square" lIns="0" tIns="0" rIns="0" bIns="0" rtlCol="0" anchor="ctr"/>
+          <a:bodyPr wrap="none" lIns="0" tIns="0" rIns="0" bIns="0" rtlCol="0" anchor="ctr"/>
           <a:lstStyle/>
           <a:p>
             <a:pPr algn="ctr" indent="0" marL="0">
               <a:buNone/>
             </a:pPr>
             <a:r>
-              <a:rPr lang="ja-JP" altLang="en-US" sz="1100" dirty="0">
+              <a:rPr lang="ja-JP" altLang="en-US" sz="1200" dirty="0">
                 <a:solidFill>
                   <a:srgbClr val="404040"/>
                 </a:solidFill>
@@ -4371,7 +4410,7 @@
               </a:rPr>
               <a:t>共通</a:t>
             </a:r>
-            <a:endParaRPr lang="ja-JP" sz="1100" dirty="0"/>
+            <a:endParaRPr lang="ja-JP" sz="1200" dirty="0"/>
           </a:p>
         </p:txBody>
       </p:sp>
@@ -4383,12 +4422,12 @@
         </p:nvSpPr>
         <p:spPr>
           <a:xfrm>
-            <a:off x="9354312" y="54864"/>
-            <a:ext cx="621792" cy="585216"/>
+            <a:off x="8833104" y="457200"/>
+            <a:ext cx="685800" cy="585216"/>
           </a:xfrm>
           <a:prstGeom prst="roundRect">
             <a:avLst>
-              <a:gd name="adj" fmla="val 15625"/>
+              <a:gd name="adj" fmla="val 12500"/>
             </a:avLst>
           </a:prstGeom>
           <a:solidFill>
@@ -4397,14 +4436,14 @@
           <a:ln/>
         </p:spPr>
         <p:txBody>
-          <a:bodyPr wrap="square" lIns="0" tIns="0" rIns="0" bIns="0" rtlCol="0" anchor="ctr"/>
+          <a:bodyPr wrap="none" lIns="0" tIns="0" rIns="0" bIns="0" rtlCol="0" anchor="ctr"/>
           <a:lstStyle/>
           <a:p>
             <a:pPr algn="ctr" indent="0" marL="0">
               <a:buNone/>
             </a:pPr>
             <a:r>
-              <a:rPr lang="ja-JP" altLang="en-US" sz="1100" dirty="0">
+              <a:rPr lang="ja-JP" altLang="en-US" sz="1200" dirty="0">
                 <a:solidFill>
                   <a:srgbClr val="404040"/>
                 </a:solidFill>
@@ -4414,14 +4453,14 @@
               </a:rPr>
               <a:t>プロポ</a:t>
             </a:r>
-            <a:endParaRPr lang="ja-JP" sz="1100" dirty="0"/>
+            <a:endParaRPr lang="ja-JP" sz="1200" dirty="0"/>
           </a:p>
           <a:p>
             <a:pPr algn="ctr" indent="0" marL="0">
               <a:buNone/>
             </a:pPr>
             <a:r>
-              <a:rPr lang="ja-JP" altLang="en-US" sz="1100" dirty="0">
+              <a:rPr lang="ja-JP" altLang="en-US" sz="1200" dirty="0">
                 <a:solidFill>
                   <a:srgbClr val="404040"/>
                 </a:solidFill>
@@ -4431,7 +4470,7 @@
               </a:rPr>
               <a:t>フォール</a:t>
             </a:r>
-            <a:endParaRPr lang="ja-JP" sz="1100" dirty="0"/>
+            <a:endParaRPr lang="ja-JP" sz="1200" dirty="0"/>
           </a:p>
         </p:txBody>
       </p:sp>
@@ -4443,28 +4482,28 @@
         </p:nvSpPr>
         <p:spPr>
           <a:xfrm>
-            <a:off x="10030968" y="54864"/>
-            <a:ext cx="621792" cy="585216"/>
+            <a:off x="9555480" y="457200"/>
+            <a:ext cx="685800" cy="585216"/>
           </a:xfrm>
           <a:prstGeom prst="roundRect">
             <a:avLst>
-              <a:gd name="adj" fmla="val 15625"/>
+              <a:gd name="adj" fmla="val 12500"/>
             </a:avLst>
           </a:prstGeom>
           <a:solidFill>
-            <a:srgbClr val="00A8AA"/>
+            <a:srgbClr val="007C80"/>
           </a:solidFill>
           <a:ln/>
         </p:spPr>
         <p:txBody>
-          <a:bodyPr wrap="square" lIns="0" tIns="0" rIns="0" bIns="0" rtlCol="0" anchor="ctr"/>
+          <a:bodyPr wrap="none" lIns="0" tIns="0" rIns="0" bIns="0" rtlCol="0" anchor="ctr"/>
           <a:lstStyle/>
           <a:p>
             <a:pPr algn="ctr" indent="0" marL="0">
               <a:buNone/>
             </a:pPr>
             <a:r>
-              <a:rPr lang="ja-JP" altLang="en-US" sz="1100" b="1" dirty="0">
+              <a:rPr lang="ja-JP" altLang="en-US" sz="1200" b="1" dirty="0">
                 <a:solidFill>
                   <a:srgbClr val="FFFFFF"/>
                 </a:solidFill>
@@ -4474,14 +4513,14 @@
               </a:rPr>
               <a:t>レミマ</a:t>
             </a:r>
-            <a:endParaRPr lang="ja-JP" sz="1100" dirty="0"/>
+            <a:endParaRPr lang="ja-JP" sz="1200" dirty="0"/>
           </a:p>
           <a:p>
             <a:pPr algn="ctr" indent="0" marL="0">
               <a:buNone/>
             </a:pPr>
             <a:r>
-              <a:rPr lang="ja-JP" altLang="en-US" sz="1100" b="1" dirty="0">
+              <a:rPr lang="ja-JP" altLang="en-US" sz="1200" b="1" dirty="0">
                 <a:solidFill>
                   <a:srgbClr val="FFFFFF"/>
                 </a:solidFill>
@@ -4491,7 +4530,7 @@
               </a:rPr>
               <a:t>ゾラム</a:t>
             </a:r>
-            <a:endParaRPr lang="ja-JP" sz="1100" dirty="0"/>
+            <a:endParaRPr lang="ja-JP" sz="1200" dirty="0"/>
           </a:p>
         </p:txBody>
       </p:sp>
@@ -4503,12 +4542,12 @@
         </p:nvSpPr>
         <p:spPr>
           <a:xfrm>
-            <a:off x="10707624" y="54864"/>
-            <a:ext cx="621792" cy="585216"/>
+            <a:off x="10277856" y="457200"/>
+            <a:ext cx="685800" cy="585216"/>
           </a:xfrm>
           <a:prstGeom prst="roundRect">
             <a:avLst>
-              <a:gd name="adj" fmla="val 15625"/>
+              <a:gd name="adj" fmla="val 12500"/>
             </a:avLst>
           </a:prstGeom>
           <a:solidFill>
@@ -4517,14 +4556,14 @@
           <a:ln/>
         </p:spPr>
         <p:txBody>
-          <a:bodyPr wrap="square" lIns="0" tIns="0" rIns="0" bIns="0" rtlCol="0" anchor="ctr"/>
+          <a:bodyPr wrap="none" lIns="0" tIns="0" rIns="0" bIns="0" rtlCol="0" anchor="ctr"/>
           <a:lstStyle/>
           <a:p>
             <a:pPr algn="ctr" indent="0" marL="0">
               <a:buNone/>
             </a:pPr>
             <a:r>
-              <a:rPr lang="ja-JP" altLang="en-US" sz="1100" dirty="0">
+              <a:rPr lang="ja-JP" altLang="en-US" sz="1200" dirty="0">
                 <a:solidFill>
                   <a:srgbClr val="404040"/>
                 </a:solidFill>
@@ -4534,14 +4573,14 @@
               </a:rPr>
               <a:t>ミダ・</a:t>
             </a:r>
-            <a:endParaRPr lang="ja-JP" sz="1100" dirty="0"/>
+            <a:endParaRPr lang="ja-JP" sz="1200" dirty="0"/>
           </a:p>
           <a:p>
             <a:pPr algn="ctr" indent="0" marL="0">
               <a:buNone/>
             </a:pPr>
             <a:r>
-              <a:rPr lang="ja-JP" altLang="en-US" sz="1100" dirty="0">
+              <a:rPr lang="ja-JP" altLang="en-US" sz="1200" dirty="0">
                 <a:solidFill>
                   <a:srgbClr val="404040"/>
                 </a:solidFill>
@@ -4551,7 +4590,7 @@
               </a:rPr>
               <a:t>ケタ</a:t>
             </a:r>
-            <a:endParaRPr lang="ja-JP" sz="1100" dirty="0"/>
+            <a:endParaRPr lang="ja-JP" sz="1200" dirty="0"/>
           </a:p>
         </p:txBody>
       </p:sp>
@@ -4563,12 +4602,12 @@
         </p:nvSpPr>
         <p:spPr>
           <a:xfrm>
-            <a:off x="11384280" y="54864"/>
-            <a:ext cx="621792" cy="585216"/>
+            <a:off x="11000232" y="457200"/>
+            <a:ext cx="685800" cy="585216"/>
           </a:xfrm>
           <a:prstGeom prst="roundRect">
             <a:avLst>
-              <a:gd name="adj" fmla="val 15625"/>
+              <a:gd name="adj" fmla="val 12500"/>
             </a:avLst>
           </a:prstGeom>
           <a:solidFill>
@@ -4577,14 +4616,14 @@
           <a:ln/>
         </p:spPr>
         <p:txBody>
-          <a:bodyPr wrap="square" lIns="0" tIns="0" rIns="0" bIns="0" rtlCol="0" anchor="ctr"/>
+          <a:bodyPr wrap="none" lIns="0" tIns="0" rIns="0" bIns="0" rtlCol="0" anchor="ctr"/>
           <a:lstStyle/>
           <a:p>
             <a:pPr algn="ctr" indent="0" marL="0">
               <a:buNone/>
             </a:pPr>
             <a:r>
-              <a:rPr lang="ja-JP" altLang="en-US" sz="1100" dirty="0">
+              <a:rPr lang="ja-JP" altLang="en-US" sz="1200" dirty="0">
                 <a:solidFill>
                   <a:srgbClr val="404040"/>
                 </a:solidFill>
@@ -4594,7 +4633,7 @@
               </a:rPr>
               <a:t>使い分け</a:t>
             </a:r>
-            <a:endParaRPr lang="ja-JP" sz="1100" dirty="0"/>
+            <a:endParaRPr lang="ja-JP" sz="1200" dirty="0"/>
           </a:p>
         </p:txBody>
       </p:sp>
@@ -4606,7 +4645,7 @@
         </p:nvSpPr>
         <p:spPr>
           <a:xfrm>
-            <a:off x="11247120" y="6446520"/>
+            <a:off x="11247120" y="6263640"/>
             <a:ext cx="731520" cy="320040"/>
           </a:xfrm>
           <a:prstGeom prst="rect">
@@ -4646,7 +4685,7 @@
         <p:spPr>
           <a:xfrm>
             <a:off x="502920" y="5943600"/>
-            <a:ext cx="10607040" cy="777240"/>
+            <a:ext cx="10424160" cy="640080"/>
           </a:xfrm>
           <a:prstGeom prst="rect">
             <a:avLst/>
@@ -4702,11 +4741,11 @@
         <p:spPr>
           <a:xfrm>
             <a:off x="502920" y="1691640"/>
-            <a:ext cx="3731423" cy="4032504"/>
+            <a:ext cx="3841151" cy="4032504"/>
           </a:xfrm>
           <a:prstGeom prst="roundRect">
             <a:avLst>
-              <a:gd name="adj" fmla="val 1960"/>
+              <a:gd name="adj" fmla="val 1904"/>
             </a:avLst>
           </a:prstGeom>
           <a:solidFill>
@@ -4723,7 +4762,7 @@
         </p:nvSpPr>
         <p:spPr>
           <a:xfrm>
-            <a:off x="612648" y="1819656"/>
+            <a:off x="667512" y="1819656"/>
             <a:ext cx="3511967" cy="457200"/>
           </a:xfrm>
           <a:prstGeom prst="rect">
@@ -4762,7 +4801,7 @@
         </p:nvSpPr>
         <p:spPr>
           <a:xfrm>
-            <a:off x="612648" y="2386584"/>
+            <a:off x="667512" y="2528316"/>
             <a:ext cx="3511967" cy="420624"/>
           </a:xfrm>
           <a:prstGeom prst="rect">
@@ -4823,7 +4862,7 @@
         </p:nvSpPr>
         <p:spPr>
           <a:xfrm>
-            <a:off x="886968" y="2807208"/>
+            <a:off x="941832" y="2948940"/>
             <a:ext cx="3237647" cy="420624"/>
           </a:xfrm>
           <a:prstGeom prst="rect">
@@ -4862,7 +4901,7 @@
         </p:nvSpPr>
         <p:spPr>
           <a:xfrm>
-            <a:off x="612648" y="3502152"/>
+            <a:off x="667512" y="3781044"/>
             <a:ext cx="3511967" cy="420624"/>
           </a:xfrm>
           <a:prstGeom prst="rect">
@@ -4923,7 +4962,7 @@
         </p:nvSpPr>
         <p:spPr>
           <a:xfrm>
-            <a:off x="886968" y="3922776"/>
+            <a:off x="941832" y="4201668"/>
             <a:ext cx="3237647" cy="420624"/>
           </a:xfrm>
           <a:prstGeom prst="rect">
@@ -4973,7 +5012,7 @@
         </p:nvSpPr>
         <p:spPr>
           <a:xfrm>
-            <a:off x="612648" y="4617720"/>
+            <a:off x="667512" y="5033772"/>
             <a:ext cx="3511967" cy="420624"/>
           </a:xfrm>
           <a:prstGeom prst="rect">
@@ -5012,12 +5051,12 @@
         </p:nvSpPr>
         <p:spPr>
           <a:xfrm>
-            <a:off x="4453799" y="1691640"/>
-            <a:ext cx="3350199" cy="4032504"/>
+            <a:off x="4563527" y="1691640"/>
+            <a:ext cx="3459378" cy="4032504"/>
           </a:xfrm>
           <a:prstGeom prst="roundRect">
             <a:avLst>
-              <a:gd name="adj" fmla="val 2184"/>
+              <a:gd name="adj" fmla="val 2115"/>
             </a:avLst>
           </a:prstGeom>
           <a:solidFill>
@@ -5034,8 +5073,8 @@
         </p:nvSpPr>
         <p:spPr>
           <a:xfrm>
-            <a:off x="4563527" y="1819656"/>
-            <a:ext cx="3130743" cy="457200"/>
+            <a:off x="4728119" y="1819656"/>
+            <a:ext cx="3130194" cy="457200"/>
           </a:xfrm>
           <a:prstGeom prst="rect">
             <a:avLst/>
@@ -5073,8 +5112,8 @@
         </p:nvSpPr>
         <p:spPr>
           <a:xfrm>
-            <a:off x="4563527" y="2386584"/>
-            <a:ext cx="3130743" cy="420624"/>
+            <a:off x="4728119" y="2386584"/>
+            <a:ext cx="3130194" cy="420624"/>
           </a:xfrm>
           <a:prstGeom prst="rect">
             <a:avLst/>
@@ -5112,8 +5151,8 @@
         </p:nvSpPr>
         <p:spPr>
           <a:xfrm>
-            <a:off x="4837847" y="2807208"/>
-            <a:ext cx="2856423" cy="420624"/>
+            <a:off x="5002439" y="2807208"/>
+            <a:ext cx="2855874" cy="420624"/>
           </a:xfrm>
           <a:prstGeom prst="rect">
             <a:avLst/>
@@ -5151,8 +5190,8 @@
         </p:nvSpPr>
         <p:spPr>
           <a:xfrm>
-            <a:off x="4563527" y="3316224"/>
-            <a:ext cx="3130743" cy="420624"/>
+            <a:off x="4728119" y="3316224"/>
+            <a:ext cx="3130194" cy="420624"/>
           </a:xfrm>
           <a:prstGeom prst="rect">
             <a:avLst/>
@@ -5190,8 +5229,8 @@
         </p:nvSpPr>
         <p:spPr>
           <a:xfrm>
-            <a:off x="4837847" y="3736848"/>
-            <a:ext cx="2856423" cy="420624"/>
+            <a:off x="5002439" y="3736848"/>
+            <a:ext cx="2855874" cy="420624"/>
           </a:xfrm>
           <a:prstGeom prst="rect">
             <a:avLst/>
@@ -5229,8 +5268,8 @@
         </p:nvSpPr>
         <p:spPr>
           <a:xfrm>
-            <a:off x="4563527" y="4245864"/>
-            <a:ext cx="3130743" cy="420624"/>
+            <a:off x="4728119" y="4245864"/>
+            <a:ext cx="3130194" cy="420624"/>
           </a:xfrm>
           <a:prstGeom prst="rect">
             <a:avLst/>
@@ -5268,8 +5307,8 @@
         </p:nvSpPr>
         <p:spPr>
           <a:xfrm>
-            <a:off x="4837847" y="4666488"/>
-            <a:ext cx="2856423" cy="420624"/>
+            <a:off x="5002439" y="4666488"/>
+            <a:ext cx="2855874" cy="420624"/>
           </a:xfrm>
           <a:prstGeom prst="rect">
             <a:avLst/>
@@ -5307,8 +5346,8 @@
         </p:nvSpPr>
         <p:spPr>
           <a:xfrm>
-            <a:off x="4563527" y="5175504"/>
-            <a:ext cx="3130743" cy="420624"/>
+            <a:off x="4728119" y="5175504"/>
+            <a:ext cx="3130194" cy="420624"/>
           </a:xfrm>
           <a:prstGeom prst="rect">
             <a:avLst/>
@@ -5346,12 +5385,12 @@
         </p:nvSpPr>
         <p:spPr>
           <a:xfrm>
-            <a:off x="8023454" y="1691640"/>
-            <a:ext cx="3662578" cy="4032504"/>
+            <a:off x="8242361" y="1691640"/>
+            <a:ext cx="3443671" cy="4032504"/>
           </a:xfrm>
           <a:prstGeom prst="roundRect">
             <a:avLst>
-              <a:gd name="adj" fmla="val 1997"/>
+              <a:gd name="adj" fmla="val 2124"/>
             </a:avLst>
           </a:prstGeom>
           <a:solidFill>
@@ -5368,8 +5407,8 @@
         </p:nvSpPr>
         <p:spPr>
           <a:xfrm>
-            <a:off x="8133182" y="1819656"/>
-            <a:ext cx="3443122" cy="457200"/>
+            <a:off x="8406953" y="1819656"/>
+            <a:ext cx="3114487" cy="457200"/>
           </a:xfrm>
           <a:prstGeom prst="rect">
             <a:avLst/>
@@ -5407,8 +5446,8 @@
         </p:nvSpPr>
         <p:spPr>
           <a:xfrm>
-            <a:off x="8133182" y="2386584"/>
-            <a:ext cx="3443122" cy="420624"/>
+            <a:off x="8406953" y="2528316"/>
+            <a:ext cx="3114487" cy="420624"/>
           </a:xfrm>
           <a:prstGeom prst="rect">
             <a:avLst/>
@@ -5432,7 +5471,7 @@
                 <a:ea typeface="メイリオ" pitchFamily="34" charset="-122"/>
                 <a:cs typeface="メイリオ" pitchFamily="34" charset="-120"/>
               </a:rPr>
-              <a:t>リンゲル液で白濁・閉塞</a:t>
+              <a:t>リンゲル液で白濁・</a:t>
             </a:r>
             <a:endParaRPr lang="ja-JP" sz="2200" dirty="0"/>
           </a:p>
@@ -5446,8 +5485,8 @@
         </p:nvSpPr>
         <p:spPr>
           <a:xfrm>
-            <a:off x="8407502" y="2807208"/>
-            <a:ext cx="3168802" cy="420624"/>
+            <a:off x="8681273" y="2948940"/>
+            <a:ext cx="2840167" cy="420624"/>
           </a:xfrm>
           <a:prstGeom prst="rect">
             <a:avLst/>
@@ -5471,7 +5510,7 @@
                 <a:ea typeface="メイリオ" pitchFamily="34" charset="-122"/>
                 <a:cs typeface="メイリオ" pitchFamily="34" charset="-120"/>
               </a:rPr>
-              <a:t>（配合変化）</a:t>
+              <a:t>閉塞（配合変化）</a:t>
             </a:r>
             <a:endParaRPr lang="ja-JP" sz="2200" dirty="0"/>
           </a:p>
@@ -5485,8 +5524,8 @@
         </p:nvSpPr>
         <p:spPr>
           <a:xfrm>
-            <a:off x="8133182" y="3502152"/>
-            <a:ext cx="3443122" cy="420624"/>
+            <a:off x="8406953" y="3781044"/>
+            <a:ext cx="3114487" cy="420624"/>
           </a:xfrm>
           <a:prstGeom prst="rect">
             <a:avLst/>
@@ -5510,7 +5549,7 @@
                 <a:ea typeface="メイリオ" pitchFamily="34" charset="-122"/>
                 <a:cs typeface="メイリオ" pitchFamily="34" charset="-120"/>
               </a:rPr>
-              <a:t>覚醒が遅れることがある</a:t>
+              <a:t>覚醒が遅れる</a:t>
             </a:r>
             <a:endParaRPr lang="ja-JP" sz="2200" dirty="0"/>
           </a:p>
@@ -5524,8 +5563,47 @@
         </p:nvSpPr>
         <p:spPr>
           <a:xfrm>
-            <a:off x="8133182" y="4197096"/>
-            <a:ext cx="3443122" cy="420624"/>
+            <a:off x="8681273" y="4201668"/>
+            <a:ext cx="2840167" cy="420624"/>
+          </a:xfrm>
+          <a:prstGeom prst="rect">
+            <a:avLst/>
+          </a:prstGeom>
+          <a:noFill/>
+          <a:ln/>
+        </p:spPr>
+        <p:txBody>
+          <a:bodyPr wrap="square" lIns="0" tIns="0" rIns="0" bIns="0" rtlCol="0" anchor="t"/>
+          <a:lstStyle/>
+          <a:p>
+            <a:pPr algn="l" indent="0" marL="0">
+              <a:buNone/>
+            </a:pPr>
+            <a:r>
+              <a:rPr lang="ja-JP" altLang="en-US" sz="2200" dirty="0">
+                <a:solidFill>
+                  <a:srgbClr val="262626"/>
+                </a:solidFill>
+                <a:latin typeface="メイリオ" pitchFamily="34" charset="0"/>
+                <a:ea typeface="メイリオ" pitchFamily="34" charset="-122"/>
+                <a:cs typeface="メイリオ" pitchFamily="34" charset="-120"/>
+              </a:rPr>
+              <a:t>ことがある</a:t>
+            </a:r>
+            <a:endParaRPr lang="ja-JP" sz="2200" dirty="0"/>
+          </a:p>
+        </p:txBody>
+      </p:sp>
+      <p:sp>
+        <p:nvSpPr>
+          <p:cNvPr id="33" name="Text 31"/>
+          <p:cNvSpPr txBox="1"/>
+          <p:nvPr/>
+        </p:nvSpPr>
+        <p:spPr>
+          <a:xfrm>
+            <a:off x="8406953" y="5033772"/>
+            <a:ext cx="3114487" cy="420624"/>
           </a:xfrm>
           <a:prstGeom prst="rect">
             <a:avLst/>
@@ -5593,7 +5671,7 @@
         <p:spPr>
           <a:xfrm>
             <a:off x="502920" y="320040"/>
-            <a:ext cx="8503920" cy="868680"/>
+            <a:ext cx="7562088" cy="868680"/>
           </a:xfrm>
           <a:prstGeom prst="rect">
             <a:avLst/>
@@ -5659,12 +5737,12 @@
         </p:nvSpPr>
         <p:spPr>
           <a:xfrm>
-            <a:off x="8677656" y="54864"/>
-            <a:ext cx="621792" cy="585216"/>
+            <a:off x="8110728" y="457200"/>
+            <a:ext cx="685800" cy="585216"/>
           </a:xfrm>
           <a:prstGeom prst="roundRect">
             <a:avLst>
-              <a:gd name="adj" fmla="val 15625"/>
+              <a:gd name="adj" fmla="val 12500"/>
             </a:avLst>
           </a:prstGeom>
           <a:solidFill>
@@ -5673,14 +5751,14 @@
           <a:ln/>
         </p:spPr>
         <p:txBody>
-          <a:bodyPr wrap="square" lIns="0" tIns="0" rIns="0" bIns="0" rtlCol="0" anchor="ctr"/>
+          <a:bodyPr wrap="none" lIns="0" tIns="0" rIns="0" bIns="0" rtlCol="0" anchor="ctr"/>
           <a:lstStyle/>
           <a:p>
             <a:pPr algn="ctr" indent="0" marL="0">
               <a:buNone/>
             </a:pPr>
             <a:r>
-              <a:rPr lang="ja-JP" altLang="en-US" sz="1100" dirty="0">
+              <a:rPr lang="ja-JP" altLang="en-US" sz="1200" dirty="0">
                 <a:solidFill>
                   <a:srgbClr val="404040"/>
                 </a:solidFill>
@@ -5690,7 +5768,7 @@
               </a:rPr>
               <a:t>共通</a:t>
             </a:r>
-            <a:endParaRPr lang="ja-JP" sz="1100" dirty="0"/>
+            <a:endParaRPr lang="ja-JP" sz="1200" dirty="0"/>
           </a:p>
         </p:txBody>
       </p:sp>
@@ -5702,12 +5780,12 @@
         </p:nvSpPr>
         <p:spPr>
           <a:xfrm>
-            <a:off x="9354312" y="54864"/>
-            <a:ext cx="621792" cy="585216"/>
+            <a:off x="8833104" y="457200"/>
+            <a:ext cx="685800" cy="585216"/>
           </a:xfrm>
           <a:prstGeom prst="roundRect">
             <a:avLst>
-              <a:gd name="adj" fmla="val 15625"/>
+              <a:gd name="adj" fmla="val 12500"/>
             </a:avLst>
           </a:prstGeom>
           <a:solidFill>
@@ -5716,14 +5794,14 @@
           <a:ln/>
         </p:spPr>
         <p:txBody>
-          <a:bodyPr wrap="square" lIns="0" tIns="0" rIns="0" bIns="0" rtlCol="0" anchor="ctr"/>
+          <a:bodyPr wrap="none" lIns="0" tIns="0" rIns="0" bIns="0" rtlCol="0" anchor="ctr"/>
           <a:lstStyle/>
           <a:p>
             <a:pPr algn="ctr" indent="0" marL="0">
               <a:buNone/>
             </a:pPr>
             <a:r>
-              <a:rPr lang="ja-JP" altLang="en-US" sz="1100" dirty="0">
+              <a:rPr lang="ja-JP" altLang="en-US" sz="1200" dirty="0">
                 <a:solidFill>
                   <a:srgbClr val="404040"/>
                 </a:solidFill>
@@ -5733,14 +5811,14 @@
               </a:rPr>
               <a:t>プロポ</a:t>
             </a:r>
-            <a:endParaRPr lang="ja-JP" sz="1100" dirty="0"/>
+            <a:endParaRPr lang="ja-JP" sz="1200" dirty="0"/>
           </a:p>
           <a:p>
             <a:pPr algn="ctr" indent="0" marL="0">
               <a:buNone/>
             </a:pPr>
             <a:r>
-              <a:rPr lang="ja-JP" altLang="en-US" sz="1100" dirty="0">
+              <a:rPr lang="ja-JP" altLang="en-US" sz="1200" dirty="0">
                 <a:solidFill>
                   <a:srgbClr val="404040"/>
                 </a:solidFill>
@@ -5750,7 +5828,7 @@
               </a:rPr>
               <a:t>フォール</a:t>
             </a:r>
-            <a:endParaRPr lang="ja-JP" sz="1100" dirty="0"/>
+            <a:endParaRPr lang="ja-JP" sz="1200" dirty="0"/>
           </a:p>
         </p:txBody>
       </p:sp>
@@ -5762,12 +5840,12 @@
         </p:nvSpPr>
         <p:spPr>
           <a:xfrm>
-            <a:off x="10030968" y="54864"/>
-            <a:ext cx="621792" cy="585216"/>
+            <a:off x="9555480" y="457200"/>
+            <a:ext cx="685800" cy="585216"/>
           </a:xfrm>
           <a:prstGeom prst="roundRect">
             <a:avLst>
-              <a:gd name="adj" fmla="val 15625"/>
+              <a:gd name="adj" fmla="val 12500"/>
             </a:avLst>
           </a:prstGeom>
           <a:solidFill>
@@ -5776,14 +5854,14 @@
           <a:ln/>
         </p:spPr>
         <p:txBody>
-          <a:bodyPr wrap="square" lIns="0" tIns="0" rIns="0" bIns="0" rtlCol="0" anchor="ctr"/>
+          <a:bodyPr wrap="none" lIns="0" tIns="0" rIns="0" bIns="0" rtlCol="0" anchor="ctr"/>
           <a:lstStyle/>
           <a:p>
             <a:pPr algn="ctr" indent="0" marL="0">
               <a:buNone/>
             </a:pPr>
             <a:r>
-              <a:rPr lang="ja-JP" altLang="en-US" sz="1100" dirty="0">
+              <a:rPr lang="ja-JP" altLang="en-US" sz="1200" dirty="0">
                 <a:solidFill>
                   <a:srgbClr val="404040"/>
                 </a:solidFill>
@@ -5793,14 +5871,14 @@
               </a:rPr>
               <a:t>レミマ</a:t>
             </a:r>
-            <a:endParaRPr lang="ja-JP" sz="1100" dirty="0"/>
+            <a:endParaRPr lang="ja-JP" sz="1200" dirty="0"/>
           </a:p>
           <a:p>
             <a:pPr algn="ctr" indent="0" marL="0">
               <a:buNone/>
             </a:pPr>
             <a:r>
-              <a:rPr lang="ja-JP" altLang="en-US" sz="1100" dirty="0">
+              <a:rPr lang="ja-JP" altLang="en-US" sz="1200" dirty="0">
                 <a:solidFill>
                   <a:srgbClr val="404040"/>
                 </a:solidFill>
@@ -5810,7 +5888,7 @@
               </a:rPr>
               <a:t>ゾラム</a:t>
             </a:r>
-            <a:endParaRPr lang="ja-JP" sz="1100" dirty="0"/>
+            <a:endParaRPr lang="ja-JP" sz="1200" dirty="0"/>
           </a:p>
         </p:txBody>
       </p:sp>
@@ -5822,28 +5900,28 @@
         </p:nvSpPr>
         <p:spPr>
           <a:xfrm>
-            <a:off x="10707624" y="54864"/>
-            <a:ext cx="621792" cy="585216"/>
+            <a:off x="10277856" y="457200"/>
+            <a:ext cx="685800" cy="585216"/>
           </a:xfrm>
           <a:prstGeom prst="roundRect">
             <a:avLst>
-              <a:gd name="adj" fmla="val 15625"/>
+              <a:gd name="adj" fmla="val 12500"/>
             </a:avLst>
           </a:prstGeom>
           <a:solidFill>
-            <a:srgbClr val="00A8AA"/>
+            <a:srgbClr val="007C80"/>
           </a:solidFill>
           <a:ln/>
         </p:spPr>
         <p:txBody>
-          <a:bodyPr wrap="square" lIns="0" tIns="0" rIns="0" bIns="0" rtlCol="0" anchor="ctr"/>
+          <a:bodyPr wrap="none" lIns="0" tIns="0" rIns="0" bIns="0" rtlCol="0" anchor="ctr"/>
           <a:lstStyle/>
           <a:p>
             <a:pPr algn="ctr" indent="0" marL="0">
               <a:buNone/>
             </a:pPr>
             <a:r>
-              <a:rPr lang="ja-JP" altLang="en-US" sz="1100" b="1" dirty="0">
+              <a:rPr lang="ja-JP" altLang="en-US" sz="1200" b="1" dirty="0">
                 <a:solidFill>
                   <a:srgbClr val="FFFFFF"/>
                 </a:solidFill>
@@ -5853,14 +5931,14 @@
               </a:rPr>
               <a:t>ミダ・</a:t>
             </a:r>
-            <a:endParaRPr lang="ja-JP" sz="1100" dirty="0"/>
+            <a:endParaRPr lang="ja-JP" sz="1200" dirty="0"/>
           </a:p>
           <a:p>
             <a:pPr algn="ctr" indent="0" marL="0">
               <a:buNone/>
             </a:pPr>
             <a:r>
-              <a:rPr lang="ja-JP" altLang="en-US" sz="1100" b="1" dirty="0">
+              <a:rPr lang="ja-JP" altLang="en-US" sz="1200" b="1" dirty="0">
                 <a:solidFill>
                   <a:srgbClr val="FFFFFF"/>
                 </a:solidFill>
@@ -5870,7 +5948,7 @@
               </a:rPr>
               <a:t>ケタ</a:t>
             </a:r>
-            <a:endParaRPr lang="ja-JP" sz="1100" dirty="0"/>
+            <a:endParaRPr lang="ja-JP" sz="1200" dirty="0"/>
           </a:p>
         </p:txBody>
       </p:sp>
@@ -5882,12 +5960,12 @@
         </p:nvSpPr>
         <p:spPr>
           <a:xfrm>
-            <a:off x="11384280" y="54864"/>
-            <a:ext cx="621792" cy="585216"/>
+            <a:off x="11000232" y="457200"/>
+            <a:ext cx="685800" cy="585216"/>
           </a:xfrm>
           <a:prstGeom prst="roundRect">
             <a:avLst>
-              <a:gd name="adj" fmla="val 15625"/>
+              <a:gd name="adj" fmla="val 12500"/>
             </a:avLst>
           </a:prstGeom>
           <a:solidFill>
@@ -5896,14 +5974,14 @@
           <a:ln/>
         </p:spPr>
         <p:txBody>
-          <a:bodyPr wrap="square" lIns="0" tIns="0" rIns="0" bIns="0" rtlCol="0" anchor="ctr"/>
+          <a:bodyPr wrap="none" lIns="0" tIns="0" rIns="0" bIns="0" rtlCol="0" anchor="ctr"/>
           <a:lstStyle/>
           <a:p>
             <a:pPr algn="ctr" indent="0" marL="0">
               <a:buNone/>
             </a:pPr>
             <a:r>
-              <a:rPr lang="ja-JP" altLang="en-US" sz="1100" dirty="0">
+              <a:rPr lang="ja-JP" altLang="en-US" sz="1200" dirty="0">
                 <a:solidFill>
                   <a:srgbClr val="404040"/>
                 </a:solidFill>
@@ -5913,7 +5991,7 @@
               </a:rPr>
               <a:t>使い分け</a:t>
             </a:r>
-            <a:endParaRPr lang="ja-JP" sz="1100" dirty="0"/>
+            <a:endParaRPr lang="ja-JP" sz="1200" dirty="0"/>
           </a:p>
         </p:txBody>
       </p:sp>
@@ -5925,7 +6003,7 @@
         </p:nvSpPr>
         <p:spPr>
           <a:xfrm>
-            <a:off x="11247120" y="6446520"/>
+            <a:off x="11247120" y="6263640"/>
             <a:ext cx="731520" cy="320040"/>
           </a:xfrm>
           <a:prstGeom prst="rect">
@@ -5965,7 +6043,7 @@
         <p:spPr>
           <a:xfrm>
             <a:off x="502920" y="5943600"/>
-            <a:ext cx="10607040" cy="777240"/>
+            <a:ext cx="10424160" cy="640080"/>
           </a:xfrm>
           <a:prstGeom prst="rect">
             <a:avLst/>
@@ -6021,11 +6099,11 @@
         <p:spPr>
           <a:xfrm>
             <a:off x="502920" y="1691640"/>
-            <a:ext cx="3899347" cy="4032504"/>
+            <a:ext cx="4009075" cy="4032504"/>
           </a:xfrm>
           <a:prstGeom prst="roundRect">
             <a:avLst>
-              <a:gd name="adj" fmla="val 1876"/>
+              <a:gd name="adj" fmla="val 1825"/>
             </a:avLst>
           </a:prstGeom>
           <a:solidFill>
@@ -6042,7 +6120,7 @@
         </p:nvSpPr>
         <p:spPr>
           <a:xfrm>
-            <a:off x="612648" y="1819656"/>
+            <a:off x="667512" y="1819656"/>
             <a:ext cx="3679891" cy="457200"/>
           </a:xfrm>
           <a:prstGeom prst="rect">
@@ -6081,7 +6159,7 @@
         </p:nvSpPr>
         <p:spPr>
           <a:xfrm>
-            <a:off x="612648" y="2386584"/>
+            <a:off x="667512" y="2386584"/>
             <a:ext cx="3679891" cy="420624"/>
           </a:xfrm>
           <a:prstGeom prst="rect">
@@ -6120,7 +6198,7 @@
         </p:nvSpPr>
         <p:spPr>
           <a:xfrm>
-            <a:off x="886968" y="2807208"/>
+            <a:off x="941832" y="2807208"/>
             <a:ext cx="3405571" cy="420624"/>
           </a:xfrm>
           <a:prstGeom prst="rect">
@@ -6170,7 +6248,7 @@
         </p:nvSpPr>
         <p:spPr>
           <a:xfrm>
-            <a:off x="612648" y="3502152"/>
+            <a:off x="667512" y="3570732"/>
             <a:ext cx="3679891" cy="420624"/>
           </a:xfrm>
           <a:prstGeom prst="rect">
@@ -6209,7 +6287,7 @@
         </p:nvSpPr>
         <p:spPr>
           <a:xfrm>
-            <a:off x="886968" y="3922776"/>
+            <a:off x="941832" y="3991356"/>
             <a:ext cx="3405571" cy="420624"/>
           </a:xfrm>
           <a:prstGeom prst="rect">
@@ -6259,7 +6337,7 @@
         </p:nvSpPr>
         <p:spPr>
           <a:xfrm>
-            <a:off x="612648" y="4617720"/>
+            <a:off x="667512" y="4754880"/>
             <a:ext cx="3679891" cy="420624"/>
           </a:xfrm>
           <a:prstGeom prst="rect">
@@ -6298,7 +6376,7 @@
         </p:nvSpPr>
         <p:spPr>
           <a:xfrm>
-            <a:off x="886968" y="5038344"/>
+            <a:off x="941832" y="5175504"/>
             <a:ext cx="3405571" cy="420624"/>
           </a:xfrm>
           <a:prstGeom prst="rect">
@@ -6337,12 +6415,12 @@
         </p:nvSpPr>
         <p:spPr>
           <a:xfrm>
-            <a:off x="4621723" y="1691640"/>
-            <a:ext cx="2869347" cy="4032504"/>
+            <a:off x="4731451" y="1691640"/>
+            <a:ext cx="2649891" cy="4032504"/>
           </a:xfrm>
           <a:prstGeom prst="roundRect">
             <a:avLst>
-              <a:gd name="adj" fmla="val 2549"/>
+              <a:gd name="adj" fmla="val 2761"/>
             </a:avLst>
           </a:prstGeom>
           <a:solidFill>
@@ -6359,8 +6437,8 @@
         </p:nvSpPr>
         <p:spPr>
           <a:xfrm>
-            <a:off x="4731451" y="1819656"/>
-            <a:ext cx="2649891" cy="457200"/>
+            <a:off x="4896043" y="1819656"/>
+            <a:ext cx="2320707" cy="457200"/>
           </a:xfrm>
           <a:prstGeom prst="rect">
             <a:avLst/>
@@ -6398,8 +6476,8 @@
         </p:nvSpPr>
         <p:spPr>
           <a:xfrm>
-            <a:off x="4731451" y="2386584"/>
-            <a:ext cx="2649891" cy="420624"/>
+            <a:off x="4896043" y="2738628"/>
+            <a:ext cx="2320707" cy="420624"/>
           </a:xfrm>
           <a:prstGeom prst="rect">
             <a:avLst/>
@@ -6437,8 +6515,8 @@
         </p:nvSpPr>
         <p:spPr>
           <a:xfrm>
-            <a:off x="4731451" y="3081528"/>
-            <a:ext cx="2649891" cy="420624"/>
+            <a:off x="4896043" y="3570732"/>
+            <a:ext cx="2320707" cy="420624"/>
           </a:xfrm>
           <a:prstGeom prst="rect">
             <a:avLst/>
@@ -6476,8 +6554,8 @@
         </p:nvSpPr>
         <p:spPr>
           <a:xfrm>
-            <a:off x="4731451" y="3776472"/>
-            <a:ext cx="2649891" cy="420624"/>
+            <a:off x="4896043" y="4402836"/>
+            <a:ext cx="2320707" cy="420624"/>
           </a:xfrm>
           <a:prstGeom prst="rect">
             <a:avLst/>
@@ -6501,7 +6579,7 @@
                 <a:ea typeface="メイリオ" pitchFamily="34" charset="-122"/>
                 <a:cs typeface="メイリオ" pitchFamily="34" charset="-120"/>
               </a:rPr>
-              <a:t>肝代謝（CYP3A4）</a:t>
+              <a:t>肝代謝</a:t>
             </a:r>
             <a:endParaRPr lang="ja-JP" sz="2200" dirty="0"/>
           </a:p>
@@ -6509,18 +6587,57 @@
       </p:sp>
       <p:sp>
         <p:nvSpPr>
-          <p:cNvPr id="24" name="Shape 22"/>
+          <p:cNvPr id="24" name="Text 22"/>
+          <p:cNvSpPr txBox="1"/>
+          <p:nvPr/>
+        </p:nvSpPr>
+        <p:spPr>
+          <a:xfrm>
+            <a:off x="5170363" y="4823460"/>
+            <a:ext cx="2046387" cy="420624"/>
+          </a:xfrm>
+          <a:prstGeom prst="rect">
+            <a:avLst/>
+          </a:prstGeom>
+          <a:noFill/>
+          <a:ln/>
+        </p:spPr>
+        <p:txBody>
+          <a:bodyPr wrap="square" lIns="0" tIns="0" rIns="0" bIns="0" rtlCol="0" anchor="t"/>
+          <a:lstStyle/>
+          <a:p>
+            <a:pPr algn="l" indent="0" marL="0">
+              <a:buNone/>
+            </a:pPr>
+            <a:r>
+              <a:rPr lang="ja-JP" altLang="en-US" sz="2200" dirty="0">
+                <a:solidFill>
+                  <a:srgbClr val="262626"/>
+                </a:solidFill>
+                <a:latin typeface="メイリオ" pitchFamily="34" charset="0"/>
+                <a:ea typeface="メイリオ" pitchFamily="34" charset="-122"/>
+                <a:cs typeface="メイリオ" pitchFamily="34" charset="-120"/>
+              </a:rPr>
+              <a:t>（CYP3A4）</a:t>
+            </a:r>
+            <a:endParaRPr lang="ja-JP" sz="2200" dirty="0"/>
+          </a:p>
+        </p:txBody>
+      </p:sp>
+      <p:sp>
+        <p:nvSpPr>
+          <p:cNvPr id="25" name="Shape 23"/>
           <p:cNvSpPr/>
           <p:nvPr/>
         </p:nvSpPr>
         <p:spPr>
           <a:xfrm>
-            <a:off x="7710526" y="1691640"/>
-            <a:ext cx="3975506" cy="4032504"/>
+            <a:off x="7600798" y="1691640"/>
+            <a:ext cx="4085234" cy="4032504"/>
           </a:xfrm>
           <a:prstGeom prst="roundRect">
             <a:avLst>
-              <a:gd name="adj" fmla="val 1840"/>
+              <a:gd name="adj" fmla="val 1814"/>
             </a:avLst>
           </a:prstGeom>
           <a:solidFill>
@@ -6531,53 +6648,14 @@
       </p:sp>
       <p:sp>
         <p:nvSpPr>
-          <p:cNvPr id="25" name="Text 23"/>
-          <p:cNvSpPr txBox="1"/>
-          <p:nvPr/>
-        </p:nvSpPr>
-        <p:spPr>
-          <a:xfrm>
-            <a:off x="7820254" y="1819656"/>
-            <a:ext cx="3756050" cy="457200"/>
-          </a:xfrm>
-          <a:prstGeom prst="rect">
-            <a:avLst/>
-          </a:prstGeom>
-          <a:noFill/>
-          <a:ln/>
-        </p:spPr>
-        <p:txBody>
-          <a:bodyPr wrap="square" lIns="0" tIns="0" rIns="0" bIns="0" rtlCol="0" anchor="t"/>
-          <a:lstStyle/>
-          <a:p>
-            <a:pPr algn="l" indent="0" marL="0">
-              <a:buNone/>
-            </a:pPr>
-            <a:r>
-              <a:rPr lang="ja-JP" altLang="en-US" sz="2400" b="1" dirty="0">
-                <a:solidFill>
-                  <a:srgbClr val="D55E00"/>
-                </a:solidFill>
-                <a:latin typeface="メイリオ" pitchFamily="34" charset="0"/>
-                <a:ea typeface="メイリオ" pitchFamily="34" charset="-122"/>
-                <a:cs typeface="メイリオ" pitchFamily="34" charset="-120"/>
-              </a:rPr>
-              <a:t>注意</a:t>
-            </a:r>
-            <a:endParaRPr lang="ja-JP" sz="2400" dirty="0"/>
-          </a:p>
-        </p:txBody>
-      </p:sp>
-      <p:sp>
-        <p:nvSpPr>
           <p:cNvPr id="26" name="Text 24"/>
           <p:cNvSpPr txBox="1"/>
           <p:nvPr/>
         </p:nvSpPr>
         <p:spPr>
           <a:xfrm>
-            <a:off x="7820254" y="2386584"/>
-            <a:ext cx="3756050" cy="420624"/>
+            <a:off x="7765390" y="1819656"/>
+            <a:ext cx="3756050" cy="457200"/>
           </a:xfrm>
           <a:prstGeom prst="rect">
             <a:avLst/>
@@ -6593,17 +6671,17 @@
               <a:buNone/>
             </a:pPr>
             <a:r>
-              <a:rPr lang="ja-JP" altLang="en-US" sz="2200" dirty="0">
-                <a:solidFill>
-                  <a:srgbClr val="262626"/>
-                </a:solidFill>
-                <a:latin typeface="メイリオ" pitchFamily="34" charset="0"/>
-                <a:ea typeface="メイリオ" pitchFamily="34" charset="-122"/>
-                <a:cs typeface="メイリオ" pitchFamily="34" charset="-120"/>
-              </a:rPr>
-              <a:t>オピオイド併用で呼吸抑制</a:t>
-            </a:r>
-            <a:endParaRPr lang="ja-JP" sz="2200" dirty="0"/>
+              <a:rPr lang="ja-JP" altLang="en-US" sz="2400" b="1" dirty="0">
+                <a:solidFill>
+                  <a:srgbClr val="D55E00"/>
+                </a:solidFill>
+                <a:latin typeface="メイリオ" pitchFamily="34" charset="0"/>
+                <a:ea typeface="メイリオ" pitchFamily="34" charset="-122"/>
+                <a:cs typeface="メイリオ" pitchFamily="34" charset="-120"/>
+              </a:rPr>
+              <a:t>注意</a:t>
+            </a:r>
+            <a:endParaRPr lang="ja-JP" sz="2400" dirty="0"/>
           </a:p>
         </p:txBody>
       </p:sp>
@@ -6615,7 +6693,7 @@
         </p:nvSpPr>
         <p:spPr>
           <a:xfrm>
-            <a:off x="7820254" y="3081528"/>
+            <a:off x="7765390" y="2386584"/>
             <a:ext cx="3756050" cy="420624"/>
           </a:xfrm>
           <a:prstGeom prst="rect">
@@ -6640,7 +6718,7 @@
                 <a:ea typeface="メイリオ" pitchFamily="34" charset="-122"/>
                 <a:cs typeface="メイリオ" pitchFamily="34" charset="-120"/>
               </a:rPr>
-              <a:t>高齢者は少量から</a:t>
+              <a:t>オピオイド併用で呼吸抑制</a:t>
             </a:r>
             <a:endParaRPr lang="ja-JP" sz="2200" dirty="0"/>
           </a:p>
@@ -6654,7 +6732,7 @@
         </p:nvSpPr>
         <p:spPr>
           <a:xfrm>
-            <a:off x="7820254" y="3776472"/>
+            <a:off x="7765390" y="3176016"/>
             <a:ext cx="3756050" cy="420624"/>
           </a:xfrm>
           <a:prstGeom prst="rect">
@@ -6679,7 +6757,7 @@
                 <a:ea typeface="メイリオ" pitchFamily="34" charset="-122"/>
                 <a:cs typeface="メイリオ" pitchFamily="34" charset="-120"/>
               </a:rPr>
-              <a:t>フルマゼニルで拮抗</a:t>
+              <a:t>高齢者は少量から</a:t>
             </a:r>
             <a:endParaRPr lang="ja-JP" sz="2200" dirty="0"/>
           </a:p>
@@ -6693,7 +6771,7 @@
         </p:nvSpPr>
         <p:spPr>
           <a:xfrm>
-            <a:off x="7820254" y="4471416"/>
+            <a:off x="7765390" y="3965448"/>
             <a:ext cx="3756050" cy="420624"/>
           </a:xfrm>
           <a:prstGeom prst="rect">
@@ -6710,17 +6788,6 @@
               <a:buNone/>
             </a:pPr>
             <a:r>
-              <a:rPr lang="ja-JP" altLang="en-US" sz="2200" b="1" dirty="0">
-                <a:solidFill>
-                  <a:srgbClr val="C00000"/>
-                </a:solidFill>
-                <a:latin typeface="メイリオ" pitchFamily="34" charset="0"/>
-                <a:ea typeface="メイリオ" pitchFamily="34" charset="-122"/>
-                <a:cs typeface="メイリオ" pitchFamily="34" charset="-120"/>
-              </a:rPr>
-              <a:t>併用禁忌</a:t>
-            </a:r>
-            <a:r>
               <a:rPr lang="ja-JP" altLang="en-US" sz="2200" dirty="0">
                 <a:solidFill>
                   <a:srgbClr val="262626"/>
@@ -6729,7 +6796,7 @@
                 <a:ea typeface="メイリオ" pitchFamily="34" charset="-122"/>
                 <a:cs typeface="メイリオ" pitchFamily="34" charset="-120"/>
               </a:rPr>
-              <a:t>：</a:t>
+              <a:t>フルマゼニルで拮抗</a:t>
             </a:r>
             <a:endParaRPr lang="ja-JP" sz="2200" dirty="0"/>
           </a:p>
@@ -6743,7 +6810,57 @@
         </p:nvSpPr>
         <p:spPr>
           <a:xfrm>
-            <a:off x="8094574" y="4892040"/>
+            <a:off x="7765390" y="4754880"/>
+            <a:ext cx="3756050" cy="420624"/>
+          </a:xfrm>
+          <a:prstGeom prst="rect">
+            <a:avLst/>
+          </a:prstGeom>
+          <a:noFill/>
+          <a:ln/>
+        </p:spPr>
+        <p:txBody>
+          <a:bodyPr wrap="square" lIns="0" tIns="0" rIns="0" bIns="0" rtlCol="0" anchor="t"/>
+          <a:lstStyle/>
+          <a:p>
+            <a:pPr algn="l" indent="0" marL="0">
+              <a:buNone/>
+            </a:pPr>
+            <a:r>
+              <a:rPr lang="ja-JP" altLang="en-US" sz="2200" b="1" dirty="0">
+                <a:solidFill>
+                  <a:srgbClr val="C00000"/>
+                </a:solidFill>
+                <a:latin typeface="メイリオ" pitchFamily="34" charset="0"/>
+                <a:ea typeface="メイリオ" pitchFamily="34" charset="-122"/>
+                <a:cs typeface="メイリオ" pitchFamily="34" charset="-120"/>
+              </a:rPr>
+              <a:t>併用禁忌</a:t>
+            </a:r>
+            <a:r>
+              <a:rPr lang="ja-JP" altLang="en-US" sz="2200" dirty="0">
+                <a:solidFill>
+                  <a:srgbClr val="262626"/>
+                </a:solidFill>
+                <a:latin typeface="メイリオ" pitchFamily="34" charset="0"/>
+                <a:ea typeface="メイリオ" pitchFamily="34" charset="-122"/>
+                <a:cs typeface="メイリオ" pitchFamily="34" charset="-120"/>
+              </a:rPr>
+              <a:t>：</a:t>
+            </a:r>
+            <a:endParaRPr lang="ja-JP" sz="2200" dirty="0"/>
+          </a:p>
+        </p:txBody>
+      </p:sp>
+      <p:sp>
+        <p:nvSpPr>
+          <p:cNvPr id="31" name="Text 29"/>
+          <p:cNvSpPr txBox="1"/>
+          <p:nvPr/>
+        </p:nvSpPr>
+        <p:spPr>
+          <a:xfrm>
+            <a:off x="8039710" y="5175504"/>
             <a:ext cx="3481730" cy="420624"/>
           </a:xfrm>
           <a:prstGeom prst="rect">
@@ -6812,7 +6929,7 @@
         <p:spPr>
           <a:xfrm>
             <a:off x="502920" y="320040"/>
-            <a:ext cx="8503920" cy="868680"/>
+            <a:ext cx="7562088" cy="868680"/>
           </a:xfrm>
           <a:prstGeom prst="rect">
             <a:avLst/>
@@ -6878,12 +6995,12 @@
         </p:nvSpPr>
         <p:spPr>
           <a:xfrm>
-            <a:off x="8677656" y="54864"/>
-            <a:ext cx="621792" cy="585216"/>
+            <a:off x="8110728" y="457200"/>
+            <a:ext cx="685800" cy="585216"/>
           </a:xfrm>
           <a:prstGeom prst="roundRect">
             <a:avLst>
-              <a:gd name="adj" fmla="val 15625"/>
+              <a:gd name="adj" fmla="val 12500"/>
             </a:avLst>
           </a:prstGeom>
           <a:solidFill>
@@ -6892,14 +7009,14 @@
           <a:ln/>
         </p:spPr>
         <p:txBody>
-          <a:bodyPr wrap="square" lIns="0" tIns="0" rIns="0" bIns="0" rtlCol="0" anchor="ctr"/>
+          <a:bodyPr wrap="none" lIns="0" tIns="0" rIns="0" bIns="0" rtlCol="0" anchor="ctr"/>
           <a:lstStyle/>
           <a:p>
             <a:pPr algn="ctr" indent="0" marL="0">
               <a:buNone/>
             </a:pPr>
             <a:r>
-              <a:rPr lang="ja-JP" altLang="en-US" sz="1100" dirty="0">
+              <a:rPr lang="ja-JP" altLang="en-US" sz="1200" dirty="0">
                 <a:solidFill>
                   <a:srgbClr val="404040"/>
                 </a:solidFill>
@@ -6909,7 +7026,7 @@
               </a:rPr>
               <a:t>共通</a:t>
             </a:r>
-            <a:endParaRPr lang="ja-JP" sz="1100" dirty="0"/>
+            <a:endParaRPr lang="ja-JP" sz="1200" dirty="0"/>
           </a:p>
         </p:txBody>
       </p:sp>
@@ -6921,12 +7038,12 @@
         </p:nvSpPr>
         <p:spPr>
           <a:xfrm>
-            <a:off x="9354312" y="54864"/>
-            <a:ext cx="621792" cy="585216"/>
+            <a:off x="8833104" y="457200"/>
+            <a:ext cx="685800" cy="585216"/>
           </a:xfrm>
           <a:prstGeom prst="roundRect">
             <a:avLst>
-              <a:gd name="adj" fmla="val 15625"/>
+              <a:gd name="adj" fmla="val 12500"/>
             </a:avLst>
           </a:prstGeom>
           <a:solidFill>
@@ -6935,14 +7052,14 @@
           <a:ln/>
         </p:spPr>
         <p:txBody>
-          <a:bodyPr wrap="square" lIns="0" tIns="0" rIns="0" bIns="0" rtlCol="0" anchor="ctr"/>
+          <a:bodyPr wrap="none" lIns="0" tIns="0" rIns="0" bIns="0" rtlCol="0" anchor="ctr"/>
           <a:lstStyle/>
           <a:p>
             <a:pPr algn="ctr" indent="0" marL="0">
               <a:buNone/>
             </a:pPr>
             <a:r>
-              <a:rPr lang="ja-JP" altLang="en-US" sz="1100" dirty="0">
+              <a:rPr lang="ja-JP" altLang="en-US" sz="1200" dirty="0">
                 <a:solidFill>
                   <a:srgbClr val="404040"/>
                 </a:solidFill>
@@ -6952,14 +7069,14 @@
               </a:rPr>
               <a:t>プロポ</a:t>
             </a:r>
-            <a:endParaRPr lang="ja-JP" sz="1100" dirty="0"/>
+            <a:endParaRPr lang="ja-JP" sz="1200" dirty="0"/>
           </a:p>
           <a:p>
             <a:pPr algn="ctr" indent="0" marL="0">
               <a:buNone/>
             </a:pPr>
             <a:r>
-              <a:rPr lang="ja-JP" altLang="en-US" sz="1100" dirty="0">
+              <a:rPr lang="ja-JP" altLang="en-US" sz="1200" dirty="0">
                 <a:solidFill>
                   <a:srgbClr val="404040"/>
                 </a:solidFill>
@@ -6969,7 +7086,7 @@
               </a:rPr>
               <a:t>フォール</a:t>
             </a:r>
-            <a:endParaRPr lang="ja-JP" sz="1100" dirty="0"/>
+            <a:endParaRPr lang="ja-JP" sz="1200" dirty="0"/>
           </a:p>
         </p:txBody>
       </p:sp>
@@ -6981,12 +7098,12 @@
         </p:nvSpPr>
         <p:spPr>
           <a:xfrm>
-            <a:off x="10030968" y="54864"/>
-            <a:ext cx="621792" cy="585216"/>
+            <a:off x="9555480" y="457200"/>
+            <a:ext cx="685800" cy="585216"/>
           </a:xfrm>
           <a:prstGeom prst="roundRect">
             <a:avLst>
-              <a:gd name="adj" fmla="val 15625"/>
+              <a:gd name="adj" fmla="val 12500"/>
             </a:avLst>
           </a:prstGeom>
           <a:solidFill>
@@ -6995,14 +7112,14 @@
           <a:ln/>
         </p:spPr>
         <p:txBody>
-          <a:bodyPr wrap="square" lIns="0" tIns="0" rIns="0" bIns="0" rtlCol="0" anchor="ctr"/>
+          <a:bodyPr wrap="none" lIns="0" tIns="0" rIns="0" bIns="0" rtlCol="0" anchor="ctr"/>
           <a:lstStyle/>
           <a:p>
             <a:pPr algn="ctr" indent="0" marL="0">
               <a:buNone/>
             </a:pPr>
             <a:r>
-              <a:rPr lang="ja-JP" altLang="en-US" sz="1100" dirty="0">
+              <a:rPr lang="ja-JP" altLang="en-US" sz="1200" dirty="0">
                 <a:solidFill>
                   <a:srgbClr val="404040"/>
                 </a:solidFill>
@@ -7012,14 +7129,14 @@
               </a:rPr>
               <a:t>レミマ</a:t>
             </a:r>
-            <a:endParaRPr lang="ja-JP" sz="1100" dirty="0"/>
+            <a:endParaRPr lang="ja-JP" sz="1200" dirty="0"/>
           </a:p>
           <a:p>
             <a:pPr algn="ctr" indent="0" marL="0">
               <a:buNone/>
             </a:pPr>
             <a:r>
-              <a:rPr lang="ja-JP" altLang="en-US" sz="1100" dirty="0">
+              <a:rPr lang="ja-JP" altLang="en-US" sz="1200" dirty="0">
                 <a:solidFill>
                   <a:srgbClr val="404040"/>
                 </a:solidFill>
@@ -7029,7 +7146,7 @@
               </a:rPr>
               <a:t>ゾラム</a:t>
             </a:r>
-            <a:endParaRPr lang="ja-JP" sz="1100" dirty="0"/>
+            <a:endParaRPr lang="ja-JP" sz="1200" dirty="0"/>
           </a:p>
         </p:txBody>
       </p:sp>
@@ -7041,28 +7158,28 @@
         </p:nvSpPr>
         <p:spPr>
           <a:xfrm>
-            <a:off x="10707624" y="54864"/>
-            <a:ext cx="621792" cy="585216"/>
+            <a:off x="10277856" y="457200"/>
+            <a:ext cx="685800" cy="585216"/>
           </a:xfrm>
           <a:prstGeom prst="roundRect">
             <a:avLst>
-              <a:gd name="adj" fmla="val 15625"/>
+              <a:gd name="adj" fmla="val 12500"/>
             </a:avLst>
           </a:prstGeom>
           <a:solidFill>
-            <a:srgbClr val="00A8AA"/>
+            <a:srgbClr val="007C80"/>
           </a:solidFill>
           <a:ln/>
         </p:spPr>
         <p:txBody>
-          <a:bodyPr wrap="square" lIns="0" tIns="0" rIns="0" bIns="0" rtlCol="0" anchor="ctr"/>
+          <a:bodyPr wrap="none" lIns="0" tIns="0" rIns="0" bIns="0" rtlCol="0" anchor="ctr"/>
           <a:lstStyle/>
           <a:p>
             <a:pPr algn="ctr" indent="0" marL="0">
               <a:buNone/>
             </a:pPr>
             <a:r>
-              <a:rPr lang="ja-JP" altLang="en-US" sz="1100" b="1" dirty="0">
+              <a:rPr lang="ja-JP" altLang="en-US" sz="1200" b="1" dirty="0">
                 <a:solidFill>
                   <a:srgbClr val="FFFFFF"/>
                 </a:solidFill>
@@ -7072,14 +7189,14 @@
               </a:rPr>
               <a:t>ミダ・</a:t>
             </a:r>
-            <a:endParaRPr lang="ja-JP" sz="1100" dirty="0"/>
+            <a:endParaRPr lang="ja-JP" sz="1200" dirty="0"/>
           </a:p>
           <a:p>
             <a:pPr algn="ctr" indent="0" marL="0">
               <a:buNone/>
             </a:pPr>
             <a:r>
-              <a:rPr lang="ja-JP" altLang="en-US" sz="1100" b="1" dirty="0">
+              <a:rPr lang="ja-JP" altLang="en-US" sz="1200" b="1" dirty="0">
                 <a:solidFill>
                   <a:srgbClr val="FFFFFF"/>
                 </a:solidFill>
@@ -7089,7 +7206,7 @@
               </a:rPr>
               <a:t>ケタ</a:t>
             </a:r>
-            <a:endParaRPr lang="ja-JP" sz="1100" dirty="0"/>
+            <a:endParaRPr lang="ja-JP" sz="1200" dirty="0"/>
           </a:p>
         </p:txBody>
       </p:sp>
@@ -7101,12 +7218,12 @@
         </p:nvSpPr>
         <p:spPr>
           <a:xfrm>
-            <a:off x="11384280" y="54864"/>
-            <a:ext cx="621792" cy="585216"/>
+            <a:off x="11000232" y="457200"/>
+            <a:ext cx="685800" cy="585216"/>
           </a:xfrm>
           <a:prstGeom prst="roundRect">
             <a:avLst>
-              <a:gd name="adj" fmla="val 15625"/>
+              <a:gd name="adj" fmla="val 12500"/>
             </a:avLst>
           </a:prstGeom>
           <a:solidFill>
@@ -7115,14 +7232,14 @@
           <a:ln/>
         </p:spPr>
         <p:txBody>
-          <a:bodyPr wrap="square" lIns="0" tIns="0" rIns="0" bIns="0" rtlCol="0" anchor="ctr"/>
+          <a:bodyPr wrap="none" lIns="0" tIns="0" rIns="0" bIns="0" rtlCol="0" anchor="ctr"/>
           <a:lstStyle/>
           <a:p>
             <a:pPr algn="ctr" indent="0" marL="0">
               <a:buNone/>
             </a:pPr>
             <a:r>
-              <a:rPr lang="ja-JP" altLang="en-US" sz="1100" dirty="0">
+              <a:rPr lang="ja-JP" altLang="en-US" sz="1200" dirty="0">
                 <a:solidFill>
                   <a:srgbClr val="404040"/>
                 </a:solidFill>
@@ -7132,7 +7249,7 @@
               </a:rPr>
               <a:t>使い分け</a:t>
             </a:r>
-            <a:endParaRPr lang="ja-JP" sz="1100" dirty="0"/>
+            <a:endParaRPr lang="ja-JP" sz="1200" dirty="0"/>
           </a:p>
         </p:txBody>
       </p:sp>
@@ -7144,7 +7261,7 @@
         </p:nvSpPr>
         <p:spPr>
           <a:xfrm>
-            <a:off x="11247120" y="6446520"/>
+            <a:off x="11247120" y="6263640"/>
             <a:ext cx="731520" cy="320040"/>
           </a:xfrm>
           <a:prstGeom prst="rect">
@@ -7184,7 +7301,7 @@
         <p:spPr>
           <a:xfrm>
             <a:off x="502920" y="5943600"/>
-            <a:ext cx="10607040" cy="777240"/>
+            <a:ext cx="10424160" cy="640080"/>
           </a:xfrm>
           <a:prstGeom prst="rect">
             <a:avLst/>
@@ -7240,11 +7357,11 @@
         <p:spPr>
           <a:xfrm>
             <a:off x="502920" y="1691640"/>
-            <a:ext cx="3267232" cy="4032504"/>
+            <a:ext cx="3376960" cy="4032504"/>
           </a:xfrm>
           <a:prstGeom prst="roundRect">
             <a:avLst>
-              <a:gd name="adj" fmla="val 2239"/>
+              <a:gd name="adj" fmla="val 2166"/>
             </a:avLst>
           </a:prstGeom>
           <a:solidFill>
@@ -7261,7 +7378,7 @@
         </p:nvSpPr>
         <p:spPr>
           <a:xfrm>
-            <a:off x="612648" y="1819656"/>
+            <a:off x="667512" y="1819656"/>
             <a:ext cx="3047776" cy="457200"/>
           </a:xfrm>
           <a:prstGeom prst="rect">
@@ -7300,7 +7417,7 @@
         </p:nvSpPr>
         <p:spPr>
           <a:xfrm>
-            <a:off x="612648" y="2386584"/>
+            <a:off x="667512" y="2944368"/>
             <a:ext cx="3047776" cy="420624"/>
           </a:xfrm>
           <a:prstGeom prst="rect">
@@ -7361,7 +7478,7 @@
         </p:nvSpPr>
         <p:spPr>
           <a:xfrm>
-            <a:off x="886968" y="2807208"/>
+            <a:off x="941832" y="3364992"/>
             <a:ext cx="2773456" cy="420624"/>
           </a:xfrm>
           <a:prstGeom prst="rect">
@@ -7400,7 +7517,7 @@
         </p:nvSpPr>
         <p:spPr>
           <a:xfrm>
-            <a:off x="612648" y="3502152"/>
+            <a:off x="667512" y="4197096"/>
             <a:ext cx="3047776" cy="420624"/>
           </a:xfrm>
           <a:prstGeom prst="rect">
@@ -7439,7 +7556,7 @@
         </p:nvSpPr>
         <p:spPr>
           <a:xfrm>
-            <a:off x="886968" y="3922776"/>
+            <a:off x="941832" y="4617720"/>
             <a:ext cx="2773456" cy="420624"/>
           </a:xfrm>
           <a:prstGeom prst="rect">
@@ -7478,12 +7595,12 @@
         </p:nvSpPr>
         <p:spPr>
           <a:xfrm>
-            <a:off x="3989608" y="1691640"/>
-            <a:ext cx="3227141" cy="4032504"/>
+            <a:off x="4099336" y="1691640"/>
+            <a:ext cx="3007685" cy="4032504"/>
           </a:xfrm>
           <a:prstGeom prst="roundRect">
             <a:avLst>
-              <a:gd name="adj" fmla="val 2267"/>
+              <a:gd name="adj" fmla="val 2432"/>
             </a:avLst>
           </a:prstGeom>
           <a:solidFill>
@@ -7500,8 +7617,8 @@
         </p:nvSpPr>
         <p:spPr>
           <a:xfrm>
-            <a:off x="4099336" y="1819656"/>
-            <a:ext cx="3007685" cy="457200"/>
+            <a:off x="4263928" y="1819656"/>
+            <a:ext cx="2678501" cy="457200"/>
           </a:xfrm>
           <a:prstGeom prst="rect">
             <a:avLst/>
@@ -7539,8 +7656,8 @@
         </p:nvSpPr>
         <p:spPr>
           <a:xfrm>
-            <a:off x="4099336" y="2386584"/>
-            <a:ext cx="3007685" cy="420624"/>
+            <a:off x="4263928" y="2528316"/>
+            <a:ext cx="2678501" cy="420624"/>
           </a:xfrm>
           <a:prstGeom prst="rect">
             <a:avLst/>
@@ -7578,8 +7695,8 @@
         </p:nvSpPr>
         <p:spPr>
           <a:xfrm>
-            <a:off x="4099336" y="3081528"/>
-            <a:ext cx="3007685" cy="420624"/>
+            <a:off x="4263928" y="3360420"/>
+            <a:ext cx="2678501" cy="420624"/>
           </a:xfrm>
           <a:prstGeom prst="rect">
             <a:avLst/>
@@ -7617,8 +7734,8 @@
         </p:nvSpPr>
         <p:spPr>
           <a:xfrm>
-            <a:off x="4373656" y="3502152"/>
-            <a:ext cx="2733365" cy="420624"/>
+            <a:off x="4538248" y="3781044"/>
+            <a:ext cx="2404181" cy="420624"/>
           </a:xfrm>
           <a:prstGeom prst="rect">
             <a:avLst/>
@@ -7656,8 +7773,8 @@
         </p:nvSpPr>
         <p:spPr>
           <a:xfrm>
-            <a:off x="4099336" y="4197096"/>
-            <a:ext cx="3007685" cy="420624"/>
+            <a:off x="4263928" y="4613148"/>
+            <a:ext cx="2678501" cy="420624"/>
           </a:xfrm>
           <a:prstGeom prst="rect">
             <a:avLst/>
@@ -7695,8 +7812,8 @@
         </p:nvSpPr>
         <p:spPr>
           <a:xfrm>
-            <a:off x="4373656" y="4617720"/>
-            <a:ext cx="2733365" cy="420624"/>
+            <a:off x="4538248" y="5033772"/>
+            <a:ext cx="2404181" cy="420624"/>
           </a:xfrm>
           <a:prstGeom prst="rect">
             <a:avLst/>
@@ -7734,8 +7851,8 @@
         </p:nvSpPr>
         <p:spPr>
           <a:xfrm>
-            <a:off x="7436206" y="1691640"/>
-            <a:ext cx="4249826" cy="4032504"/>
+            <a:off x="7326478" y="1691640"/>
+            <a:ext cx="4359554" cy="4032504"/>
           </a:xfrm>
           <a:prstGeom prst="roundRect">
             <a:avLst>
@@ -7756,7 +7873,7 @@
         </p:nvSpPr>
         <p:spPr>
           <a:xfrm>
-            <a:off x="7545934" y="1819656"/>
+            <a:off x="7491070" y="1819656"/>
             <a:ext cx="4030370" cy="457200"/>
           </a:xfrm>
           <a:prstGeom prst="rect">
@@ -7795,7 +7912,7 @@
         </p:nvSpPr>
         <p:spPr>
           <a:xfrm>
-            <a:off x="7545934" y="2386584"/>
+            <a:off x="7491070" y="2386584"/>
             <a:ext cx="4030370" cy="420624"/>
           </a:xfrm>
           <a:prstGeom prst="rect">
@@ -7834,7 +7951,7 @@
         </p:nvSpPr>
         <p:spPr>
           <a:xfrm>
-            <a:off x="7545934" y="3081528"/>
+            <a:off x="7491070" y="3176016"/>
             <a:ext cx="4030370" cy="420624"/>
           </a:xfrm>
           <a:prstGeom prst="rect">
@@ -7873,7 +7990,7 @@
         </p:nvSpPr>
         <p:spPr>
           <a:xfrm>
-            <a:off x="7820254" y="3502152"/>
+            <a:off x="7765390" y="3596640"/>
             <a:ext cx="3756050" cy="420624"/>
           </a:xfrm>
           <a:prstGeom prst="rect">
@@ -7912,7 +8029,7 @@
         </p:nvSpPr>
         <p:spPr>
           <a:xfrm>
-            <a:off x="7545934" y="4197096"/>
+            <a:off x="7491070" y="4386072"/>
             <a:ext cx="4030370" cy="420624"/>
           </a:xfrm>
           <a:prstGeom prst="rect">
@@ -7951,7 +8068,7 @@
         </p:nvSpPr>
         <p:spPr>
           <a:xfrm>
-            <a:off x="7545934" y="4892040"/>
+            <a:off x="7491070" y="5175504"/>
             <a:ext cx="4030370" cy="420624"/>
           </a:xfrm>
           <a:prstGeom prst="rect">
@@ -8031,7 +8148,7 @@
         <p:spPr>
           <a:xfrm>
             <a:off x="502920" y="320040"/>
-            <a:ext cx="8503920" cy="868680"/>
+            <a:ext cx="7562088" cy="868680"/>
           </a:xfrm>
           <a:prstGeom prst="rect">
             <a:avLst/>
@@ -8097,12 +8214,12 @@
         </p:nvSpPr>
         <p:spPr>
           <a:xfrm>
-            <a:off x="8677656" y="54864"/>
-            <a:ext cx="621792" cy="585216"/>
+            <a:off x="8110728" y="457200"/>
+            <a:ext cx="685800" cy="585216"/>
           </a:xfrm>
           <a:prstGeom prst="roundRect">
             <a:avLst>
-              <a:gd name="adj" fmla="val 15625"/>
+              <a:gd name="adj" fmla="val 12500"/>
             </a:avLst>
           </a:prstGeom>
           <a:solidFill>
@@ -8111,14 +8228,14 @@
           <a:ln/>
         </p:spPr>
         <p:txBody>
-          <a:bodyPr wrap="square" lIns="0" tIns="0" rIns="0" bIns="0" rtlCol="0" anchor="ctr"/>
+          <a:bodyPr wrap="none" lIns="0" tIns="0" rIns="0" bIns="0" rtlCol="0" anchor="ctr"/>
           <a:lstStyle/>
           <a:p>
             <a:pPr algn="ctr" indent="0" marL="0">
               <a:buNone/>
             </a:pPr>
             <a:r>
-              <a:rPr lang="ja-JP" altLang="en-US" sz="1100" dirty="0">
+              <a:rPr lang="ja-JP" altLang="en-US" sz="1200" dirty="0">
                 <a:solidFill>
                   <a:srgbClr val="404040"/>
                 </a:solidFill>
@@ -8128,7 +8245,7 @@
               </a:rPr>
               <a:t>共通</a:t>
             </a:r>
-            <a:endParaRPr lang="ja-JP" sz="1100" dirty="0"/>
+            <a:endParaRPr lang="ja-JP" sz="1200" dirty="0"/>
           </a:p>
         </p:txBody>
       </p:sp>
@@ -8140,12 +8257,12 @@
         </p:nvSpPr>
         <p:spPr>
           <a:xfrm>
-            <a:off x="9354312" y="54864"/>
-            <a:ext cx="621792" cy="585216"/>
+            <a:off x="8833104" y="457200"/>
+            <a:ext cx="685800" cy="585216"/>
           </a:xfrm>
           <a:prstGeom prst="roundRect">
             <a:avLst>
-              <a:gd name="adj" fmla="val 15625"/>
+              <a:gd name="adj" fmla="val 12500"/>
             </a:avLst>
           </a:prstGeom>
           <a:solidFill>
@@ -8154,14 +8271,14 @@
           <a:ln/>
         </p:spPr>
         <p:txBody>
-          <a:bodyPr wrap="square" lIns="0" tIns="0" rIns="0" bIns="0" rtlCol="0" anchor="ctr"/>
+          <a:bodyPr wrap="none" lIns="0" tIns="0" rIns="0" bIns="0" rtlCol="0" anchor="ctr"/>
           <a:lstStyle/>
           <a:p>
             <a:pPr algn="ctr" indent="0" marL="0">
               <a:buNone/>
             </a:pPr>
             <a:r>
-              <a:rPr lang="ja-JP" altLang="en-US" sz="1100" dirty="0">
+              <a:rPr lang="ja-JP" altLang="en-US" sz="1200" dirty="0">
                 <a:solidFill>
                   <a:srgbClr val="404040"/>
                 </a:solidFill>
@@ -8171,14 +8288,14 @@
               </a:rPr>
               <a:t>プロポ</a:t>
             </a:r>
-            <a:endParaRPr lang="ja-JP" sz="1100" dirty="0"/>
+            <a:endParaRPr lang="ja-JP" sz="1200" dirty="0"/>
           </a:p>
           <a:p>
             <a:pPr algn="ctr" indent="0" marL="0">
               <a:buNone/>
             </a:pPr>
             <a:r>
-              <a:rPr lang="ja-JP" altLang="en-US" sz="1100" dirty="0">
+              <a:rPr lang="ja-JP" altLang="en-US" sz="1200" dirty="0">
                 <a:solidFill>
                   <a:srgbClr val="404040"/>
                 </a:solidFill>
@@ -8188,7 +8305,7 @@
               </a:rPr>
               <a:t>フォール</a:t>
             </a:r>
-            <a:endParaRPr lang="ja-JP" sz="1100" dirty="0"/>
+            <a:endParaRPr lang="ja-JP" sz="1200" dirty="0"/>
           </a:p>
         </p:txBody>
       </p:sp>
@@ -8200,12 +8317,12 @@
         </p:nvSpPr>
         <p:spPr>
           <a:xfrm>
-            <a:off x="10030968" y="54864"/>
-            <a:ext cx="621792" cy="585216"/>
+            <a:off x="9555480" y="457200"/>
+            <a:ext cx="685800" cy="585216"/>
           </a:xfrm>
           <a:prstGeom prst="roundRect">
             <a:avLst>
-              <a:gd name="adj" fmla="val 15625"/>
+              <a:gd name="adj" fmla="val 12500"/>
             </a:avLst>
           </a:prstGeom>
           <a:solidFill>
@@ -8214,14 +8331,14 @@
           <a:ln/>
         </p:spPr>
         <p:txBody>
-          <a:bodyPr wrap="square" lIns="0" tIns="0" rIns="0" bIns="0" rtlCol="0" anchor="ctr"/>
+          <a:bodyPr wrap="none" lIns="0" tIns="0" rIns="0" bIns="0" rtlCol="0" anchor="ctr"/>
           <a:lstStyle/>
           <a:p>
             <a:pPr algn="ctr" indent="0" marL="0">
               <a:buNone/>
             </a:pPr>
             <a:r>
-              <a:rPr lang="ja-JP" altLang="en-US" sz="1100" dirty="0">
+              <a:rPr lang="ja-JP" altLang="en-US" sz="1200" dirty="0">
                 <a:solidFill>
                   <a:srgbClr val="404040"/>
                 </a:solidFill>
@@ -8231,14 +8348,14 @@
               </a:rPr>
               <a:t>レミマ</a:t>
             </a:r>
-            <a:endParaRPr lang="ja-JP" sz="1100" dirty="0"/>
+            <a:endParaRPr lang="ja-JP" sz="1200" dirty="0"/>
           </a:p>
           <a:p>
             <a:pPr algn="ctr" indent="0" marL="0">
               <a:buNone/>
             </a:pPr>
             <a:r>
-              <a:rPr lang="ja-JP" altLang="en-US" sz="1100" dirty="0">
+              <a:rPr lang="ja-JP" altLang="en-US" sz="1200" dirty="0">
                 <a:solidFill>
                   <a:srgbClr val="404040"/>
                 </a:solidFill>
@@ -8248,7 +8365,7 @@
               </a:rPr>
               <a:t>ゾラム</a:t>
             </a:r>
-            <a:endParaRPr lang="ja-JP" sz="1100" dirty="0"/>
+            <a:endParaRPr lang="ja-JP" sz="1200" dirty="0"/>
           </a:p>
         </p:txBody>
       </p:sp>
@@ -8260,12 +8377,12 @@
         </p:nvSpPr>
         <p:spPr>
           <a:xfrm>
-            <a:off x="10707624" y="54864"/>
-            <a:ext cx="621792" cy="585216"/>
+            <a:off x="10277856" y="457200"/>
+            <a:ext cx="685800" cy="585216"/>
           </a:xfrm>
           <a:prstGeom prst="roundRect">
             <a:avLst>
-              <a:gd name="adj" fmla="val 15625"/>
+              <a:gd name="adj" fmla="val 12500"/>
             </a:avLst>
           </a:prstGeom>
           <a:solidFill>
@@ -8274,14 +8391,14 @@
           <a:ln/>
         </p:spPr>
         <p:txBody>
-          <a:bodyPr wrap="square" lIns="0" tIns="0" rIns="0" bIns="0" rtlCol="0" anchor="ctr"/>
+          <a:bodyPr wrap="none" lIns="0" tIns="0" rIns="0" bIns="0" rtlCol="0" anchor="ctr"/>
           <a:lstStyle/>
           <a:p>
             <a:pPr algn="ctr" indent="0" marL="0">
               <a:buNone/>
             </a:pPr>
             <a:r>
-              <a:rPr lang="ja-JP" altLang="en-US" sz="1100" dirty="0">
+              <a:rPr lang="ja-JP" altLang="en-US" sz="1200" dirty="0">
                 <a:solidFill>
                   <a:srgbClr val="404040"/>
                 </a:solidFill>
@@ -8291,14 +8408,14 @@
               </a:rPr>
               <a:t>ミダ・</a:t>
             </a:r>
-            <a:endParaRPr lang="ja-JP" sz="1100" dirty="0"/>
+            <a:endParaRPr lang="ja-JP" sz="1200" dirty="0"/>
           </a:p>
           <a:p>
             <a:pPr algn="ctr" indent="0" marL="0">
               <a:buNone/>
             </a:pPr>
             <a:r>
-              <a:rPr lang="ja-JP" altLang="en-US" sz="1100" dirty="0">
+              <a:rPr lang="ja-JP" altLang="en-US" sz="1200" dirty="0">
                 <a:solidFill>
                   <a:srgbClr val="404040"/>
                 </a:solidFill>
@@ -8308,7 +8425,7 @@
               </a:rPr>
               <a:t>ケタ</a:t>
             </a:r>
-            <a:endParaRPr lang="ja-JP" sz="1100" dirty="0"/>
+            <a:endParaRPr lang="ja-JP" sz="1200" dirty="0"/>
           </a:p>
         </p:txBody>
       </p:sp>
@@ -8320,28 +8437,28 @@
         </p:nvSpPr>
         <p:spPr>
           <a:xfrm>
-            <a:off x="11384280" y="54864"/>
-            <a:ext cx="621792" cy="585216"/>
+            <a:off x="11000232" y="457200"/>
+            <a:ext cx="685800" cy="585216"/>
           </a:xfrm>
           <a:prstGeom prst="roundRect">
             <a:avLst>
-              <a:gd name="adj" fmla="val 15625"/>
+              <a:gd name="adj" fmla="val 12500"/>
             </a:avLst>
           </a:prstGeom>
           <a:solidFill>
-            <a:srgbClr val="00A8AA"/>
+            <a:srgbClr val="007C80"/>
           </a:solidFill>
           <a:ln/>
         </p:spPr>
         <p:txBody>
-          <a:bodyPr wrap="square" lIns="0" tIns="0" rIns="0" bIns="0" rtlCol="0" anchor="ctr"/>
+          <a:bodyPr wrap="none" lIns="0" tIns="0" rIns="0" bIns="0" rtlCol="0" anchor="ctr"/>
           <a:lstStyle/>
           <a:p>
             <a:pPr algn="ctr" indent="0" marL="0">
               <a:buNone/>
             </a:pPr>
             <a:r>
-              <a:rPr lang="ja-JP" altLang="en-US" sz="1100" b="1" dirty="0">
+              <a:rPr lang="ja-JP" altLang="en-US" sz="1200" b="1" dirty="0">
                 <a:solidFill>
                   <a:srgbClr val="FFFFFF"/>
                 </a:solidFill>
@@ -8351,7 +8468,7 @@
               </a:rPr>
               <a:t>使い分け</a:t>
             </a:r>
-            <a:endParaRPr lang="ja-JP" sz="1100" dirty="0"/>
+            <a:endParaRPr lang="ja-JP" sz="1200" dirty="0"/>
           </a:p>
         </p:txBody>
       </p:sp>
@@ -8363,7 +8480,7 @@
         </p:nvSpPr>
         <p:spPr>
           <a:xfrm>
-            <a:off x="11247120" y="6446520"/>
+            <a:off x="11247120" y="6263640"/>
             <a:ext cx="731520" cy="320040"/>
           </a:xfrm>
           <a:prstGeom prst="rect">
@@ -8403,7 +8520,7 @@
         <p:spPr>
           <a:xfrm>
             <a:off x="502920" y="5943600"/>
-            <a:ext cx="10607040" cy="777240"/>
+            <a:ext cx="10424160" cy="640080"/>
           </a:xfrm>
           <a:prstGeom prst="rect">
             <a:avLst/>
@@ -8482,7 +8599,7 @@
                     <a:bodyPr/>
                     <a:lstStyle/>
                     <a:p>
-                      <a:pPr algn="ctr" indent="0" marL="0">
+                      <a:pPr algn="l" indent="0" marL="0">
                         <a:buNone/>
                       </a:pPr>
                       <a:r>
@@ -8550,7 +8667,7 @@
                     <a:bodyPr/>
                     <a:lstStyle/>
                     <a:p>
-                      <a:pPr algn="ctr" indent="0" marL="0">
+                      <a:pPr algn="l" indent="0" marL="0">
                         <a:buNone/>
                       </a:pPr>
                       <a:r>
@@ -9466,7 +9583,7 @@
         <p:spPr>
           <a:xfrm>
             <a:off x="502920" y="320040"/>
-            <a:ext cx="8503920" cy="868680"/>
+            <a:ext cx="7562088" cy="868680"/>
           </a:xfrm>
           <a:prstGeom prst="rect">
             <a:avLst/>
@@ -9532,12 +9649,12 @@
         </p:nvSpPr>
         <p:spPr>
           <a:xfrm>
-            <a:off x="8677656" y="54864"/>
-            <a:ext cx="621792" cy="585216"/>
+            <a:off x="8110728" y="457200"/>
+            <a:ext cx="685800" cy="585216"/>
           </a:xfrm>
           <a:prstGeom prst="roundRect">
             <a:avLst>
-              <a:gd name="adj" fmla="val 15625"/>
+              <a:gd name="adj" fmla="val 12500"/>
             </a:avLst>
           </a:prstGeom>
           <a:solidFill>
@@ -9546,14 +9663,14 @@
           <a:ln/>
         </p:spPr>
         <p:txBody>
-          <a:bodyPr wrap="square" lIns="0" tIns="0" rIns="0" bIns="0" rtlCol="0" anchor="ctr"/>
+          <a:bodyPr wrap="none" lIns="0" tIns="0" rIns="0" bIns="0" rtlCol="0" anchor="ctr"/>
           <a:lstStyle/>
           <a:p>
             <a:pPr algn="ctr" indent="0" marL="0">
               <a:buNone/>
             </a:pPr>
             <a:r>
-              <a:rPr lang="ja-JP" altLang="en-US" sz="1100" dirty="0">
+              <a:rPr lang="ja-JP" altLang="en-US" sz="1200" dirty="0">
                 <a:solidFill>
                   <a:srgbClr val="404040"/>
                 </a:solidFill>
@@ -9563,7 +9680,7 @@
               </a:rPr>
               <a:t>共通</a:t>
             </a:r>
-            <a:endParaRPr lang="ja-JP" sz="1100" dirty="0"/>
+            <a:endParaRPr lang="ja-JP" sz="1200" dirty="0"/>
           </a:p>
         </p:txBody>
       </p:sp>
@@ -9575,12 +9692,12 @@
         </p:nvSpPr>
         <p:spPr>
           <a:xfrm>
-            <a:off x="9354312" y="54864"/>
-            <a:ext cx="621792" cy="585216"/>
+            <a:off x="8833104" y="457200"/>
+            <a:ext cx="685800" cy="585216"/>
           </a:xfrm>
           <a:prstGeom prst="roundRect">
             <a:avLst>
-              <a:gd name="adj" fmla="val 15625"/>
+              <a:gd name="adj" fmla="val 12500"/>
             </a:avLst>
           </a:prstGeom>
           <a:solidFill>
@@ -9589,14 +9706,14 @@
           <a:ln/>
         </p:spPr>
         <p:txBody>
-          <a:bodyPr wrap="square" lIns="0" tIns="0" rIns="0" bIns="0" rtlCol="0" anchor="ctr"/>
+          <a:bodyPr wrap="none" lIns="0" tIns="0" rIns="0" bIns="0" rtlCol="0" anchor="ctr"/>
           <a:lstStyle/>
           <a:p>
             <a:pPr algn="ctr" indent="0" marL="0">
               <a:buNone/>
             </a:pPr>
             <a:r>
-              <a:rPr lang="ja-JP" altLang="en-US" sz="1100" dirty="0">
+              <a:rPr lang="ja-JP" altLang="en-US" sz="1200" dirty="0">
                 <a:solidFill>
                   <a:srgbClr val="404040"/>
                 </a:solidFill>
@@ -9606,14 +9723,14 @@
               </a:rPr>
               <a:t>プロポ</a:t>
             </a:r>
-            <a:endParaRPr lang="ja-JP" sz="1100" dirty="0"/>
+            <a:endParaRPr lang="ja-JP" sz="1200" dirty="0"/>
           </a:p>
           <a:p>
             <a:pPr algn="ctr" indent="0" marL="0">
               <a:buNone/>
             </a:pPr>
             <a:r>
-              <a:rPr lang="ja-JP" altLang="en-US" sz="1100" dirty="0">
+              <a:rPr lang="ja-JP" altLang="en-US" sz="1200" dirty="0">
                 <a:solidFill>
                   <a:srgbClr val="404040"/>
                 </a:solidFill>
@@ -9623,7 +9740,7 @@
               </a:rPr>
               <a:t>フォール</a:t>
             </a:r>
-            <a:endParaRPr lang="ja-JP" sz="1100" dirty="0"/>
+            <a:endParaRPr lang="ja-JP" sz="1200" dirty="0"/>
           </a:p>
         </p:txBody>
       </p:sp>
@@ -9635,12 +9752,12 @@
         </p:nvSpPr>
         <p:spPr>
           <a:xfrm>
-            <a:off x="10030968" y="54864"/>
-            <a:ext cx="621792" cy="585216"/>
+            <a:off x="9555480" y="457200"/>
+            <a:ext cx="685800" cy="585216"/>
           </a:xfrm>
           <a:prstGeom prst="roundRect">
             <a:avLst>
-              <a:gd name="adj" fmla="val 15625"/>
+              <a:gd name="adj" fmla="val 12500"/>
             </a:avLst>
           </a:prstGeom>
           <a:solidFill>
@@ -9649,14 +9766,14 @@
           <a:ln/>
         </p:spPr>
         <p:txBody>
-          <a:bodyPr wrap="square" lIns="0" tIns="0" rIns="0" bIns="0" rtlCol="0" anchor="ctr"/>
+          <a:bodyPr wrap="none" lIns="0" tIns="0" rIns="0" bIns="0" rtlCol="0" anchor="ctr"/>
           <a:lstStyle/>
           <a:p>
             <a:pPr algn="ctr" indent="0" marL="0">
               <a:buNone/>
             </a:pPr>
             <a:r>
-              <a:rPr lang="ja-JP" altLang="en-US" sz="1100" dirty="0">
+              <a:rPr lang="ja-JP" altLang="en-US" sz="1200" dirty="0">
                 <a:solidFill>
                   <a:srgbClr val="404040"/>
                 </a:solidFill>
@@ -9666,14 +9783,14 @@
               </a:rPr>
               <a:t>レミマ</a:t>
             </a:r>
-            <a:endParaRPr lang="ja-JP" sz="1100" dirty="0"/>
+            <a:endParaRPr lang="ja-JP" sz="1200" dirty="0"/>
           </a:p>
           <a:p>
             <a:pPr algn="ctr" indent="0" marL="0">
               <a:buNone/>
             </a:pPr>
             <a:r>
-              <a:rPr lang="ja-JP" altLang="en-US" sz="1100" dirty="0">
+              <a:rPr lang="ja-JP" altLang="en-US" sz="1200" dirty="0">
                 <a:solidFill>
                   <a:srgbClr val="404040"/>
                 </a:solidFill>
@@ -9683,7 +9800,7 @@
               </a:rPr>
               <a:t>ゾラム</a:t>
             </a:r>
-            <a:endParaRPr lang="ja-JP" sz="1100" dirty="0"/>
+            <a:endParaRPr lang="ja-JP" sz="1200" dirty="0"/>
           </a:p>
         </p:txBody>
       </p:sp>
@@ -9695,12 +9812,12 @@
         </p:nvSpPr>
         <p:spPr>
           <a:xfrm>
-            <a:off x="10707624" y="54864"/>
-            <a:ext cx="621792" cy="585216"/>
+            <a:off x="10277856" y="457200"/>
+            <a:ext cx="685800" cy="585216"/>
           </a:xfrm>
           <a:prstGeom prst="roundRect">
             <a:avLst>
-              <a:gd name="adj" fmla="val 15625"/>
+              <a:gd name="adj" fmla="val 12500"/>
             </a:avLst>
           </a:prstGeom>
           <a:solidFill>
@@ -9709,14 +9826,14 @@
           <a:ln/>
         </p:spPr>
         <p:txBody>
-          <a:bodyPr wrap="square" lIns="0" tIns="0" rIns="0" bIns="0" rtlCol="0" anchor="ctr"/>
+          <a:bodyPr wrap="none" lIns="0" tIns="0" rIns="0" bIns="0" rtlCol="0" anchor="ctr"/>
           <a:lstStyle/>
           <a:p>
             <a:pPr algn="ctr" indent="0" marL="0">
               <a:buNone/>
             </a:pPr>
             <a:r>
-              <a:rPr lang="ja-JP" altLang="en-US" sz="1100" dirty="0">
+              <a:rPr lang="ja-JP" altLang="en-US" sz="1200" dirty="0">
                 <a:solidFill>
                   <a:srgbClr val="404040"/>
                 </a:solidFill>
@@ -9726,14 +9843,14 @@
               </a:rPr>
               <a:t>ミダ・</a:t>
             </a:r>
-            <a:endParaRPr lang="ja-JP" sz="1100" dirty="0"/>
+            <a:endParaRPr lang="ja-JP" sz="1200" dirty="0"/>
           </a:p>
           <a:p>
             <a:pPr algn="ctr" indent="0" marL="0">
               <a:buNone/>
             </a:pPr>
             <a:r>
-              <a:rPr lang="ja-JP" altLang="en-US" sz="1100" dirty="0">
+              <a:rPr lang="ja-JP" altLang="en-US" sz="1200" dirty="0">
                 <a:solidFill>
                   <a:srgbClr val="404040"/>
                 </a:solidFill>
@@ -9743,7 +9860,7 @@
               </a:rPr>
               <a:t>ケタ</a:t>
             </a:r>
-            <a:endParaRPr lang="ja-JP" sz="1100" dirty="0"/>
+            <a:endParaRPr lang="ja-JP" sz="1200" dirty="0"/>
           </a:p>
         </p:txBody>
       </p:sp>
@@ -9755,28 +9872,28 @@
         </p:nvSpPr>
         <p:spPr>
           <a:xfrm>
-            <a:off x="11384280" y="54864"/>
-            <a:ext cx="621792" cy="585216"/>
+            <a:off x="11000232" y="457200"/>
+            <a:ext cx="685800" cy="585216"/>
           </a:xfrm>
           <a:prstGeom prst="roundRect">
             <a:avLst>
-              <a:gd name="adj" fmla="val 15625"/>
+              <a:gd name="adj" fmla="val 12500"/>
             </a:avLst>
           </a:prstGeom>
           <a:solidFill>
-            <a:srgbClr val="00A8AA"/>
+            <a:srgbClr val="007C80"/>
           </a:solidFill>
           <a:ln/>
         </p:spPr>
         <p:txBody>
-          <a:bodyPr wrap="square" lIns="0" tIns="0" rIns="0" bIns="0" rtlCol="0" anchor="ctr"/>
+          <a:bodyPr wrap="none" lIns="0" tIns="0" rIns="0" bIns="0" rtlCol="0" anchor="ctr"/>
           <a:lstStyle/>
           <a:p>
             <a:pPr algn="ctr" indent="0" marL="0">
               <a:buNone/>
             </a:pPr>
             <a:r>
-              <a:rPr lang="ja-JP" altLang="en-US" sz="1100" b="1" dirty="0">
+              <a:rPr lang="ja-JP" altLang="en-US" sz="1200" b="1" dirty="0">
                 <a:solidFill>
                   <a:srgbClr val="FFFFFF"/>
                 </a:solidFill>
@@ -9786,7 +9903,7 @@
               </a:rPr>
               <a:t>使い分け</a:t>
             </a:r>
-            <a:endParaRPr lang="ja-JP" sz="1100" dirty="0"/>
+            <a:endParaRPr lang="ja-JP" sz="1200" dirty="0"/>
           </a:p>
         </p:txBody>
       </p:sp>
@@ -9798,7 +9915,7 @@
         </p:nvSpPr>
         <p:spPr>
           <a:xfrm>
-            <a:off x="11247120" y="6446520"/>
+            <a:off x="11247120" y="6263640"/>
             <a:ext cx="731520" cy="320040"/>
           </a:xfrm>
           <a:prstGeom prst="rect">
@@ -9838,7 +9955,7 @@
         <p:spPr>
           <a:xfrm>
             <a:off x="502920" y="5943600"/>
-            <a:ext cx="10607040" cy="777240"/>
+            <a:ext cx="10424160" cy="640080"/>
           </a:xfrm>
           <a:prstGeom prst="rect">
             <a:avLst/>
@@ -9893,8 +10010,8 @@
         </p:nvSpPr>
         <p:spPr>
           <a:xfrm>
-            <a:off x="502920" y="1783080"/>
-            <a:ext cx="11155680" cy="2752344"/>
+            <a:off x="502920" y="1737360"/>
+            <a:ext cx="11155680" cy="2926080"/>
           </a:xfrm>
           <a:prstGeom prst="rect">
             <a:avLst/>
@@ -9908,7 +10025,7 @@
           <a:p>
             <a:pPr algn="l" marL="406400" indent="-406400">
               <a:spcAft>
-                <a:spcPts val="1600"/>
+                <a:spcPts val="2000"/>
               </a:spcAft>
               <a:buSzPct val="100000"/>
               <a:buChar char="•"/>
@@ -9929,7 +10046,7 @@
           <a:p>
             <a:pPr algn="l" marL="406400" indent="-406400">
               <a:spcAft>
-                <a:spcPts val="1600"/>
+                <a:spcPts val="2000"/>
               </a:spcAft>
               <a:buSzPct val="100000"/>
               <a:buChar char="•"/>
@@ -9950,7 +10067,7 @@
           <a:p>
             <a:pPr algn="l" marL="406400" indent="-406400">
               <a:spcAft>
-                <a:spcPts val="1600"/>
+                <a:spcPts val="2000"/>
               </a:spcAft>
               <a:buSzPct val="100000"/>
               <a:buChar char="•"/>
@@ -9971,7 +10088,7 @@
           <a:p>
             <a:pPr algn="l" marL="406400" indent="-406400">
               <a:spcAft>
-                <a:spcPts val="1600"/>
+                <a:spcPts val="2000"/>
               </a:spcAft>
               <a:buSzPct val="100000"/>
               <a:buChar char="•"/>
@@ -9999,12 +10116,12 @@
         </p:nvSpPr>
         <p:spPr>
           <a:xfrm>
-            <a:off x="502920" y="4855464"/>
-            <a:ext cx="11183112" cy="868680"/>
+            <a:off x="502920" y="4882896"/>
+            <a:ext cx="11183112" cy="777240"/>
           </a:xfrm>
           <a:prstGeom prst="roundRect">
             <a:avLst>
-              <a:gd name="adj" fmla="val 8421"/>
+              <a:gd name="adj" fmla="val 9412"/>
             </a:avLst>
           </a:prstGeom>
           <a:solidFill>
@@ -10035,26 +10152,26 @@
               <a:t>導入薬を入れたら、血圧は </a:t>
             </a:r>
             <a:r>
+              <a:rPr lang="ja-JP" altLang="en-US" sz="2800" b="1" u="sng" dirty="0">
+                <a:solidFill>
+                  <a:srgbClr val="D55E00"/>
+                </a:solidFill>
+                <a:latin typeface="メイリオ" pitchFamily="34" charset="0"/>
+                <a:ea typeface="メイリオ" pitchFamily="34" charset="-122"/>
+                <a:cs typeface="メイリオ" pitchFamily="34" charset="-120"/>
+              </a:rPr>
+              <a:t>1〜2 分</a:t>
+            </a:r>
+            <a:r>
               <a:rPr lang="ja-JP" altLang="en-US" sz="2800" b="1" dirty="0">
                 <a:solidFill>
-                  <a:srgbClr val="D55E00"/>
-                </a:solidFill>
-                <a:latin typeface="メイリオ" pitchFamily="34" charset="0"/>
-                <a:ea typeface="メイリオ" pitchFamily="34" charset="-122"/>
-                <a:cs typeface="メイリオ" pitchFamily="34" charset="-120"/>
-              </a:rPr>
-              <a:t>1〜2 分ごと</a:t>
-            </a:r>
-            <a:r>
-              <a:rPr lang="ja-JP" altLang="en-US" sz="2800" b="1" dirty="0">
-                <a:solidFill>
                   <a:srgbClr val="262626"/>
                 </a:solidFill>
                 <a:latin typeface="メイリオ" pitchFamily="34" charset="0"/>
                 <a:ea typeface="メイリオ" pitchFamily="34" charset="-122"/>
                 <a:cs typeface="メイリオ" pitchFamily="34" charset="-120"/>
               </a:rPr>
-              <a:t>に測る</a:t>
+              <a:t>ごとに測る</a:t>
             </a:r>
             <a:endParaRPr lang="ja-JP" sz="2800" dirty="0"/>
           </a:p>
@@ -10098,7 +10215,7 @@
         <p:spPr>
           <a:xfrm>
             <a:off x="502920" y="320040"/>
-            <a:ext cx="8503920" cy="868680"/>
+            <a:ext cx="7562088" cy="868680"/>
           </a:xfrm>
           <a:prstGeom prst="rect">
             <a:avLst/>
@@ -10164,12 +10281,12 @@
         </p:nvSpPr>
         <p:spPr>
           <a:xfrm>
-            <a:off x="8677656" y="54864"/>
-            <a:ext cx="621792" cy="585216"/>
+            <a:off x="8110728" y="457200"/>
+            <a:ext cx="685800" cy="585216"/>
           </a:xfrm>
           <a:prstGeom prst="roundRect">
             <a:avLst>
-              <a:gd name="adj" fmla="val 15625"/>
+              <a:gd name="adj" fmla="val 12500"/>
             </a:avLst>
           </a:prstGeom>
           <a:solidFill>
@@ -10178,14 +10295,14 @@
           <a:ln/>
         </p:spPr>
         <p:txBody>
-          <a:bodyPr wrap="square" lIns="0" tIns="0" rIns="0" bIns="0" rtlCol="0" anchor="ctr"/>
+          <a:bodyPr wrap="none" lIns="0" tIns="0" rIns="0" bIns="0" rtlCol="0" anchor="ctr"/>
           <a:lstStyle/>
           <a:p>
             <a:pPr algn="ctr" indent="0" marL="0">
               <a:buNone/>
             </a:pPr>
             <a:r>
-              <a:rPr lang="ja-JP" altLang="en-US" sz="1100" dirty="0">
+              <a:rPr lang="ja-JP" altLang="en-US" sz="1200" dirty="0">
                 <a:solidFill>
                   <a:srgbClr val="404040"/>
                 </a:solidFill>
@@ -10195,7 +10312,7 @@
               </a:rPr>
               <a:t>共通</a:t>
             </a:r>
-            <a:endParaRPr lang="ja-JP" sz="1100" dirty="0"/>
+            <a:endParaRPr lang="ja-JP" sz="1200" dirty="0"/>
           </a:p>
         </p:txBody>
       </p:sp>
@@ -10207,12 +10324,12 @@
         </p:nvSpPr>
         <p:spPr>
           <a:xfrm>
-            <a:off x="9354312" y="54864"/>
-            <a:ext cx="621792" cy="585216"/>
+            <a:off x="8833104" y="457200"/>
+            <a:ext cx="685800" cy="585216"/>
           </a:xfrm>
           <a:prstGeom prst="roundRect">
             <a:avLst>
-              <a:gd name="adj" fmla="val 15625"/>
+              <a:gd name="adj" fmla="val 12500"/>
             </a:avLst>
           </a:prstGeom>
           <a:solidFill>
@@ -10221,14 +10338,14 @@
           <a:ln/>
         </p:spPr>
         <p:txBody>
-          <a:bodyPr wrap="square" lIns="0" tIns="0" rIns="0" bIns="0" rtlCol="0" anchor="ctr"/>
+          <a:bodyPr wrap="none" lIns="0" tIns="0" rIns="0" bIns="0" rtlCol="0" anchor="ctr"/>
           <a:lstStyle/>
           <a:p>
             <a:pPr algn="ctr" indent="0" marL="0">
               <a:buNone/>
             </a:pPr>
             <a:r>
-              <a:rPr lang="ja-JP" altLang="en-US" sz="1100" dirty="0">
+              <a:rPr lang="ja-JP" altLang="en-US" sz="1200" dirty="0">
                 <a:solidFill>
                   <a:srgbClr val="404040"/>
                 </a:solidFill>
@@ -10238,14 +10355,14 @@
               </a:rPr>
               <a:t>プロポ</a:t>
             </a:r>
-            <a:endParaRPr lang="ja-JP" sz="1100" dirty="0"/>
+            <a:endParaRPr lang="ja-JP" sz="1200" dirty="0"/>
           </a:p>
           <a:p>
             <a:pPr algn="ctr" indent="0" marL="0">
               <a:buNone/>
             </a:pPr>
             <a:r>
-              <a:rPr lang="ja-JP" altLang="en-US" sz="1100" dirty="0">
+              <a:rPr lang="ja-JP" altLang="en-US" sz="1200" dirty="0">
                 <a:solidFill>
                   <a:srgbClr val="404040"/>
                 </a:solidFill>
@@ -10255,7 +10372,7 @@
               </a:rPr>
               <a:t>フォール</a:t>
             </a:r>
-            <a:endParaRPr lang="ja-JP" sz="1100" dirty="0"/>
+            <a:endParaRPr lang="ja-JP" sz="1200" dirty="0"/>
           </a:p>
         </p:txBody>
       </p:sp>
@@ -10267,12 +10384,12 @@
         </p:nvSpPr>
         <p:spPr>
           <a:xfrm>
-            <a:off x="10030968" y="54864"/>
-            <a:ext cx="621792" cy="585216"/>
+            <a:off x="9555480" y="457200"/>
+            <a:ext cx="685800" cy="585216"/>
           </a:xfrm>
           <a:prstGeom prst="roundRect">
             <a:avLst>
-              <a:gd name="adj" fmla="val 15625"/>
+              <a:gd name="adj" fmla="val 12500"/>
             </a:avLst>
           </a:prstGeom>
           <a:solidFill>
@@ -10281,14 +10398,14 @@
           <a:ln/>
         </p:spPr>
         <p:txBody>
-          <a:bodyPr wrap="square" lIns="0" tIns="0" rIns="0" bIns="0" rtlCol="0" anchor="ctr"/>
+          <a:bodyPr wrap="none" lIns="0" tIns="0" rIns="0" bIns="0" rtlCol="0" anchor="ctr"/>
           <a:lstStyle/>
           <a:p>
             <a:pPr algn="ctr" indent="0" marL="0">
               <a:buNone/>
             </a:pPr>
             <a:r>
-              <a:rPr lang="ja-JP" altLang="en-US" sz="1100" dirty="0">
+              <a:rPr lang="ja-JP" altLang="en-US" sz="1200" dirty="0">
                 <a:solidFill>
                   <a:srgbClr val="404040"/>
                 </a:solidFill>
@@ -10298,14 +10415,14 @@
               </a:rPr>
               <a:t>レミマ</a:t>
             </a:r>
-            <a:endParaRPr lang="ja-JP" sz="1100" dirty="0"/>
+            <a:endParaRPr lang="ja-JP" sz="1200" dirty="0"/>
           </a:p>
           <a:p>
             <a:pPr algn="ctr" indent="0" marL="0">
               <a:buNone/>
             </a:pPr>
             <a:r>
-              <a:rPr lang="ja-JP" altLang="en-US" sz="1100" dirty="0">
+              <a:rPr lang="ja-JP" altLang="en-US" sz="1200" dirty="0">
                 <a:solidFill>
                   <a:srgbClr val="404040"/>
                 </a:solidFill>
@@ -10315,7 +10432,7 @@
               </a:rPr>
               <a:t>ゾラム</a:t>
             </a:r>
-            <a:endParaRPr lang="ja-JP" sz="1100" dirty="0"/>
+            <a:endParaRPr lang="ja-JP" sz="1200" dirty="0"/>
           </a:p>
         </p:txBody>
       </p:sp>
@@ -10327,12 +10444,12 @@
         </p:nvSpPr>
         <p:spPr>
           <a:xfrm>
-            <a:off x="10707624" y="54864"/>
-            <a:ext cx="621792" cy="585216"/>
+            <a:off x="10277856" y="457200"/>
+            <a:ext cx="685800" cy="585216"/>
           </a:xfrm>
           <a:prstGeom prst="roundRect">
             <a:avLst>
-              <a:gd name="adj" fmla="val 15625"/>
+              <a:gd name="adj" fmla="val 12500"/>
             </a:avLst>
           </a:prstGeom>
           <a:solidFill>
@@ -10341,14 +10458,14 @@
           <a:ln/>
         </p:spPr>
         <p:txBody>
-          <a:bodyPr wrap="square" lIns="0" tIns="0" rIns="0" bIns="0" rtlCol="0" anchor="ctr"/>
+          <a:bodyPr wrap="none" lIns="0" tIns="0" rIns="0" bIns="0" rtlCol="0" anchor="ctr"/>
           <a:lstStyle/>
           <a:p>
             <a:pPr algn="ctr" indent="0" marL="0">
               <a:buNone/>
             </a:pPr>
             <a:r>
-              <a:rPr lang="ja-JP" altLang="en-US" sz="1100" dirty="0">
+              <a:rPr lang="ja-JP" altLang="en-US" sz="1200" dirty="0">
                 <a:solidFill>
                   <a:srgbClr val="404040"/>
                 </a:solidFill>
@@ -10358,14 +10475,14 @@
               </a:rPr>
               <a:t>ミダ・</a:t>
             </a:r>
-            <a:endParaRPr lang="ja-JP" sz="1100" dirty="0"/>
+            <a:endParaRPr lang="ja-JP" sz="1200" dirty="0"/>
           </a:p>
           <a:p>
             <a:pPr algn="ctr" indent="0" marL="0">
               <a:buNone/>
             </a:pPr>
             <a:r>
-              <a:rPr lang="ja-JP" altLang="en-US" sz="1100" dirty="0">
+              <a:rPr lang="ja-JP" altLang="en-US" sz="1200" dirty="0">
                 <a:solidFill>
                   <a:srgbClr val="404040"/>
                 </a:solidFill>
@@ -10375,7 +10492,7 @@
               </a:rPr>
               <a:t>ケタ</a:t>
             </a:r>
-            <a:endParaRPr lang="ja-JP" sz="1100" dirty="0"/>
+            <a:endParaRPr lang="ja-JP" sz="1200" dirty="0"/>
           </a:p>
         </p:txBody>
       </p:sp>
@@ -10387,28 +10504,28 @@
         </p:nvSpPr>
         <p:spPr>
           <a:xfrm>
-            <a:off x="11384280" y="54864"/>
-            <a:ext cx="621792" cy="585216"/>
+            <a:off x="11000232" y="457200"/>
+            <a:ext cx="685800" cy="585216"/>
           </a:xfrm>
           <a:prstGeom prst="roundRect">
             <a:avLst>
-              <a:gd name="adj" fmla="val 15625"/>
+              <a:gd name="adj" fmla="val 12500"/>
             </a:avLst>
           </a:prstGeom>
           <a:solidFill>
-            <a:srgbClr val="00A8AA"/>
+            <a:srgbClr val="007C80"/>
           </a:solidFill>
           <a:ln/>
         </p:spPr>
         <p:txBody>
-          <a:bodyPr wrap="square" lIns="0" tIns="0" rIns="0" bIns="0" rtlCol="0" anchor="ctr"/>
+          <a:bodyPr wrap="none" lIns="0" tIns="0" rIns="0" bIns="0" rtlCol="0" anchor="ctr"/>
           <a:lstStyle/>
           <a:p>
             <a:pPr algn="ctr" indent="0" marL="0">
               <a:buNone/>
             </a:pPr>
             <a:r>
-              <a:rPr lang="ja-JP" altLang="en-US" sz="1100" b="1" dirty="0">
+              <a:rPr lang="ja-JP" altLang="en-US" sz="1200" b="1" dirty="0">
                 <a:solidFill>
                   <a:srgbClr val="FFFFFF"/>
                 </a:solidFill>
@@ -10418,7 +10535,7 @@
               </a:rPr>
               <a:t>使い分け</a:t>
             </a:r>
-            <a:endParaRPr lang="ja-JP" sz="1100" dirty="0"/>
+            <a:endParaRPr lang="ja-JP" sz="1200" dirty="0"/>
           </a:p>
         </p:txBody>
       </p:sp>
@@ -10430,7 +10547,7 @@
         </p:nvSpPr>
         <p:spPr>
           <a:xfrm>
-            <a:off x="11247120" y="6446520"/>
+            <a:off x="11247120" y="6263640"/>
             <a:ext cx="731520" cy="320040"/>
           </a:xfrm>
           <a:prstGeom prst="rect">
@@ -10470,7 +10587,7 @@
         <p:spPr>
           <a:xfrm>
             <a:off x="502920" y="6263640"/>
-            <a:ext cx="10607040" cy="457200"/>
+            <a:ext cx="10424160" cy="320040"/>
           </a:xfrm>
           <a:prstGeom prst="rect">
             <a:avLst/>
@@ -10508,8 +10625,8 @@
         </p:nvSpPr>
         <p:spPr>
           <a:xfrm>
-            <a:off x="502920" y="1828800"/>
-            <a:ext cx="11155680" cy="3703320"/>
+            <a:off x="502920" y="1737360"/>
+            <a:ext cx="11183112" cy="4050792"/>
           </a:xfrm>
           <a:prstGeom prst="rect">
             <a:avLst/>
@@ -10521,15 +10638,15 @@
           <a:bodyPr wrap="square" lIns="0" tIns="0" rIns="0" bIns="0" rtlCol="0" anchor="t"/>
           <a:lstStyle/>
           <a:p>
-            <a:pPr algn="l" marL="355600" indent="-355600">
+            <a:pPr algn="l" marL="368300" indent="-368300">
               <a:spcAft>
-                <a:spcPts val="2600"/>
+                <a:spcPts val="3000"/>
               </a:spcAft>
               <a:buSzPct val="100000"/>
               <a:buChar char="•"/>
             </a:pPr>
             <a:r>
-              <a:rPr lang="ja-JP" altLang="en-US" sz="2400" b="1" dirty="0">
+              <a:rPr lang="ja-JP" altLang="en-US" sz="2500" b="1" dirty="0">
                 <a:solidFill>
                   <a:srgbClr val="262626"/>
                 </a:solidFill>
@@ -10540,7 +10657,7 @@
               <a:t>プロポフォール</a:t>
             </a:r>
             <a:r>
-              <a:rPr lang="ja-JP" altLang="en-US" sz="2400" dirty="0">
+              <a:rPr lang="ja-JP" altLang="en-US" sz="2500" dirty="0">
                 <a:solidFill>
                   <a:srgbClr val="262626"/>
                 </a:solidFill>
@@ -10550,18 +10667,18 @@
               </a:rPr>
               <a:t>：0.5 mg/kg/10 秒で導入、維持 4〜10 mg/kg/時</a:t>
             </a:r>
-            <a:endParaRPr lang="ja-JP" sz="2400" dirty="0"/>
-          </a:p>
-          <a:p>
-            <a:pPr algn="l" marL="355600" indent="-355600">
+            <a:endParaRPr lang="ja-JP" sz="2500" dirty="0"/>
+          </a:p>
+          <a:p>
+            <a:pPr algn="l" marL="368300" indent="-368300">
               <a:spcAft>
-                <a:spcPts val="2600"/>
+                <a:spcPts val="3000"/>
               </a:spcAft>
               <a:buSzPct val="100000"/>
               <a:buChar char="•"/>
             </a:pPr>
             <a:r>
-              <a:rPr lang="ja-JP" altLang="en-US" sz="2400" b="1" dirty="0">
+              <a:rPr lang="ja-JP" altLang="en-US" sz="2500" b="1" dirty="0">
                 <a:solidFill>
                   <a:srgbClr val="262626"/>
                 </a:solidFill>
@@ -10572,7 +10689,7 @@
               <a:t>レミマゾラム</a:t>
             </a:r>
             <a:r>
-              <a:rPr lang="ja-JP" altLang="en-US" sz="2400" dirty="0">
+              <a:rPr lang="ja-JP" altLang="en-US" sz="2500" dirty="0">
                 <a:solidFill>
                   <a:srgbClr val="262626"/>
                 </a:solidFill>
@@ -10582,18 +10699,18 @@
               </a:rPr>
               <a:t>：12 mg/kg/時で導入、維持 1 mg/kg/時</a:t>
             </a:r>
-            <a:endParaRPr lang="ja-JP" sz="2400" dirty="0"/>
-          </a:p>
-          <a:p>
-            <a:pPr algn="l" marL="355600" indent="-355600">
+            <a:endParaRPr lang="ja-JP" sz="2500" dirty="0"/>
+          </a:p>
+          <a:p>
+            <a:pPr algn="l" marL="368300" indent="-368300">
               <a:spcAft>
-                <a:spcPts val="2600"/>
+                <a:spcPts val="3000"/>
               </a:spcAft>
               <a:buSzPct val="100000"/>
               <a:buChar char="•"/>
             </a:pPr>
             <a:r>
-              <a:rPr lang="ja-JP" altLang="en-US" sz="2400" b="1" dirty="0">
+              <a:rPr lang="ja-JP" altLang="en-US" sz="2500" b="1" dirty="0">
                 <a:solidFill>
                   <a:srgbClr val="262626"/>
                 </a:solidFill>
@@ -10604,7 +10721,7 @@
               <a:t>ケタミン</a:t>
             </a:r>
             <a:r>
-              <a:rPr lang="ja-JP" altLang="en-US" sz="2400" dirty="0">
+              <a:rPr lang="ja-JP" altLang="en-US" sz="2500" dirty="0">
                 <a:solidFill>
                   <a:srgbClr val="262626"/>
                 </a:solidFill>
@@ -10614,18 +10731,18 @@
               </a:rPr>
               <a:t>：1〜2 mg/kg、鎮痛あり、循環が保たれやすい</a:t>
             </a:r>
-            <a:endParaRPr lang="ja-JP" sz="2400" dirty="0"/>
-          </a:p>
-          <a:p>
-            <a:pPr algn="l" marL="355600" indent="-355600">
+            <a:endParaRPr lang="ja-JP" sz="2500" dirty="0"/>
+          </a:p>
+          <a:p>
+            <a:pPr algn="l" marL="368300" indent="-368300">
               <a:spcAft>
-                <a:spcPts val="2600"/>
+                <a:spcPts val="3000"/>
               </a:spcAft>
               <a:buSzPct val="100000"/>
               <a:buChar char="•"/>
             </a:pPr>
             <a:r>
-              <a:rPr lang="ja-JP" altLang="en-US" sz="2400" dirty="0">
+              <a:rPr lang="ja-JP" altLang="en-US" sz="2500" dirty="0">
                 <a:solidFill>
                   <a:srgbClr val="262626"/>
                 </a:solidFill>
@@ -10635,18 +10752,18 @@
               </a:rPr>
               <a:t>どの薬も、少量から、待って、反応を見て追加</a:t>
             </a:r>
-            <a:endParaRPr lang="ja-JP" sz="2400" dirty="0"/>
-          </a:p>
-          <a:p>
-            <a:pPr algn="l" marL="355600" indent="-355600">
+            <a:endParaRPr lang="ja-JP" sz="2500" dirty="0"/>
+          </a:p>
+          <a:p>
+            <a:pPr algn="l" marL="368300" indent="-368300">
               <a:spcAft>
-                <a:spcPts val="2600"/>
+                <a:spcPts val="3000"/>
               </a:spcAft>
               <a:buSzPct val="100000"/>
               <a:buChar char="•"/>
             </a:pPr>
             <a:r>
-              <a:rPr lang="ja-JP" altLang="en-US" sz="2400" dirty="0">
+              <a:rPr lang="ja-JP" altLang="en-US" sz="2500" dirty="0">
                 <a:solidFill>
                   <a:srgbClr val="262626"/>
                 </a:solidFill>
@@ -10656,7 +10773,7 @@
               </a:rPr>
               <a:t>導入後は血圧を 1〜2 分ごとに、昇圧薬を手元に</a:t>
             </a:r>
-            <a:endParaRPr lang="ja-JP" sz="2400" dirty="0"/>
+            <a:endParaRPr lang="ja-JP" sz="2500" dirty="0"/>
           </a:p>
         </p:txBody>
       </p:sp>

--- a/slides/3-2_iv_anesthetics/3-2_iv_anesthetics.pptx
+++ b/slides/3-2_iv_anesthetics/3-2_iv_anesthetics.pptx
@@ -1456,7 +1456,7 @@
         <p:spPr>
           <a:xfrm>
             <a:off x="502920" y="320040"/>
-            <a:ext cx="7562088" cy="868680"/>
+            <a:ext cx="8503920" cy="868680"/>
           </a:xfrm>
           <a:prstGeom prst="rect">
             <a:avLst/>
@@ -2062,7 +2062,7 @@
         <p:spPr>
           <a:xfrm>
             <a:off x="502920" y="320040"/>
-            <a:ext cx="7562088" cy="868680"/>
+            <a:ext cx="8503920" cy="868680"/>
           </a:xfrm>
           <a:prstGeom prst="rect">
             <a:avLst/>
@@ -2128,16 +2128,16 @@
         </p:nvSpPr>
         <p:spPr>
           <a:xfrm>
-            <a:off x="8110728" y="457200"/>
-            <a:ext cx="685800" cy="585216"/>
+            <a:off x="8677656" y="54864"/>
+            <a:ext cx="621792" cy="585216"/>
           </a:xfrm>
           <a:prstGeom prst="roundRect">
             <a:avLst>
-              <a:gd name="adj" fmla="val 12500"/>
+              <a:gd name="adj" fmla="val 7813"/>
             </a:avLst>
           </a:prstGeom>
           <a:solidFill>
-            <a:srgbClr val="007C80"/>
+            <a:srgbClr val="00A8AA"/>
           </a:solidFill>
           <a:ln/>
         </p:spPr>
@@ -2149,7 +2149,7 @@
               <a:buNone/>
             </a:pPr>
             <a:r>
-              <a:rPr lang="ja-JP" altLang="en-US" sz="1200" b="1" dirty="0">
+              <a:rPr lang="ja-JP" altLang="en-US" sz="1050" b="1" dirty="0">
                 <a:solidFill>
                   <a:srgbClr val="FFFFFF"/>
                 </a:solidFill>
@@ -2159,7 +2159,7 @@
               </a:rPr>
               <a:t>共通</a:t>
             </a:r>
-            <a:endParaRPr lang="ja-JP" sz="1200" dirty="0"/>
+            <a:endParaRPr lang="ja-JP" sz="1050" dirty="0"/>
           </a:p>
         </p:txBody>
       </p:sp>
@@ -2171,12 +2171,12 @@
         </p:nvSpPr>
         <p:spPr>
           <a:xfrm>
-            <a:off x="8833104" y="457200"/>
-            <a:ext cx="685800" cy="585216"/>
+            <a:off x="9354312" y="54864"/>
+            <a:ext cx="621792" cy="585216"/>
           </a:xfrm>
           <a:prstGeom prst="roundRect">
             <a:avLst>
-              <a:gd name="adj" fmla="val 12500"/>
+              <a:gd name="adj" fmla="val 7813"/>
             </a:avLst>
           </a:prstGeom>
           <a:solidFill>
@@ -2192,7 +2192,7 @@
               <a:buNone/>
             </a:pPr>
             <a:r>
-              <a:rPr lang="ja-JP" altLang="en-US" sz="1200" dirty="0">
+              <a:rPr lang="ja-JP" altLang="en-US" sz="1050" dirty="0">
                 <a:solidFill>
                   <a:srgbClr val="404040"/>
                 </a:solidFill>
@@ -2202,14 +2202,14 @@
               </a:rPr>
               <a:t>プロポ</a:t>
             </a:r>
-            <a:endParaRPr lang="ja-JP" sz="1200" dirty="0"/>
+            <a:endParaRPr lang="ja-JP" sz="1050" dirty="0"/>
           </a:p>
           <a:p>
             <a:pPr algn="ctr" indent="0" marL="0">
               <a:buNone/>
             </a:pPr>
             <a:r>
-              <a:rPr lang="ja-JP" altLang="en-US" sz="1200" dirty="0">
+              <a:rPr lang="ja-JP" altLang="en-US" sz="1050" dirty="0">
                 <a:solidFill>
                   <a:srgbClr val="404040"/>
                 </a:solidFill>
@@ -2219,7 +2219,7 @@
               </a:rPr>
               <a:t>フォール</a:t>
             </a:r>
-            <a:endParaRPr lang="ja-JP" sz="1200" dirty="0"/>
+            <a:endParaRPr lang="ja-JP" sz="1050" dirty="0"/>
           </a:p>
         </p:txBody>
       </p:sp>
@@ -2231,12 +2231,12 @@
         </p:nvSpPr>
         <p:spPr>
           <a:xfrm>
-            <a:off x="9555480" y="457200"/>
-            <a:ext cx="685800" cy="585216"/>
+            <a:off x="10030968" y="54864"/>
+            <a:ext cx="621792" cy="585216"/>
           </a:xfrm>
           <a:prstGeom prst="roundRect">
             <a:avLst>
-              <a:gd name="adj" fmla="val 12500"/>
+              <a:gd name="adj" fmla="val 7813"/>
             </a:avLst>
           </a:prstGeom>
           <a:solidFill>
@@ -2252,7 +2252,7 @@
               <a:buNone/>
             </a:pPr>
             <a:r>
-              <a:rPr lang="ja-JP" altLang="en-US" sz="1200" dirty="0">
+              <a:rPr lang="ja-JP" altLang="en-US" sz="1050" dirty="0">
                 <a:solidFill>
                   <a:srgbClr val="404040"/>
                 </a:solidFill>
@@ -2262,14 +2262,14 @@
               </a:rPr>
               <a:t>レミマ</a:t>
             </a:r>
-            <a:endParaRPr lang="ja-JP" sz="1200" dirty="0"/>
+            <a:endParaRPr lang="ja-JP" sz="1050" dirty="0"/>
           </a:p>
           <a:p>
             <a:pPr algn="ctr" indent="0" marL="0">
               <a:buNone/>
             </a:pPr>
             <a:r>
-              <a:rPr lang="ja-JP" altLang="en-US" sz="1200" dirty="0">
+              <a:rPr lang="ja-JP" altLang="en-US" sz="1050" dirty="0">
                 <a:solidFill>
                   <a:srgbClr val="404040"/>
                 </a:solidFill>
@@ -2279,7 +2279,7 @@
               </a:rPr>
               <a:t>ゾラム</a:t>
             </a:r>
-            <a:endParaRPr lang="ja-JP" sz="1200" dirty="0"/>
+            <a:endParaRPr lang="ja-JP" sz="1050" dirty="0"/>
           </a:p>
         </p:txBody>
       </p:sp>
@@ -2291,12 +2291,12 @@
         </p:nvSpPr>
         <p:spPr>
           <a:xfrm>
-            <a:off x="10277856" y="457200"/>
-            <a:ext cx="685800" cy="585216"/>
+            <a:off x="10707624" y="54864"/>
+            <a:ext cx="621792" cy="585216"/>
           </a:xfrm>
           <a:prstGeom prst="roundRect">
             <a:avLst>
-              <a:gd name="adj" fmla="val 12500"/>
+              <a:gd name="adj" fmla="val 7813"/>
             </a:avLst>
           </a:prstGeom>
           <a:solidFill>
@@ -2312,7 +2312,7 @@
               <a:buNone/>
             </a:pPr>
             <a:r>
-              <a:rPr lang="ja-JP" altLang="en-US" sz="1200" dirty="0">
+              <a:rPr lang="ja-JP" altLang="en-US" sz="1050" dirty="0">
                 <a:solidFill>
                   <a:srgbClr val="404040"/>
                 </a:solidFill>
@@ -2322,14 +2322,14 @@
               </a:rPr>
               <a:t>ミダ・</a:t>
             </a:r>
-            <a:endParaRPr lang="ja-JP" sz="1200" dirty="0"/>
+            <a:endParaRPr lang="ja-JP" sz="1050" dirty="0"/>
           </a:p>
           <a:p>
             <a:pPr algn="ctr" indent="0" marL="0">
               <a:buNone/>
             </a:pPr>
             <a:r>
-              <a:rPr lang="ja-JP" altLang="en-US" sz="1200" dirty="0">
+              <a:rPr lang="ja-JP" altLang="en-US" sz="1050" dirty="0">
                 <a:solidFill>
                   <a:srgbClr val="404040"/>
                 </a:solidFill>
@@ -2339,7 +2339,7 @@
               </a:rPr>
               <a:t>ケタ</a:t>
             </a:r>
-            <a:endParaRPr lang="ja-JP" sz="1200" dirty="0"/>
+            <a:endParaRPr lang="ja-JP" sz="1050" dirty="0"/>
           </a:p>
         </p:txBody>
       </p:sp>
@@ -2351,12 +2351,12 @@
         </p:nvSpPr>
         <p:spPr>
           <a:xfrm>
-            <a:off x="11000232" y="457200"/>
-            <a:ext cx="685800" cy="585216"/>
+            <a:off x="11384280" y="54864"/>
+            <a:ext cx="621792" cy="585216"/>
           </a:xfrm>
           <a:prstGeom prst="roundRect">
             <a:avLst>
-              <a:gd name="adj" fmla="val 12500"/>
+              <a:gd name="adj" fmla="val 7813"/>
             </a:avLst>
           </a:prstGeom>
           <a:solidFill>
@@ -2372,7 +2372,7 @@
               <a:buNone/>
             </a:pPr>
             <a:r>
-              <a:rPr lang="ja-JP" altLang="en-US" sz="1200" dirty="0">
+              <a:rPr lang="ja-JP" altLang="en-US" sz="1050" dirty="0">
                 <a:solidFill>
                   <a:srgbClr val="404040"/>
                 </a:solidFill>
@@ -2382,7 +2382,7 @@
               </a:rPr>
               <a:t>使い分け</a:t>
             </a:r>
-            <a:endParaRPr lang="ja-JP" sz="1200" dirty="0"/>
+            <a:endParaRPr lang="ja-JP" sz="1050" dirty="0"/>
           </a:p>
         </p:txBody>
       </p:sp>
@@ -2394,7 +2394,7 @@
         </p:nvSpPr>
         <p:spPr>
           <a:xfrm>
-            <a:off x="11247120" y="6263640"/>
+            <a:off x="11247120" y="6446520"/>
             <a:ext cx="731520" cy="320040"/>
           </a:xfrm>
           <a:prstGeom prst="rect">
@@ -2433,8 +2433,8 @@
         </p:nvSpPr>
         <p:spPr>
           <a:xfrm>
-            <a:off x="502920" y="6263640"/>
-            <a:ext cx="10424160" cy="320040"/>
+            <a:off x="502920" y="6409944"/>
+            <a:ext cx="10424160" cy="310896"/>
           </a:xfrm>
           <a:prstGeom prst="rect">
             <a:avLst/>
@@ -2944,7 +2944,7 @@
         <p:spPr>
           <a:xfrm>
             <a:off x="502920" y="320040"/>
-            <a:ext cx="7562088" cy="868680"/>
+            <a:ext cx="8503920" cy="868680"/>
           </a:xfrm>
           <a:prstGeom prst="rect">
             <a:avLst/>
@@ -3010,12 +3010,12 @@
         </p:nvSpPr>
         <p:spPr>
           <a:xfrm>
-            <a:off x="8110728" y="457200"/>
-            <a:ext cx="685800" cy="585216"/>
+            <a:off x="8677656" y="54864"/>
+            <a:ext cx="621792" cy="585216"/>
           </a:xfrm>
           <a:prstGeom prst="roundRect">
             <a:avLst>
-              <a:gd name="adj" fmla="val 12500"/>
+              <a:gd name="adj" fmla="val 7813"/>
             </a:avLst>
           </a:prstGeom>
           <a:solidFill>
@@ -3031,7 +3031,7 @@
               <a:buNone/>
             </a:pPr>
             <a:r>
-              <a:rPr lang="ja-JP" altLang="en-US" sz="1200" dirty="0">
+              <a:rPr lang="ja-JP" altLang="en-US" sz="1050" dirty="0">
                 <a:solidFill>
                   <a:srgbClr val="404040"/>
                 </a:solidFill>
@@ -3041,7 +3041,7 @@
               </a:rPr>
               <a:t>共通</a:t>
             </a:r>
-            <a:endParaRPr lang="ja-JP" sz="1200" dirty="0"/>
+            <a:endParaRPr lang="ja-JP" sz="1050" dirty="0"/>
           </a:p>
         </p:txBody>
       </p:sp>
@@ -3053,16 +3053,16 @@
         </p:nvSpPr>
         <p:spPr>
           <a:xfrm>
-            <a:off x="8833104" y="457200"/>
-            <a:ext cx="685800" cy="585216"/>
+            <a:off x="9354312" y="54864"/>
+            <a:ext cx="621792" cy="585216"/>
           </a:xfrm>
           <a:prstGeom prst="roundRect">
             <a:avLst>
-              <a:gd name="adj" fmla="val 12500"/>
+              <a:gd name="adj" fmla="val 7813"/>
             </a:avLst>
           </a:prstGeom>
           <a:solidFill>
-            <a:srgbClr val="007C80"/>
+            <a:srgbClr val="00A8AA"/>
           </a:solidFill>
           <a:ln/>
         </p:spPr>
@@ -3074,7 +3074,7 @@
               <a:buNone/>
             </a:pPr>
             <a:r>
-              <a:rPr lang="ja-JP" altLang="en-US" sz="1200" b="1" dirty="0">
+              <a:rPr lang="ja-JP" altLang="en-US" sz="1050" b="1" dirty="0">
                 <a:solidFill>
                   <a:srgbClr val="FFFFFF"/>
                 </a:solidFill>
@@ -3084,14 +3084,14 @@
               </a:rPr>
               <a:t>プロポ</a:t>
             </a:r>
-            <a:endParaRPr lang="ja-JP" sz="1200" dirty="0"/>
+            <a:endParaRPr lang="ja-JP" sz="1050" dirty="0"/>
           </a:p>
           <a:p>
             <a:pPr algn="ctr" indent="0" marL="0">
               <a:buNone/>
             </a:pPr>
             <a:r>
-              <a:rPr lang="ja-JP" altLang="en-US" sz="1200" b="1" dirty="0">
+              <a:rPr lang="ja-JP" altLang="en-US" sz="1050" b="1" dirty="0">
                 <a:solidFill>
                   <a:srgbClr val="FFFFFF"/>
                 </a:solidFill>
@@ -3101,7 +3101,7 @@
               </a:rPr>
               <a:t>フォール</a:t>
             </a:r>
-            <a:endParaRPr lang="ja-JP" sz="1200" dirty="0"/>
+            <a:endParaRPr lang="ja-JP" sz="1050" dirty="0"/>
           </a:p>
         </p:txBody>
       </p:sp>
@@ -3113,12 +3113,12 @@
         </p:nvSpPr>
         <p:spPr>
           <a:xfrm>
-            <a:off x="9555480" y="457200"/>
-            <a:ext cx="685800" cy="585216"/>
+            <a:off x="10030968" y="54864"/>
+            <a:ext cx="621792" cy="585216"/>
           </a:xfrm>
           <a:prstGeom prst="roundRect">
             <a:avLst>
-              <a:gd name="adj" fmla="val 12500"/>
+              <a:gd name="adj" fmla="val 7813"/>
             </a:avLst>
           </a:prstGeom>
           <a:solidFill>
@@ -3134,7 +3134,7 @@
               <a:buNone/>
             </a:pPr>
             <a:r>
-              <a:rPr lang="ja-JP" altLang="en-US" sz="1200" dirty="0">
+              <a:rPr lang="ja-JP" altLang="en-US" sz="1050" dirty="0">
                 <a:solidFill>
                   <a:srgbClr val="404040"/>
                 </a:solidFill>
@@ -3144,14 +3144,14 @@
               </a:rPr>
               <a:t>レミマ</a:t>
             </a:r>
-            <a:endParaRPr lang="ja-JP" sz="1200" dirty="0"/>
+            <a:endParaRPr lang="ja-JP" sz="1050" dirty="0"/>
           </a:p>
           <a:p>
             <a:pPr algn="ctr" indent="0" marL="0">
               <a:buNone/>
             </a:pPr>
             <a:r>
-              <a:rPr lang="ja-JP" altLang="en-US" sz="1200" dirty="0">
+              <a:rPr lang="ja-JP" altLang="en-US" sz="1050" dirty="0">
                 <a:solidFill>
                   <a:srgbClr val="404040"/>
                 </a:solidFill>
@@ -3161,7 +3161,7 @@
               </a:rPr>
               <a:t>ゾラム</a:t>
             </a:r>
-            <a:endParaRPr lang="ja-JP" sz="1200" dirty="0"/>
+            <a:endParaRPr lang="ja-JP" sz="1050" dirty="0"/>
           </a:p>
         </p:txBody>
       </p:sp>
@@ -3173,12 +3173,12 @@
         </p:nvSpPr>
         <p:spPr>
           <a:xfrm>
-            <a:off x="10277856" y="457200"/>
-            <a:ext cx="685800" cy="585216"/>
+            <a:off x="10707624" y="54864"/>
+            <a:ext cx="621792" cy="585216"/>
           </a:xfrm>
           <a:prstGeom prst="roundRect">
             <a:avLst>
-              <a:gd name="adj" fmla="val 12500"/>
+              <a:gd name="adj" fmla="val 7813"/>
             </a:avLst>
           </a:prstGeom>
           <a:solidFill>
@@ -3194,7 +3194,7 @@
               <a:buNone/>
             </a:pPr>
             <a:r>
-              <a:rPr lang="ja-JP" altLang="en-US" sz="1200" dirty="0">
+              <a:rPr lang="ja-JP" altLang="en-US" sz="1050" dirty="0">
                 <a:solidFill>
                   <a:srgbClr val="404040"/>
                 </a:solidFill>
@@ -3204,14 +3204,14 @@
               </a:rPr>
               <a:t>ミダ・</a:t>
             </a:r>
-            <a:endParaRPr lang="ja-JP" sz="1200" dirty="0"/>
+            <a:endParaRPr lang="ja-JP" sz="1050" dirty="0"/>
           </a:p>
           <a:p>
             <a:pPr algn="ctr" indent="0" marL="0">
               <a:buNone/>
             </a:pPr>
             <a:r>
-              <a:rPr lang="ja-JP" altLang="en-US" sz="1200" dirty="0">
+              <a:rPr lang="ja-JP" altLang="en-US" sz="1050" dirty="0">
                 <a:solidFill>
                   <a:srgbClr val="404040"/>
                 </a:solidFill>
@@ -3221,7 +3221,7 @@
               </a:rPr>
               <a:t>ケタ</a:t>
             </a:r>
-            <a:endParaRPr lang="ja-JP" sz="1200" dirty="0"/>
+            <a:endParaRPr lang="ja-JP" sz="1050" dirty="0"/>
           </a:p>
         </p:txBody>
       </p:sp>
@@ -3233,12 +3233,12 @@
         </p:nvSpPr>
         <p:spPr>
           <a:xfrm>
-            <a:off x="11000232" y="457200"/>
-            <a:ext cx="685800" cy="585216"/>
+            <a:off x="11384280" y="54864"/>
+            <a:ext cx="621792" cy="585216"/>
           </a:xfrm>
           <a:prstGeom prst="roundRect">
             <a:avLst>
-              <a:gd name="adj" fmla="val 12500"/>
+              <a:gd name="adj" fmla="val 7813"/>
             </a:avLst>
           </a:prstGeom>
           <a:solidFill>
@@ -3254,7 +3254,7 @@
               <a:buNone/>
             </a:pPr>
             <a:r>
-              <a:rPr lang="ja-JP" altLang="en-US" sz="1200" dirty="0">
+              <a:rPr lang="ja-JP" altLang="en-US" sz="1050" dirty="0">
                 <a:solidFill>
                   <a:srgbClr val="404040"/>
                 </a:solidFill>
@@ -3264,7 +3264,7 @@
               </a:rPr>
               <a:t>使い分け</a:t>
             </a:r>
-            <a:endParaRPr lang="ja-JP" sz="1200" dirty="0"/>
+            <a:endParaRPr lang="ja-JP" sz="1050" dirty="0"/>
           </a:p>
         </p:txBody>
       </p:sp>
@@ -3276,7 +3276,7 @@
         </p:nvSpPr>
         <p:spPr>
           <a:xfrm>
-            <a:off x="11247120" y="6263640"/>
+            <a:off x="11247120" y="6446520"/>
             <a:ext cx="731520" cy="320040"/>
           </a:xfrm>
           <a:prstGeom prst="rect">
@@ -3315,8 +3315,8 @@
         </p:nvSpPr>
         <p:spPr>
           <a:xfrm>
-            <a:off x="502920" y="5943600"/>
-            <a:ext cx="10424160" cy="640080"/>
+            <a:off x="502920" y="6099048"/>
+            <a:ext cx="10424160" cy="621792"/>
           </a:xfrm>
           <a:prstGeom prst="rect">
             <a:avLst/>
@@ -3371,8 +3371,8 @@
         </p:nvSpPr>
         <p:spPr>
           <a:xfrm>
-            <a:off x="502920" y="1691640"/>
-            <a:ext cx="4010132" cy="4032504"/>
+            <a:off x="502920" y="1673352"/>
+            <a:ext cx="4010132" cy="4206240"/>
           </a:xfrm>
           <a:prstGeom prst="roundRect">
             <a:avLst>
@@ -3393,7 +3393,7 @@
         </p:nvSpPr>
         <p:spPr>
           <a:xfrm>
-            <a:off x="667512" y="1819656"/>
+            <a:off x="667512" y="1764792"/>
             <a:ext cx="3680948" cy="457200"/>
           </a:xfrm>
           <a:prstGeom prst="rect">
@@ -3432,7 +3432,7 @@
         </p:nvSpPr>
         <p:spPr>
           <a:xfrm>
-            <a:off x="667512" y="2528316"/>
+            <a:off x="667512" y="2295144"/>
             <a:ext cx="3680948" cy="420624"/>
           </a:xfrm>
           <a:prstGeom prst="rect">
@@ -3493,7 +3493,7 @@
         </p:nvSpPr>
         <p:spPr>
           <a:xfrm>
-            <a:off x="941832" y="2948940"/>
+            <a:off x="941832" y="2715768"/>
             <a:ext cx="3406628" cy="420624"/>
           </a:xfrm>
           <a:prstGeom prst="rect">
@@ -3532,7 +3532,7 @@
         </p:nvSpPr>
         <p:spPr>
           <a:xfrm>
-            <a:off x="667512" y="3781044"/>
+            <a:off x="667512" y="3319272"/>
             <a:ext cx="3680948" cy="420624"/>
           </a:xfrm>
           <a:prstGeom prst="rect">
@@ -3582,7 +3582,7 @@
         </p:nvSpPr>
         <p:spPr>
           <a:xfrm>
-            <a:off x="667512" y="4613148"/>
+            <a:off x="667512" y="3922776"/>
             <a:ext cx="3680948" cy="420624"/>
           </a:xfrm>
           <a:prstGeom prst="rect">
@@ -3621,7 +3621,7 @@
         </p:nvSpPr>
         <p:spPr>
           <a:xfrm>
-            <a:off x="941832" y="5033772"/>
+            <a:off x="941832" y="4343400"/>
             <a:ext cx="3406628" cy="420624"/>
           </a:xfrm>
           <a:prstGeom prst="rect">
@@ -3660,8 +3660,8 @@
         </p:nvSpPr>
         <p:spPr>
           <a:xfrm>
-            <a:off x="4732508" y="1691640"/>
-            <a:ext cx="2874142" cy="4032504"/>
+            <a:off x="4732508" y="1673352"/>
+            <a:ext cx="2874142" cy="4206240"/>
           </a:xfrm>
           <a:prstGeom prst="roundRect">
             <a:avLst>
@@ -3682,7 +3682,7 @@
         </p:nvSpPr>
         <p:spPr>
           <a:xfrm>
-            <a:off x="4897100" y="1819656"/>
+            <a:off x="4897100" y="1764792"/>
             <a:ext cx="2544958" cy="457200"/>
           </a:xfrm>
           <a:prstGeom prst="rect">
@@ -3721,7 +3721,7 @@
         </p:nvSpPr>
         <p:spPr>
           <a:xfrm>
-            <a:off x="4897100" y="2386584"/>
+            <a:off x="4897100" y="2295144"/>
             <a:ext cx="2544958" cy="420624"/>
           </a:xfrm>
           <a:prstGeom prst="rect">
@@ -3760,7 +3760,7 @@
         </p:nvSpPr>
         <p:spPr>
           <a:xfrm>
-            <a:off x="5171420" y="2807208"/>
+            <a:off x="5171420" y="2715768"/>
             <a:ext cx="2270638" cy="420624"/>
           </a:xfrm>
           <a:prstGeom prst="rect">
@@ -3799,7 +3799,7 @@
         </p:nvSpPr>
         <p:spPr>
           <a:xfrm>
-            <a:off x="4897100" y="3456432"/>
+            <a:off x="4897100" y="3319272"/>
             <a:ext cx="2544958" cy="420624"/>
           </a:xfrm>
           <a:prstGeom prst="rect">
@@ -3838,7 +3838,7 @@
         </p:nvSpPr>
         <p:spPr>
           <a:xfrm>
-            <a:off x="4897100" y="4105656"/>
+            <a:off x="4897100" y="3922776"/>
             <a:ext cx="2544958" cy="420624"/>
           </a:xfrm>
           <a:prstGeom prst="rect">
@@ -3877,7 +3877,7 @@
         </p:nvSpPr>
         <p:spPr>
           <a:xfrm>
-            <a:off x="5171420" y="4526280"/>
+            <a:off x="5171420" y="4343400"/>
             <a:ext cx="2270638" cy="420624"/>
           </a:xfrm>
           <a:prstGeom prst="rect">
@@ -3916,7 +3916,7 @@
         </p:nvSpPr>
         <p:spPr>
           <a:xfrm>
-            <a:off x="4897100" y="5175504"/>
+            <a:off x="4897100" y="4946904"/>
             <a:ext cx="2544958" cy="420624"/>
           </a:xfrm>
           <a:prstGeom prst="rect">
@@ -3955,8 +3955,8 @@
         </p:nvSpPr>
         <p:spPr>
           <a:xfrm>
-            <a:off x="7826106" y="1691640"/>
-            <a:ext cx="3859926" cy="4032504"/>
+            <a:off x="7826106" y="1673352"/>
+            <a:ext cx="3859926" cy="4206240"/>
           </a:xfrm>
           <a:prstGeom prst="roundRect">
             <a:avLst>
@@ -3977,7 +3977,7 @@
         </p:nvSpPr>
         <p:spPr>
           <a:xfrm>
-            <a:off x="7990698" y="1819656"/>
+            <a:off x="7990698" y="1764792"/>
             <a:ext cx="3530742" cy="457200"/>
           </a:xfrm>
           <a:prstGeom prst="rect">
@@ -4016,7 +4016,7 @@
         </p:nvSpPr>
         <p:spPr>
           <a:xfrm>
-            <a:off x="7990698" y="2386584"/>
+            <a:off x="7990698" y="2295144"/>
             <a:ext cx="3530742" cy="420624"/>
           </a:xfrm>
           <a:prstGeom prst="rect">
@@ -4055,7 +4055,7 @@
         </p:nvSpPr>
         <p:spPr>
           <a:xfrm>
-            <a:off x="8265018" y="2807208"/>
+            <a:off x="8265018" y="2715768"/>
             <a:ext cx="3256422" cy="420624"/>
           </a:xfrm>
           <a:prstGeom prst="rect">
@@ -4094,7 +4094,7 @@
         </p:nvSpPr>
         <p:spPr>
           <a:xfrm>
-            <a:off x="7990698" y="3570732"/>
+            <a:off x="7990698" y="3319272"/>
             <a:ext cx="3530742" cy="420624"/>
           </a:xfrm>
           <a:prstGeom prst="rect">
@@ -4133,7 +4133,7 @@
         </p:nvSpPr>
         <p:spPr>
           <a:xfrm>
-            <a:off x="8265018" y="3991356"/>
+            <a:off x="8265018" y="3739896"/>
             <a:ext cx="3256422" cy="420624"/>
           </a:xfrm>
           <a:prstGeom prst="rect">
@@ -4183,7 +4183,7 @@
         </p:nvSpPr>
         <p:spPr>
           <a:xfrm>
-            <a:off x="7990698" y="4754880"/>
+            <a:off x="7990698" y="4343400"/>
             <a:ext cx="3530742" cy="420624"/>
           </a:xfrm>
           <a:prstGeom prst="rect">
@@ -4222,7 +4222,7 @@
         </p:nvSpPr>
         <p:spPr>
           <a:xfrm>
-            <a:off x="8265018" y="5175504"/>
+            <a:off x="8265018" y="4764024"/>
             <a:ext cx="3256422" cy="420624"/>
           </a:xfrm>
           <a:prstGeom prst="rect">
@@ -4313,7 +4313,7 @@
         <p:spPr>
           <a:xfrm>
             <a:off x="502920" y="320040"/>
-            <a:ext cx="7562088" cy="868680"/>
+            <a:ext cx="8503920" cy="868680"/>
           </a:xfrm>
           <a:prstGeom prst="rect">
             <a:avLst/>
@@ -4379,12 +4379,12 @@
         </p:nvSpPr>
         <p:spPr>
           <a:xfrm>
-            <a:off x="8110728" y="457200"/>
-            <a:ext cx="685800" cy="585216"/>
+            <a:off x="8677656" y="54864"/>
+            <a:ext cx="621792" cy="585216"/>
           </a:xfrm>
           <a:prstGeom prst="roundRect">
             <a:avLst>
-              <a:gd name="adj" fmla="val 12500"/>
+              <a:gd name="adj" fmla="val 7813"/>
             </a:avLst>
           </a:prstGeom>
           <a:solidFill>
@@ -4400,7 +4400,7 @@
               <a:buNone/>
             </a:pPr>
             <a:r>
-              <a:rPr lang="ja-JP" altLang="en-US" sz="1200" dirty="0">
+              <a:rPr lang="ja-JP" altLang="en-US" sz="1050" dirty="0">
                 <a:solidFill>
                   <a:srgbClr val="404040"/>
                 </a:solidFill>
@@ -4410,7 +4410,7 @@
               </a:rPr>
               <a:t>共通</a:t>
             </a:r>
-            <a:endParaRPr lang="ja-JP" sz="1200" dirty="0"/>
+            <a:endParaRPr lang="ja-JP" sz="1050" dirty="0"/>
           </a:p>
         </p:txBody>
       </p:sp>
@@ -4422,12 +4422,12 @@
         </p:nvSpPr>
         <p:spPr>
           <a:xfrm>
-            <a:off x="8833104" y="457200"/>
-            <a:ext cx="685800" cy="585216"/>
+            <a:off x="9354312" y="54864"/>
+            <a:ext cx="621792" cy="585216"/>
           </a:xfrm>
           <a:prstGeom prst="roundRect">
             <a:avLst>
-              <a:gd name="adj" fmla="val 12500"/>
+              <a:gd name="adj" fmla="val 7813"/>
             </a:avLst>
           </a:prstGeom>
           <a:solidFill>
@@ -4443,7 +4443,7 @@
               <a:buNone/>
             </a:pPr>
             <a:r>
-              <a:rPr lang="ja-JP" altLang="en-US" sz="1200" dirty="0">
+              <a:rPr lang="ja-JP" altLang="en-US" sz="1050" dirty="0">
                 <a:solidFill>
                   <a:srgbClr val="404040"/>
                 </a:solidFill>
@@ -4453,14 +4453,14 @@
               </a:rPr>
               <a:t>プロポ</a:t>
             </a:r>
-            <a:endParaRPr lang="ja-JP" sz="1200" dirty="0"/>
+            <a:endParaRPr lang="ja-JP" sz="1050" dirty="0"/>
           </a:p>
           <a:p>
             <a:pPr algn="ctr" indent="0" marL="0">
               <a:buNone/>
             </a:pPr>
             <a:r>
-              <a:rPr lang="ja-JP" altLang="en-US" sz="1200" dirty="0">
+              <a:rPr lang="ja-JP" altLang="en-US" sz="1050" dirty="0">
                 <a:solidFill>
                   <a:srgbClr val="404040"/>
                 </a:solidFill>
@@ -4470,7 +4470,7 @@
               </a:rPr>
               <a:t>フォール</a:t>
             </a:r>
-            <a:endParaRPr lang="ja-JP" sz="1200" dirty="0"/>
+            <a:endParaRPr lang="ja-JP" sz="1050" dirty="0"/>
           </a:p>
         </p:txBody>
       </p:sp>
@@ -4482,16 +4482,16 @@
         </p:nvSpPr>
         <p:spPr>
           <a:xfrm>
-            <a:off x="9555480" y="457200"/>
-            <a:ext cx="685800" cy="585216"/>
+            <a:off x="10030968" y="54864"/>
+            <a:ext cx="621792" cy="585216"/>
           </a:xfrm>
           <a:prstGeom prst="roundRect">
             <a:avLst>
-              <a:gd name="adj" fmla="val 12500"/>
+              <a:gd name="adj" fmla="val 7813"/>
             </a:avLst>
           </a:prstGeom>
           <a:solidFill>
-            <a:srgbClr val="007C80"/>
+            <a:srgbClr val="00A8AA"/>
           </a:solidFill>
           <a:ln/>
         </p:spPr>
@@ -4503,7 +4503,7 @@
               <a:buNone/>
             </a:pPr>
             <a:r>
-              <a:rPr lang="ja-JP" altLang="en-US" sz="1200" b="1" dirty="0">
+              <a:rPr lang="ja-JP" altLang="en-US" sz="1050" b="1" dirty="0">
                 <a:solidFill>
                   <a:srgbClr val="FFFFFF"/>
                 </a:solidFill>
@@ -4513,14 +4513,14 @@
               </a:rPr>
               <a:t>レミマ</a:t>
             </a:r>
-            <a:endParaRPr lang="ja-JP" sz="1200" dirty="0"/>
+            <a:endParaRPr lang="ja-JP" sz="1050" dirty="0"/>
           </a:p>
           <a:p>
             <a:pPr algn="ctr" indent="0" marL="0">
               <a:buNone/>
             </a:pPr>
             <a:r>
-              <a:rPr lang="ja-JP" altLang="en-US" sz="1200" b="1" dirty="0">
+              <a:rPr lang="ja-JP" altLang="en-US" sz="1050" b="1" dirty="0">
                 <a:solidFill>
                   <a:srgbClr val="FFFFFF"/>
                 </a:solidFill>
@@ -4530,7 +4530,7 @@
               </a:rPr>
               <a:t>ゾラム</a:t>
             </a:r>
-            <a:endParaRPr lang="ja-JP" sz="1200" dirty="0"/>
+            <a:endParaRPr lang="ja-JP" sz="1050" dirty="0"/>
           </a:p>
         </p:txBody>
       </p:sp>
@@ -4542,12 +4542,12 @@
         </p:nvSpPr>
         <p:spPr>
           <a:xfrm>
-            <a:off x="10277856" y="457200"/>
-            <a:ext cx="685800" cy="585216"/>
+            <a:off x="10707624" y="54864"/>
+            <a:ext cx="621792" cy="585216"/>
           </a:xfrm>
           <a:prstGeom prst="roundRect">
             <a:avLst>
-              <a:gd name="adj" fmla="val 12500"/>
+              <a:gd name="adj" fmla="val 7813"/>
             </a:avLst>
           </a:prstGeom>
           <a:solidFill>
@@ -4563,7 +4563,7 @@
               <a:buNone/>
             </a:pPr>
             <a:r>
-              <a:rPr lang="ja-JP" altLang="en-US" sz="1200" dirty="0">
+              <a:rPr lang="ja-JP" altLang="en-US" sz="1050" dirty="0">
                 <a:solidFill>
                   <a:srgbClr val="404040"/>
                 </a:solidFill>
@@ -4573,14 +4573,14 @@
               </a:rPr>
               <a:t>ミダ・</a:t>
             </a:r>
-            <a:endParaRPr lang="ja-JP" sz="1200" dirty="0"/>
+            <a:endParaRPr lang="ja-JP" sz="1050" dirty="0"/>
           </a:p>
           <a:p>
             <a:pPr algn="ctr" indent="0" marL="0">
               <a:buNone/>
             </a:pPr>
             <a:r>
-              <a:rPr lang="ja-JP" altLang="en-US" sz="1200" dirty="0">
+              <a:rPr lang="ja-JP" altLang="en-US" sz="1050" dirty="0">
                 <a:solidFill>
                   <a:srgbClr val="404040"/>
                 </a:solidFill>
@@ -4590,7 +4590,7 @@
               </a:rPr>
               <a:t>ケタ</a:t>
             </a:r>
-            <a:endParaRPr lang="ja-JP" sz="1200" dirty="0"/>
+            <a:endParaRPr lang="ja-JP" sz="1050" dirty="0"/>
           </a:p>
         </p:txBody>
       </p:sp>
@@ -4602,12 +4602,12 @@
         </p:nvSpPr>
         <p:spPr>
           <a:xfrm>
-            <a:off x="11000232" y="457200"/>
-            <a:ext cx="685800" cy="585216"/>
+            <a:off x="11384280" y="54864"/>
+            <a:ext cx="621792" cy="585216"/>
           </a:xfrm>
           <a:prstGeom prst="roundRect">
             <a:avLst>
-              <a:gd name="adj" fmla="val 12500"/>
+              <a:gd name="adj" fmla="val 7813"/>
             </a:avLst>
           </a:prstGeom>
           <a:solidFill>
@@ -4623,7 +4623,7 @@
               <a:buNone/>
             </a:pPr>
             <a:r>
-              <a:rPr lang="ja-JP" altLang="en-US" sz="1200" dirty="0">
+              <a:rPr lang="ja-JP" altLang="en-US" sz="1050" dirty="0">
                 <a:solidFill>
                   <a:srgbClr val="404040"/>
                 </a:solidFill>
@@ -4633,7 +4633,7 @@
               </a:rPr>
               <a:t>使い分け</a:t>
             </a:r>
-            <a:endParaRPr lang="ja-JP" sz="1200" dirty="0"/>
+            <a:endParaRPr lang="ja-JP" sz="1050" dirty="0"/>
           </a:p>
         </p:txBody>
       </p:sp>
@@ -4645,7 +4645,7 @@
         </p:nvSpPr>
         <p:spPr>
           <a:xfrm>
-            <a:off x="11247120" y="6263640"/>
+            <a:off x="11247120" y="6446520"/>
             <a:ext cx="731520" cy="320040"/>
           </a:xfrm>
           <a:prstGeom prst="rect">
@@ -4684,8 +4684,8 @@
         </p:nvSpPr>
         <p:spPr>
           <a:xfrm>
-            <a:off x="502920" y="5943600"/>
-            <a:ext cx="10424160" cy="640080"/>
+            <a:off x="502920" y="6099048"/>
+            <a:ext cx="10424160" cy="621792"/>
           </a:xfrm>
           <a:prstGeom prst="rect">
             <a:avLst/>
@@ -4740,8 +4740,8 @@
         </p:nvSpPr>
         <p:spPr>
           <a:xfrm>
-            <a:off x="502920" y="1691640"/>
-            <a:ext cx="3841151" cy="4032504"/>
+            <a:off x="502920" y="1673352"/>
+            <a:ext cx="3841151" cy="4206240"/>
           </a:xfrm>
           <a:prstGeom prst="roundRect">
             <a:avLst>
@@ -4762,7 +4762,7 @@
         </p:nvSpPr>
         <p:spPr>
           <a:xfrm>
-            <a:off x="667512" y="1819656"/>
+            <a:off x="667512" y="1764792"/>
             <a:ext cx="3511967" cy="457200"/>
           </a:xfrm>
           <a:prstGeom prst="rect">
@@ -4801,7 +4801,7 @@
         </p:nvSpPr>
         <p:spPr>
           <a:xfrm>
-            <a:off x="667512" y="2528316"/>
+            <a:off x="667512" y="2295144"/>
             <a:ext cx="3511967" cy="420624"/>
           </a:xfrm>
           <a:prstGeom prst="rect">
@@ -4862,7 +4862,7 @@
         </p:nvSpPr>
         <p:spPr>
           <a:xfrm>
-            <a:off x="941832" y="2948940"/>
+            <a:off x="941832" y="2715768"/>
             <a:ext cx="3237647" cy="420624"/>
           </a:xfrm>
           <a:prstGeom prst="rect">
@@ -4901,7 +4901,7 @@
         </p:nvSpPr>
         <p:spPr>
           <a:xfrm>
-            <a:off x="667512" y="3781044"/>
+            <a:off x="667512" y="3319272"/>
             <a:ext cx="3511967" cy="420624"/>
           </a:xfrm>
           <a:prstGeom prst="rect">
@@ -4962,7 +4962,7 @@
         </p:nvSpPr>
         <p:spPr>
           <a:xfrm>
-            <a:off x="941832" y="4201668"/>
+            <a:off x="941832" y="3739896"/>
             <a:ext cx="3237647" cy="420624"/>
           </a:xfrm>
           <a:prstGeom prst="rect">
@@ -5012,7 +5012,7 @@
         </p:nvSpPr>
         <p:spPr>
           <a:xfrm>
-            <a:off x="667512" y="5033772"/>
+            <a:off x="667512" y="4343400"/>
             <a:ext cx="3511967" cy="420624"/>
           </a:xfrm>
           <a:prstGeom prst="rect">
@@ -5051,8 +5051,8 @@
         </p:nvSpPr>
         <p:spPr>
           <a:xfrm>
-            <a:off x="4563527" y="1691640"/>
-            <a:ext cx="3459378" cy="4032504"/>
+            <a:off x="4563527" y="1673352"/>
+            <a:ext cx="3459378" cy="4206240"/>
           </a:xfrm>
           <a:prstGeom prst="roundRect">
             <a:avLst>
@@ -5073,7 +5073,7 @@
         </p:nvSpPr>
         <p:spPr>
           <a:xfrm>
-            <a:off x="4728119" y="1819656"/>
+            <a:off x="4728119" y="1764792"/>
             <a:ext cx="3130194" cy="457200"/>
           </a:xfrm>
           <a:prstGeom prst="rect">
@@ -5112,7 +5112,7 @@
         </p:nvSpPr>
         <p:spPr>
           <a:xfrm>
-            <a:off x="4728119" y="2386584"/>
+            <a:off x="4728119" y="2295144"/>
             <a:ext cx="3130194" cy="420624"/>
           </a:xfrm>
           <a:prstGeom prst="rect">
@@ -5151,7 +5151,7 @@
         </p:nvSpPr>
         <p:spPr>
           <a:xfrm>
-            <a:off x="5002439" y="2807208"/>
+            <a:off x="5002439" y="2715768"/>
             <a:ext cx="2855874" cy="420624"/>
           </a:xfrm>
           <a:prstGeom prst="rect">
@@ -5190,7 +5190,7 @@
         </p:nvSpPr>
         <p:spPr>
           <a:xfrm>
-            <a:off x="4728119" y="3316224"/>
+            <a:off x="4728119" y="3319272"/>
             <a:ext cx="3130194" cy="420624"/>
           </a:xfrm>
           <a:prstGeom prst="rect">
@@ -5229,7 +5229,7 @@
         </p:nvSpPr>
         <p:spPr>
           <a:xfrm>
-            <a:off x="5002439" y="3736848"/>
+            <a:off x="5002439" y="3739896"/>
             <a:ext cx="2855874" cy="420624"/>
           </a:xfrm>
           <a:prstGeom prst="rect">
@@ -5268,7 +5268,7 @@
         </p:nvSpPr>
         <p:spPr>
           <a:xfrm>
-            <a:off x="4728119" y="4245864"/>
+            <a:off x="4728119" y="4343400"/>
             <a:ext cx="3130194" cy="420624"/>
           </a:xfrm>
           <a:prstGeom prst="rect">
@@ -5307,7 +5307,7 @@
         </p:nvSpPr>
         <p:spPr>
           <a:xfrm>
-            <a:off x="5002439" y="4666488"/>
+            <a:off x="5002439" y="4764024"/>
             <a:ext cx="2855874" cy="420624"/>
           </a:xfrm>
           <a:prstGeom prst="rect">
@@ -5346,7 +5346,7 @@
         </p:nvSpPr>
         <p:spPr>
           <a:xfrm>
-            <a:off x="4728119" y="5175504"/>
+            <a:off x="4728119" y="5367528"/>
             <a:ext cx="3130194" cy="420624"/>
           </a:xfrm>
           <a:prstGeom prst="rect">
@@ -5385,8 +5385,8 @@
         </p:nvSpPr>
         <p:spPr>
           <a:xfrm>
-            <a:off x="8242361" y="1691640"/>
-            <a:ext cx="3443671" cy="4032504"/>
+            <a:off x="8242361" y="1673352"/>
+            <a:ext cx="3443671" cy="4206240"/>
           </a:xfrm>
           <a:prstGeom prst="roundRect">
             <a:avLst>
@@ -5407,7 +5407,7 @@
         </p:nvSpPr>
         <p:spPr>
           <a:xfrm>
-            <a:off x="8406953" y="1819656"/>
+            <a:off x="8406953" y="1764792"/>
             <a:ext cx="3114487" cy="457200"/>
           </a:xfrm>
           <a:prstGeom prst="rect">
@@ -5446,7 +5446,7 @@
         </p:nvSpPr>
         <p:spPr>
           <a:xfrm>
-            <a:off x="8406953" y="2528316"/>
+            <a:off x="8406953" y="2295144"/>
             <a:ext cx="3114487" cy="420624"/>
           </a:xfrm>
           <a:prstGeom prst="rect">
@@ -5485,7 +5485,7 @@
         </p:nvSpPr>
         <p:spPr>
           <a:xfrm>
-            <a:off x="8681273" y="2948940"/>
+            <a:off x="8681273" y="2715768"/>
             <a:ext cx="2840167" cy="420624"/>
           </a:xfrm>
           <a:prstGeom prst="rect">
@@ -5524,7 +5524,7 @@
         </p:nvSpPr>
         <p:spPr>
           <a:xfrm>
-            <a:off x="8406953" y="3781044"/>
+            <a:off x="8406953" y="3319272"/>
             <a:ext cx="3114487" cy="420624"/>
           </a:xfrm>
           <a:prstGeom prst="rect">
@@ -5563,7 +5563,7 @@
         </p:nvSpPr>
         <p:spPr>
           <a:xfrm>
-            <a:off x="8681273" y="4201668"/>
+            <a:off x="8681273" y="3739896"/>
             <a:ext cx="2840167" cy="420624"/>
           </a:xfrm>
           <a:prstGeom prst="rect">
@@ -5602,7 +5602,7 @@
         </p:nvSpPr>
         <p:spPr>
           <a:xfrm>
-            <a:off x="8406953" y="5033772"/>
+            <a:off x="8406953" y="4343400"/>
             <a:ext cx="3114487" cy="420624"/>
           </a:xfrm>
           <a:prstGeom prst="rect">
@@ -5671,7 +5671,7 @@
         <p:spPr>
           <a:xfrm>
             <a:off x="502920" y="320040"/>
-            <a:ext cx="7562088" cy="868680"/>
+            <a:ext cx="8503920" cy="868680"/>
           </a:xfrm>
           <a:prstGeom prst="rect">
             <a:avLst/>
@@ -5737,12 +5737,12 @@
         </p:nvSpPr>
         <p:spPr>
           <a:xfrm>
-            <a:off x="8110728" y="457200"/>
-            <a:ext cx="685800" cy="585216"/>
+            <a:off x="8677656" y="54864"/>
+            <a:ext cx="621792" cy="585216"/>
           </a:xfrm>
           <a:prstGeom prst="roundRect">
             <a:avLst>
-              <a:gd name="adj" fmla="val 12500"/>
+              <a:gd name="adj" fmla="val 7813"/>
             </a:avLst>
           </a:prstGeom>
           <a:solidFill>
@@ -5758,7 +5758,7 @@
               <a:buNone/>
             </a:pPr>
             <a:r>
-              <a:rPr lang="ja-JP" altLang="en-US" sz="1200" dirty="0">
+              <a:rPr lang="ja-JP" altLang="en-US" sz="1050" dirty="0">
                 <a:solidFill>
                   <a:srgbClr val="404040"/>
                 </a:solidFill>
@@ -5768,7 +5768,7 @@
               </a:rPr>
               <a:t>共通</a:t>
             </a:r>
-            <a:endParaRPr lang="ja-JP" sz="1200" dirty="0"/>
+            <a:endParaRPr lang="ja-JP" sz="1050" dirty="0"/>
           </a:p>
         </p:txBody>
       </p:sp>
@@ -5780,12 +5780,12 @@
         </p:nvSpPr>
         <p:spPr>
           <a:xfrm>
-            <a:off x="8833104" y="457200"/>
-            <a:ext cx="685800" cy="585216"/>
+            <a:off x="9354312" y="54864"/>
+            <a:ext cx="621792" cy="585216"/>
           </a:xfrm>
           <a:prstGeom prst="roundRect">
             <a:avLst>
-              <a:gd name="adj" fmla="val 12500"/>
+              <a:gd name="adj" fmla="val 7813"/>
             </a:avLst>
           </a:prstGeom>
           <a:solidFill>
@@ -5801,7 +5801,7 @@
               <a:buNone/>
             </a:pPr>
             <a:r>
-              <a:rPr lang="ja-JP" altLang="en-US" sz="1200" dirty="0">
+              <a:rPr lang="ja-JP" altLang="en-US" sz="1050" dirty="0">
                 <a:solidFill>
                   <a:srgbClr val="404040"/>
                 </a:solidFill>
@@ -5811,14 +5811,14 @@
               </a:rPr>
               <a:t>プロポ</a:t>
             </a:r>
-            <a:endParaRPr lang="ja-JP" sz="1200" dirty="0"/>
+            <a:endParaRPr lang="ja-JP" sz="1050" dirty="0"/>
           </a:p>
           <a:p>
             <a:pPr algn="ctr" indent="0" marL="0">
               <a:buNone/>
             </a:pPr>
             <a:r>
-              <a:rPr lang="ja-JP" altLang="en-US" sz="1200" dirty="0">
+              <a:rPr lang="ja-JP" altLang="en-US" sz="1050" dirty="0">
                 <a:solidFill>
                   <a:srgbClr val="404040"/>
                 </a:solidFill>
@@ -5828,7 +5828,7 @@
               </a:rPr>
               <a:t>フォール</a:t>
             </a:r>
-            <a:endParaRPr lang="ja-JP" sz="1200" dirty="0"/>
+            <a:endParaRPr lang="ja-JP" sz="1050" dirty="0"/>
           </a:p>
         </p:txBody>
       </p:sp>
@@ -5840,12 +5840,12 @@
         </p:nvSpPr>
         <p:spPr>
           <a:xfrm>
-            <a:off x="9555480" y="457200"/>
-            <a:ext cx="685800" cy="585216"/>
+            <a:off x="10030968" y="54864"/>
+            <a:ext cx="621792" cy="585216"/>
           </a:xfrm>
           <a:prstGeom prst="roundRect">
             <a:avLst>
-              <a:gd name="adj" fmla="val 12500"/>
+              <a:gd name="adj" fmla="val 7813"/>
             </a:avLst>
           </a:prstGeom>
           <a:solidFill>
@@ -5861,7 +5861,7 @@
               <a:buNone/>
             </a:pPr>
             <a:r>
-              <a:rPr lang="ja-JP" altLang="en-US" sz="1200" dirty="0">
+              <a:rPr lang="ja-JP" altLang="en-US" sz="1050" dirty="0">
                 <a:solidFill>
                   <a:srgbClr val="404040"/>
                 </a:solidFill>
@@ -5871,14 +5871,14 @@
               </a:rPr>
               <a:t>レミマ</a:t>
             </a:r>
-            <a:endParaRPr lang="ja-JP" sz="1200" dirty="0"/>
+            <a:endParaRPr lang="ja-JP" sz="1050" dirty="0"/>
           </a:p>
           <a:p>
             <a:pPr algn="ctr" indent="0" marL="0">
               <a:buNone/>
             </a:pPr>
             <a:r>
-              <a:rPr lang="ja-JP" altLang="en-US" sz="1200" dirty="0">
+              <a:rPr lang="ja-JP" altLang="en-US" sz="1050" dirty="0">
                 <a:solidFill>
                   <a:srgbClr val="404040"/>
                 </a:solidFill>
@@ -5888,7 +5888,7 @@
               </a:rPr>
               <a:t>ゾラム</a:t>
             </a:r>
-            <a:endParaRPr lang="ja-JP" sz="1200" dirty="0"/>
+            <a:endParaRPr lang="ja-JP" sz="1050" dirty="0"/>
           </a:p>
         </p:txBody>
       </p:sp>
@@ -5900,16 +5900,16 @@
         </p:nvSpPr>
         <p:spPr>
           <a:xfrm>
-            <a:off x="10277856" y="457200"/>
-            <a:ext cx="685800" cy="585216"/>
+            <a:off x="10707624" y="54864"/>
+            <a:ext cx="621792" cy="585216"/>
           </a:xfrm>
           <a:prstGeom prst="roundRect">
             <a:avLst>
-              <a:gd name="adj" fmla="val 12500"/>
+              <a:gd name="adj" fmla="val 7813"/>
             </a:avLst>
           </a:prstGeom>
           <a:solidFill>
-            <a:srgbClr val="007C80"/>
+            <a:srgbClr val="00A8AA"/>
           </a:solidFill>
           <a:ln/>
         </p:spPr>
@@ -5921,7 +5921,7 @@
               <a:buNone/>
             </a:pPr>
             <a:r>
-              <a:rPr lang="ja-JP" altLang="en-US" sz="1200" b="1" dirty="0">
+              <a:rPr lang="ja-JP" altLang="en-US" sz="1050" b="1" dirty="0">
                 <a:solidFill>
                   <a:srgbClr val="FFFFFF"/>
                 </a:solidFill>
@@ -5931,14 +5931,14 @@
               </a:rPr>
               <a:t>ミダ・</a:t>
             </a:r>
-            <a:endParaRPr lang="ja-JP" sz="1200" dirty="0"/>
+            <a:endParaRPr lang="ja-JP" sz="1050" dirty="0"/>
           </a:p>
           <a:p>
             <a:pPr algn="ctr" indent="0" marL="0">
               <a:buNone/>
             </a:pPr>
             <a:r>
-              <a:rPr lang="ja-JP" altLang="en-US" sz="1200" b="1" dirty="0">
+              <a:rPr lang="ja-JP" altLang="en-US" sz="1050" b="1" dirty="0">
                 <a:solidFill>
                   <a:srgbClr val="FFFFFF"/>
                 </a:solidFill>
@@ -5948,7 +5948,7 @@
               </a:rPr>
               <a:t>ケタ</a:t>
             </a:r>
-            <a:endParaRPr lang="ja-JP" sz="1200" dirty="0"/>
+            <a:endParaRPr lang="ja-JP" sz="1050" dirty="0"/>
           </a:p>
         </p:txBody>
       </p:sp>
@@ -5960,12 +5960,12 @@
         </p:nvSpPr>
         <p:spPr>
           <a:xfrm>
-            <a:off x="11000232" y="457200"/>
-            <a:ext cx="685800" cy="585216"/>
+            <a:off x="11384280" y="54864"/>
+            <a:ext cx="621792" cy="585216"/>
           </a:xfrm>
           <a:prstGeom prst="roundRect">
             <a:avLst>
-              <a:gd name="adj" fmla="val 12500"/>
+              <a:gd name="adj" fmla="val 7813"/>
             </a:avLst>
           </a:prstGeom>
           <a:solidFill>
@@ -5981,7 +5981,7 @@
               <a:buNone/>
             </a:pPr>
             <a:r>
-              <a:rPr lang="ja-JP" altLang="en-US" sz="1200" dirty="0">
+              <a:rPr lang="ja-JP" altLang="en-US" sz="1050" dirty="0">
                 <a:solidFill>
                   <a:srgbClr val="404040"/>
                 </a:solidFill>
@@ -5991,7 +5991,7 @@
               </a:rPr>
               <a:t>使い分け</a:t>
             </a:r>
-            <a:endParaRPr lang="ja-JP" sz="1200" dirty="0"/>
+            <a:endParaRPr lang="ja-JP" sz="1050" dirty="0"/>
           </a:p>
         </p:txBody>
       </p:sp>
@@ -6003,7 +6003,7 @@
         </p:nvSpPr>
         <p:spPr>
           <a:xfrm>
-            <a:off x="11247120" y="6263640"/>
+            <a:off x="11247120" y="6446520"/>
             <a:ext cx="731520" cy="320040"/>
           </a:xfrm>
           <a:prstGeom prst="rect">
@@ -6042,8 +6042,8 @@
         </p:nvSpPr>
         <p:spPr>
           <a:xfrm>
-            <a:off x="502920" y="5943600"/>
-            <a:ext cx="10424160" cy="640080"/>
+            <a:off x="502920" y="6099048"/>
+            <a:ext cx="10424160" cy="621792"/>
           </a:xfrm>
           <a:prstGeom prst="rect">
             <a:avLst/>
@@ -6098,8 +6098,8 @@
         </p:nvSpPr>
         <p:spPr>
           <a:xfrm>
-            <a:off x="502920" y="1691640"/>
-            <a:ext cx="4009075" cy="4032504"/>
+            <a:off x="502920" y="1673352"/>
+            <a:ext cx="4009075" cy="4206240"/>
           </a:xfrm>
           <a:prstGeom prst="roundRect">
             <a:avLst>
@@ -6120,7 +6120,7 @@
         </p:nvSpPr>
         <p:spPr>
           <a:xfrm>
-            <a:off x="667512" y="1819656"/>
+            <a:off x="667512" y="1764792"/>
             <a:ext cx="3679891" cy="457200"/>
           </a:xfrm>
           <a:prstGeom prst="rect">
@@ -6159,7 +6159,7 @@
         </p:nvSpPr>
         <p:spPr>
           <a:xfrm>
-            <a:off x="667512" y="2386584"/>
+            <a:off x="667512" y="2295144"/>
             <a:ext cx="3679891" cy="420624"/>
           </a:xfrm>
           <a:prstGeom prst="rect">
@@ -6198,7 +6198,7 @@
         </p:nvSpPr>
         <p:spPr>
           <a:xfrm>
-            <a:off x="941832" y="2807208"/>
+            <a:off x="941832" y="2715768"/>
             <a:ext cx="3405571" cy="420624"/>
           </a:xfrm>
           <a:prstGeom prst="rect">
@@ -6248,7 +6248,7 @@
         </p:nvSpPr>
         <p:spPr>
           <a:xfrm>
-            <a:off x="667512" y="3570732"/>
+            <a:off x="667512" y="3319272"/>
             <a:ext cx="3679891" cy="420624"/>
           </a:xfrm>
           <a:prstGeom prst="rect">
@@ -6287,7 +6287,7 @@
         </p:nvSpPr>
         <p:spPr>
           <a:xfrm>
-            <a:off x="941832" y="3991356"/>
+            <a:off x="941832" y="3739896"/>
             <a:ext cx="3405571" cy="420624"/>
           </a:xfrm>
           <a:prstGeom prst="rect">
@@ -6337,7 +6337,7 @@
         </p:nvSpPr>
         <p:spPr>
           <a:xfrm>
-            <a:off x="667512" y="4754880"/>
+            <a:off x="667512" y="4343400"/>
             <a:ext cx="3679891" cy="420624"/>
           </a:xfrm>
           <a:prstGeom prst="rect">
@@ -6376,7 +6376,7 @@
         </p:nvSpPr>
         <p:spPr>
           <a:xfrm>
-            <a:off x="941832" y="5175504"/>
+            <a:off x="941832" y="4764024"/>
             <a:ext cx="3405571" cy="420624"/>
           </a:xfrm>
           <a:prstGeom prst="rect">
@@ -6415,8 +6415,8 @@
         </p:nvSpPr>
         <p:spPr>
           <a:xfrm>
-            <a:off x="4731451" y="1691640"/>
-            <a:ext cx="2649891" cy="4032504"/>
+            <a:off x="4731451" y="1673352"/>
+            <a:ext cx="2649891" cy="4206240"/>
           </a:xfrm>
           <a:prstGeom prst="roundRect">
             <a:avLst>
@@ -6437,7 +6437,7 @@
         </p:nvSpPr>
         <p:spPr>
           <a:xfrm>
-            <a:off x="4896043" y="1819656"/>
+            <a:off x="4896043" y="1764792"/>
             <a:ext cx="2320707" cy="457200"/>
           </a:xfrm>
           <a:prstGeom prst="rect">
@@ -6476,7 +6476,7 @@
         </p:nvSpPr>
         <p:spPr>
           <a:xfrm>
-            <a:off x="4896043" y="2738628"/>
+            <a:off x="4896043" y="2295144"/>
             <a:ext cx="2320707" cy="420624"/>
           </a:xfrm>
           <a:prstGeom prst="rect">
@@ -6515,7 +6515,7 @@
         </p:nvSpPr>
         <p:spPr>
           <a:xfrm>
-            <a:off x="4896043" y="3570732"/>
+            <a:off x="4896043" y="2898648"/>
             <a:ext cx="2320707" cy="420624"/>
           </a:xfrm>
           <a:prstGeom prst="rect">
@@ -6554,7 +6554,7 @@
         </p:nvSpPr>
         <p:spPr>
           <a:xfrm>
-            <a:off x="4896043" y="4402836"/>
+            <a:off x="4896043" y="3502152"/>
             <a:ext cx="2320707" cy="420624"/>
           </a:xfrm>
           <a:prstGeom prst="rect">
@@ -6593,7 +6593,7 @@
         </p:nvSpPr>
         <p:spPr>
           <a:xfrm>
-            <a:off x="5170363" y="4823460"/>
+            <a:off x="5170363" y="3922776"/>
             <a:ext cx="2046387" cy="420624"/>
           </a:xfrm>
           <a:prstGeom prst="rect">
@@ -6632,12 +6632,12 @@
         </p:nvSpPr>
         <p:spPr>
           <a:xfrm>
-            <a:off x="7600798" y="1691640"/>
-            <a:ext cx="4085234" cy="4032504"/>
+            <a:off x="7600798" y="1673352"/>
+            <a:ext cx="4085234" cy="4206240"/>
           </a:xfrm>
           <a:prstGeom prst="roundRect">
             <a:avLst>
-              <a:gd name="adj" fmla="val 1814"/>
+              <a:gd name="adj" fmla="val 1791"/>
             </a:avLst>
           </a:prstGeom>
           <a:solidFill>
@@ -6654,7 +6654,7 @@
         </p:nvSpPr>
         <p:spPr>
           <a:xfrm>
-            <a:off x="7765390" y="1819656"/>
+            <a:off x="7765390" y="1764792"/>
             <a:ext cx="3756050" cy="457200"/>
           </a:xfrm>
           <a:prstGeom prst="rect">
@@ -6693,7 +6693,7 @@
         </p:nvSpPr>
         <p:spPr>
           <a:xfrm>
-            <a:off x="7765390" y="2386584"/>
+            <a:off x="7765390" y="2295144"/>
             <a:ext cx="3756050" cy="420624"/>
           </a:xfrm>
           <a:prstGeom prst="rect">
@@ -6732,7 +6732,7 @@
         </p:nvSpPr>
         <p:spPr>
           <a:xfrm>
-            <a:off x="7765390" y="3176016"/>
+            <a:off x="7765390" y="2898648"/>
             <a:ext cx="3756050" cy="420624"/>
           </a:xfrm>
           <a:prstGeom prst="rect">
@@ -6771,7 +6771,7 @@
         </p:nvSpPr>
         <p:spPr>
           <a:xfrm>
-            <a:off x="7765390" y="3965448"/>
+            <a:off x="7765390" y="3502152"/>
             <a:ext cx="3756050" cy="420624"/>
           </a:xfrm>
           <a:prstGeom prst="rect">
@@ -6810,7 +6810,7 @@
         </p:nvSpPr>
         <p:spPr>
           <a:xfrm>
-            <a:off x="7765390" y="4754880"/>
+            <a:off x="7765390" y="4105656"/>
             <a:ext cx="3756050" cy="420624"/>
           </a:xfrm>
           <a:prstGeom prst="rect">
@@ -6860,7 +6860,7 @@
         </p:nvSpPr>
         <p:spPr>
           <a:xfrm>
-            <a:off x="8039710" y="5175504"/>
+            <a:off x="8039710" y="4526280"/>
             <a:ext cx="3481730" cy="420624"/>
           </a:xfrm>
           <a:prstGeom prst="rect">
@@ -6929,7 +6929,7 @@
         <p:spPr>
           <a:xfrm>
             <a:off x="502920" y="320040"/>
-            <a:ext cx="7562088" cy="868680"/>
+            <a:ext cx="8503920" cy="868680"/>
           </a:xfrm>
           <a:prstGeom prst="rect">
             <a:avLst/>
@@ -6995,12 +6995,12 @@
         </p:nvSpPr>
         <p:spPr>
           <a:xfrm>
-            <a:off x="8110728" y="457200"/>
-            <a:ext cx="685800" cy="585216"/>
+            <a:off x="8677656" y="54864"/>
+            <a:ext cx="621792" cy="585216"/>
           </a:xfrm>
           <a:prstGeom prst="roundRect">
             <a:avLst>
-              <a:gd name="adj" fmla="val 12500"/>
+              <a:gd name="adj" fmla="val 7813"/>
             </a:avLst>
           </a:prstGeom>
           <a:solidFill>
@@ -7016,7 +7016,7 @@
               <a:buNone/>
             </a:pPr>
             <a:r>
-              <a:rPr lang="ja-JP" altLang="en-US" sz="1200" dirty="0">
+              <a:rPr lang="ja-JP" altLang="en-US" sz="1050" dirty="0">
                 <a:solidFill>
                   <a:srgbClr val="404040"/>
                 </a:solidFill>
@@ -7026,7 +7026,7 @@
               </a:rPr>
               <a:t>共通</a:t>
             </a:r>
-            <a:endParaRPr lang="ja-JP" sz="1200" dirty="0"/>
+            <a:endParaRPr lang="ja-JP" sz="1050" dirty="0"/>
           </a:p>
         </p:txBody>
       </p:sp>
@@ -7038,12 +7038,12 @@
         </p:nvSpPr>
         <p:spPr>
           <a:xfrm>
-            <a:off x="8833104" y="457200"/>
-            <a:ext cx="685800" cy="585216"/>
+            <a:off x="9354312" y="54864"/>
+            <a:ext cx="621792" cy="585216"/>
           </a:xfrm>
           <a:prstGeom prst="roundRect">
             <a:avLst>
-              <a:gd name="adj" fmla="val 12500"/>
+              <a:gd name="adj" fmla="val 7813"/>
             </a:avLst>
           </a:prstGeom>
           <a:solidFill>
@@ -7059,7 +7059,7 @@
               <a:buNone/>
             </a:pPr>
             <a:r>
-              <a:rPr lang="ja-JP" altLang="en-US" sz="1200" dirty="0">
+              <a:rPr lang="ja-JP" altLang="en-US" sz="1050" dirty="0">
                 <a:solidFill>
                   <a:srgbClr val="404040"/>
                 </a:solidFill>
@@ -7069,14 +7069,14 @@
               </a:rPr>
               <a:t>プロポ</a:t>
             </a:r>
-            <a:endParaRPr lang="ja-JP" sz="1200" dirty="0"/>
+            <a:endParaRPr lang="ja-JP" sz="1050" dirty="0"/>
           </a:p>
           <a:p>
             <a:pPr algn="ctr" indent="0" marL="0">
               <a:buNone/>
             </a:pPr>
             <a:r>
-              <a:rPr lang="ja-JP" altLang="en-US" sz="1200" dirty="0">
+              <a:rPr lang="ja-JP" altLang="en-US" sz="1050" dirty="0">
                 <a:solidFill>
                   <a:srgbClr val="404040"/>
                 </a:solidFill>
@@ -7086,7 +7086,7 @@
               </a:rPr>
               <a:t>フォール</a:t>
             </a:r>
-            <a:endParaRPr lang="ja-JP" sz="1200" dirty="0"/>
+            <a:endParaRPr lang="ja-JP" sz="1050" dirty="0"/>
           </a:p>
         </p:txBody>
       </p:sp>
@@ -7098,12 +7098,12 @@
         </p:nvSpPr>
         <p:spPr>
           <a:xfrm>
-            <a:off x="9555480" y="457200"/>
-            <a:ext cx="685800" cy="585216"/>
+            <a:off x="10030968" y="54864"/>
+            <a:ext cx="621792" cy="585216"/>
           </a:xfrm>
           <a:prstGeom prst="roundRect">
             <a:avLst>
-              <a:gd name="adj" fmla="val 12500"/>
+              <a:gd name="adj" fmla="val 7813"/>
             </a:avLst>
           </a:prstGeom>
           <a:solidFill>
@@ -7119,7 +7119,7 @@
               <a:buNone/>
             </a:pPr>
             <a:r>
-              <a:rPr lang="ja-JP" altLang="en-US" sz="1200" dirty="0">
+              <a:rPr lang="ja-JP" altLang="en-US" sz="1050" dirty="0">
                 <a:solidFill>
                   <a:srgbClr val="404040"/>
                 </a:solidFill>
@@ -7129,14 +7129,14 @@
               </a:rPr>
               <a:t>レミマ</a:t>
             </a:r>
-            <a:endParaRPr lang="ja-JP" sz="1200" dirty="0"/>
+            <a:endParaRPr lang="ja-JP" sz="1050" dirty="0"/>
           </a:p>
           <a:p>
             <a:pPr algn="ctr" indent="0" marL="0">
               <a:buNone/>
             </a:pPr>
             <a:r>
-              <a:rPr lang="ja-JP" altLang="en-US" sz="1200" dirty="0">
+              <a:rPr lang="ja-JP" altLang="en-US" sz="1050" dirty="0">
                 <a:solidFill>
                   <a:srgbClr val="404040"/>
                 </a:solidFill>
@@ -7146,7 +7146,7 @@
               </a:rPr>
               <a:t>ゾラム</a:t>
             </a:r>
-            <a:endParaRPr lang="ja-JP" sz="1200" dirty="0"/>
+            <a:endParaRPr lang="ja-JP" sz="1050" dirty="0"/>
           </a:p>
         </p:txBody>
       </p:sp>
@@ -7158,16 +7158,16 @@
         </p:nvSpPr>
         <p:spPr>
           <a:xfrm>
-            <a:off x="10277856" y="457200"/>
-            <a:ext cx="685800" cy="585216"/>
+            <a:off x="10707624" y="54864"/>
+            <a:ext cx="621792" cy="585216"/>
           </a:xfrm>
           <a:prstGeom prst="roundRect">
             <a:avLst>
-              <a:gd name="adj" fmla="val 12500"/>
+              <a:gd name="adj" fmla="val 7813"/>
             </a:avLst>
           </a:prstGeom>
           <a:solidFill>
-            <a:srgbClr val="007C80"/>
+            <a:srgbClr val="00A8AA"/>
           </a:solidFill>
           <a:ln/>
         </p:spPr>
@@ -7179,7 +7179,7 @@
               <a:buNone/>
             </a:pPr>
             <a:r>
-              <a:rPr lang="ja-JP" altLang="en-US" sz="1200" b="1" dirty="0">
+              <a:rPr lang="ja-JP" altLang="en-US" sz="1050" b="1" dirty="0">
                 <a:solidFill>
                   <a:srgbClr val="FFFFFF"/>
                 </a:solidFill>
@@ -7189,14 +7189,14 @@
               </a:rPr>
               <a:t>ミダ・</a:t>
             </a:r>
-            <a:endParaRPr lang="ja-JP" sz="1200" dirty="0"/>
+            <a:endParaRPr lang="ja-JP" sz="1050" dirty="0"/>
           </a:p>
           <a:p>
             <a:pPr algn="ctr" indent="0" marL="0">
               <a:buNone/>
             </a:pPr>
             <a:r>
-              <a:rPr lang="ja-JP" altLang="en-US" sz="1200" b="1" dirty="0">
+              <a:rPr lang="ja-JP" altLang="en-US" sz="1050" b="1" dirty="0">
                 <a:solidFill>
                   <a:srgbClr val="FFFFFF"/>
                 </a:solidFill>
@@ -7206,7 +7206,7 @@
               </a:rPr>
               <a:t>ケタ</a:t>
             </a:r>
-            <a:endParaRPr lang="ja-JP" sz="1200" dirty="0"/>
+            <a:endParaRPr lang="ja-JP" sz="1050" dirty="0"/>
           </a:p>
         </p:txBody>
       </p:sp>
@@ -7218,12 +7218,12 @@
         </p:nvSpPr>
         <p:spPr>
           <a:xfrm>
-            <a:off x="11000232" y="457200"/>
-            <a:ext cx="685800" cy="585216"/>
+            <a:off x="11384280" y="54864"/>
+            <a:ext cx="621792" cy="585216"/>
           </a:xfrm>
           <a:prstGeom prst="roundRect">
             <a:avLst>
-              <a:gd name="adj" fmla="val 12500"/>
+              <a:gd name="adj" fmla="val 7813"/>
             </a:avLst>
           </a:prstGeom>
           <a:solidFill>
@@ -7239,7 +7239,7 @@
               <a:buNone/>
             </a:pPr>
             <a:r>
-              <a:rPr lang="ja-JP" altLang="en-US" sz="1200" dirty="0">
+              <a:rPr lang="ja-JP" altLang="en-US" sz="1050" dirty="0">
                 <a:solidFill>
                   <a:srgbClr val="404040"/>
                 </a:solidFill>
@@ -7249,7 +7249,7 @@
               </a:rPr>
               <a:t>使い分け</a:t>
             </a:r>
-            <a:endParaRPr lang="ja-JP" sz="1200" dirty="0"/>
+            <a:endParaRPr lang="ja-JP" sz="1050" dirty="0"/>
           </a:p>
         </p:txBody>
       </p:sp>
@@ -7261,7 +7261,7 @@
         </p:nvSpPr>
         <p:spPr>
           <a:xfrm>
-            <a:off x="11247120" y="6263640"/>
+            <a:off x="11247120" y="6446520"/>
             <a:ext cx="731520" cy="320040"/>
           </a:xfrm>
           <a:prstGeom prst="rect">
@@ -7300,8 +7300,8 @@
         </p:nvSpPr>
         <p:spPr>
           <a:xfrm>
-            <a:off x="502920" y="5943600"/>
-            <a:ext cx="10424160" cy="640080"/>
+            <a:off x="502920" y="6099048"/>
+            <a:ext cx="10424160" cy="621792"/>
           </a:xfrm>
           <a:prstGeom prst="rect">
             <a:avLst/>
@@ -7356,8 +7356,8 @@
         </p:nvSpPr>
         <p:spPr>
           <a:xfrm>
-            <a:off x="502920" y="1691640"/>
-            <a:ext cx="3376960" cy="4032504"/>
+            <a:off x="502920" y="1673352"/>
+            <a:ext cx="3376960" cy="4206240"/>
           </a:xfrm>
           <a:prstGeom prst="roundRect">
             <a:avLst>
@@ -7378,7 +7378,7 @@
         </p:nvSpPr>
         <p:spPr>
           <a:xfrm>
-            <a:off x="667512" y="1819656"/>
+            <a:off x="667512" y="1764792"/>
             <a:ext cx="3047776" cy="457200"/>
           </a:xfrm>
           <a:prstGeom prst="rect">
@@ -7417,7 +7417,7 @@
         </p:nvSpPr>
         <p:spPr>
           <a:xfrm>
-            <a:off x="667512" y="2944368"/>
+            <a:off x="667512" y="2295144"/>
             <a:ext cx="3047776" cy="420624"/>
           </a:xfrm>
           <a:prstGeom prst="rect">
@@ -7478,7 +7478,7 @@
         </p:nvSpPr>
         <p:spPr>
           <a:xfrm>
-            <a:off x="941832" y="3364992"/>
+            <a:off x="941832" y="2715768"/>
             <a:ext cx="2773456" cy="420624"/>
           </a:xfrm>
           <a:prstGeom prst="rect">
@@ -7517,7 +7517,7 @@
         </p:nvSpPr>
         <p:spPr>
           <a:xfrm>
-            <a:off x="667512" y="4197096"/>
+            <a:off x="667512" y="3319272"/>
             <a:ext cx="3047776" cy="420624"/>
           </a:xfrm>
           <a:prstGeom prst="rect">
@@ -7556,7 +7556,7 @@
         </p:nvSpPr>
         <p:spPr>
           <a:xfrm>
-            <a:off x="941832" y="4617720"/>
+            <a:off x="941832" y="3739896"/>
             <a:ext cx="2773456" cy="420624"/>
           </a:xfrm>
           <a:prstGeom prst="rect">
@@ -7595,8 +7595,8 @@
         </p:nvSpPr>
         <p:spPr>
           <a:xfrm>
-            <a:off x="4099336" y="1691640"/>
-            <a:ext cx="3007685" cy="4032504"/>
+            <a:off x="4099336" y="1673352"/>
+            <a:ext cx="3007685" cy="4206240"/>
           </a:xfrm>
           <a:prstGeom prst="roundRect">
             <a:avLst>
@@ -7617,7 +7617,7 @@
         </p:nvSpPr>
         <p:spPr>
           <a:xfrm>
-            <a:off x="4263928" y="1819656"/>
+            <a:off x="4263928" y="1764792"/>
             <a:ext cx="2678501" cy="457200"/>
           </a:xfrm>
           <a:prstGeom prst="rect">
@@ -7656,7 +7656,7 @@
         </p:nvSpPr>
         <p:spPr>
           <a:xfrm>
-            <a:off x="4263928" y="2528316"/>
+            <a:off x="4263928" y="2295144"/>
             <a:ext cx="2678501" cy="420624"/>
           </a:xfrm>
           <a:prstGeom prst="rect">
@@ -7695,7 +7695,7 @@
         </p:nvSpPr>
         <p:spPr>
           <a:xfrm>
-            <a:off x="4263928" y="3360420"/>
+            <a:off x="4263928" y="2898648"/>
             <a:ext cx="2678501" cy="420624"/>
           </a:xfrm>
           <a:prstGeom prst="rect">
@@ -7734,7 +7734,7 @@
         </p:nvSpPr>
         <p:spPr>
           <a:xfrm>
-            <a:off x="4538248" y="3781044"/>
+            <a:off x="4538248" y="3319272"/>
             <a:ext cx="2404181" cy="420624"/>
           </a:xfrm>
           <a:prstGeom prst="rect">
@@ -7773,7 +7773,7 @@
         </p:nvSpPr>
         <p:spPr>
           <a:xfrm>
-            <a:off x="4263928" y="4613148"/>
+            <a:off x="4263928" y="3922776"/>
             <a:ext cx="2678501" cy="420624"/>
           </a:xfrm>
           <a:prstGeom prst="rect">
@@ -7812,7 +7812,7 @@
         </p:nvSpPr>
         <p:spPr>
           <a:xfrm>
-            <a:off x="4538248" y="5033772"/>
+            <a:off x="4538248" y="4343400"/>
             <a:ext cx="2404181" cy="420624"/>
           </a:xfrm>
           <a:prstGeom prst="rect">
@@ -7851,12 +7851,12 @@
         </p:nvSpPr>
         <p:spPr>
           <a:xfrm>
-            <a:off x="7326478" y="1691640"/>
-            <a:ext cx="4359554" cy="4032504"/>
+            <a:off x="7326478" y="1673352"/>
+            <a:ext cx="4359554" cy="4206240"/>
           </a:xfrm>
           <a:prstGeom prst="roundRect">
             <a:avLst>
-              <a:gd name="adj" fmla="val 1814"/>
+              <a:gd name="adj" fmla="val 1739"/>
             </a:avLst>
           </a:prstGeom>
           <a:solidFill>
@@ -7873,7 +7873,7 @@
         </p:nvSpPr>
         <p:spPr>
           <a:xfrm>
-            <a:off x="7491070" y="1819656"/>
+            <a:off x="7491070" y="1764792"/>
             <a:ext cx="4030370" cy="457200"/>
           </a:xfrm>
           <a:prstGeom prst="rect">
@@ -7912,7 +7912,7 @@
         </p:nvSpPr>
         <p:spPr>
           <a:xfrm>
-            <a:off x="7491070" y="2386584"/>
+            <a:off x="7491070" y="2295144"/>
             <a:ext cx="4030370" cy="420624"/>
           </a:xfrm>
           <a:prstGeom prst="rect">
@@ -7951,7 +7951,7 @@
         </p:nvSpPr>
         <p:spPr>
           <a:xfrm>
-            <a:off x="7491070" y="3176016"/>
+            <a:off x="7491070" y="2898648"/>
             <a:ext cx="4030370" cy="420624"/>
           </a:xfrm>
           <a:prstGeom prst="rect">
@@ -7990,7 +7990,7 @@
         </p:nvSpPr>
         <p:spPr>
           <a:xfrm>
-            <a:off x="7765390" y="3596640"/>
+            <a:off x="7765390" y="3319272"/>
             <a:ext cx="3756050" cy="420624"/>
           </a:xfrm>
           <a:prstGeom prst="rect">
@@ -8029,7 +8029,7 @@
         </p:nvSpPr>
         <p:spPr>
           <a:xfrm>
-            <a:off x="7491070" y="4386072"/>
+            <a:off x="7491070" y="3922776"/>
             <a:ext cx="4030370" cy="420624"/>
           </a:xfrm>
           <a:prstGeom prst="rect">
@@ -8068,7 +8068,7 @@
         </p:nvSpPr>
         <p:spPr>
           <a:xfrm>
-            <a:off x="7491070" y="5175504"/>
+            <a:off x="7491070" y="4526280"/>
             <a:ext cx="4030370" cy="420624"/>
           </a:xfrm>
           <a:prstGeom prst="rect">
@@ -8148,7 +8148,7 @@
         <p:spPr>
           <a:xfrm>
             <a:off x="502920" y="320040"/>
-            <a:ext cx="7562088" cy="868680"/>
+            <a:ext cx="8503920" cy="868680"/>
           </a:xfrm>
           <a:prstGeom prst="rect">
             <a:avLst/>
@@ -8214,12 +8214,12 @@
         </p:nvSpPr>
         <p:spPr>
           <a:xfrm>
-            <a:off x="8110728" y="457200"/>
-            <a:ext cx="685800" cy="585216"/>
+            <a:off x="8677656" y="54864"/>
+            <a:ext cx="621792" cy="585216"/>
           </a:xfrm>
           <a:prstGeom prst="roundRect">
             <a:avLst>
-              <a:gd name="adj" fmla="val 12500"/>
+              <a:gd name="adj" fmla="val 7813"/>
             </a:avLst>
           </a:prstGeom>
           <a:solidFill>
@@ -8235,7 +8235,7 @@
               <a:buNone/>
             </a:pPr>
             <a:r>
-              <a:rPr lang="ja-JP" altLang="en-US" sz="1200" dirty="0">
+              <a:rPr lang="ja-JP" altLang="en-US" sz="1050" dirty="0">
                 <a:solidFill>
                   <a:srgbClr val="404040"/>
                 </a:solidFill>
@@ -8245,7 +8245,7 @@
               </a:rPr>
               <a:t>共通</a:t>
             </a:r>
-            <a:endParaRPr lang="ja-JP" sz="1200" dirty="0"/>
+            <a:endParaRPr lang="ja-JP" sz="1050" dirty="0"/>
           </a:p>
         </p:txBody>
       </p:sp>
@@ -8257,12 +8257,12 @@
         </p:nvSpPr>
         <p:spPr>
           <a:xfrm>
-            <a:off x="8833104" y="457200"/>
-            <a:ext cx="685800" cy="585216"/>
+            <a:off x="9354312" y="54864"/>
+            <a:ext cx="621792" cy="585216"/>
           </a:xfrm>
           <a:prstGeom prst="roundRect">
             <a:avLst>
-              <a:gd name="adj" fmla="val 12500"/>
+              <a:gd name="adj" fmla="val 7813"/>
             </a:avLst>
           </a:prstGeom>
           <a:solidFill>
@@ -8278,7 +8278,7 @@
               <a:buNone/>
             </a:pPr>
             <a:r>
-              <a:rPr lang="ja-JP" altLang="en-US" sz="1200" dirty="0">
+              <a:rPr lang="ja-JP" altLang="en-US" sz="1050" dirty="0">
                 <a:solidFill>
                   <a:srgbClr val="404040"/>
                 </a:solidFill>
@@ -8288,14 +8288,14 @@
               </a:rPr>
               <a:t>プロポ</a:t>
             </a:r>
-            <a:endParaRPr lang="ja-JP" sz="1200" dirty="0"/>
+            <a:endParaRPr lang="ja-JP" sz="1050" dirty="0"/>
           </a:p>
           <a:p>
             <a:pPr algn="ctr" indent="0" marL="0">
               <a:buNone/>
             </a:pPr>
             <a:r>
-              <a:rPr lang="ja-JP" altLang="en-US" sz="1200" dirty="0">
+              <a:rPr lang="ja-JP" altLang="en-US" sz="1050" dirty="0">
                 <a:solidFill>
                   <a:srgbClr val="404040"/>
                 </a:solidFill>
@@ -8305,7 +8305,7 @@
               </a:rPr>
               <a:t>フォール</a:t>
             </a:r>
-            <a:endParaRPr lang="ja-JP" sz="1200" dirty="0"/>
+            <a:endParaRPr lang="ja-JP" sz="1050" dirty="0"/>
           </a:p>
         </p:txBody>
       </p:sp>
@@ -8317,12 +8317,12 @@
         </p:nvSpPr>
         <p:spPr>
           <a:xfrm>
-            <a:off x="9555480" y="457200"/>
-            <a:ext cx="685800" cy="585216"/>
+            <a:off x="10030968" y="54864"/>
+            <a:ext cx="621792" cy="585216"/>
           </a:xfrm>
           <a:prstGeom prst="roundRect">
             <a:avLst>
-              <a:gd name="adj" fmla="val 12500"/>
+              <a:gd name="adj" fmla="val 7813"/>
             </a:avLst>
           </a:prstGeom>
           <a:solidFill>
@@ -8338,7 +8338,7 @@
               <a:buNone/>
             </a:pPr>
             <a:r>
-              <a:rPr lang="ja-JP" altLang="en-US" sz="1200" dirty="0">
+              <a:rPr lang="ja-JP" altLang="en-US" sz="1050" dirty="0">
                 <a:solidFill>
                   <a:srgbClr val="404040"/>
                 </a:solidFill>
@@ -8348,14 +8348,14 @@
               </a:rPr>
               <a:t>レミマ</a:t>
             </a:r>
-            <a:endParaRPr lang="ja-JP" sz="1200" dirty="0"/>
+            <a:endParaRPr lang="ja-JP" sz="1050" dirty="0"/>
           </a:p>
           <a:p>
             <a:pPr algn="ctr" indent="0" marL="0">
               <a:buNone/>
             </a:pPr>
             <a:r>
-              <a:rPr lang="ja-JP" altLang="en-US" sz="1200" dirty="0">
+              <a:rPr lang="ja-JP" altLang="en-US" sz="1050" dirty="0">
                 <a:solidFill>
                   <a:srgbClr val="404040"/>
                 </a:solidFill>
@@ -8365,7 +8365,7 @@
               </a:rPr>
               <a:t>ゾラム</a:t>
             </a:r>
-            <a:endParaRPr lang="ja-JP" sz="1200" dirty="0"/>
+            <a:endParaRPr lang="ja-JP" sz="1050" dirty="0"/>
           </a:p>
         </p:txBody>
       </p:sp>
@@ -8377,12 +8377,12 @@
         </p:nvSpPr>
         <p:spPr>
           <a:xfrm>
-            <a:off x="10277856" y="457200"/>
-            <a:ext cx="685800" cy="585216"/>
+            <a:off x="10707624" y="54864"/>
+            <a:ext cx="621792" cy="585216"/>
           </a:xfrm>
           <a:prstGeom prst="roundRect">
             <a:avLst>
-              <a:gd name="adj" fmla="val 12500"/>
+              <a:gd name="adj" fmla="val 7813"/>
             </a:avLst>
           </a:prstGeom>
           <a:solidFill>
@@ -8398,7 +8398,7 @@
               <a:buNone/>
             </a:pPr>
             <a:r>
-              <a:rPr lang="ja-JP" altLang="en-US" sz="1200" dirty="0">
+              <a:rPr lang="ja-JP" altLang="en-US" sz="1050" dirty="0">
                 <a:solidFill>
                   <a:srgbClr val="404040"/>
                 </a:solidFill>
@@ -8408,14 +8408,14 @@
               </a:rPr>
               <a:t>ミダ・</a:t>
             </a:r>
-            <a:endParaRPr lang="ja-JP" sz="1200" dirty="0"/>
+            <a:endParaRPr lang="ja-JP" sz="1050" dirty="0"/>
           </a:p>
           <a:p>
             <a:pPr algn="ctr" indent="0" marL="0">
               <a:buNone/>
             </a:pPr>
             <a:r>
-              <a:rPr lang="ja-JP" altLang="en-US" sz="1200" dirty="0">
+              <a:rPr lang="ja-JP" altLang="en-US" sz="1050" dirty="0">
                 <a:solidFill>
                   <a:srgbClr val="404040"/>
                 </a:solidFill>
@@ -8425,7 +8425,7 @@
               </a:rPr>
               <a:t>ケタ</a:t>
             </a:r>
-            <a:endParaRPr lang="ja-JP" sz="1200" dirty="0"/>
+            <a:endParaRPr lang="ja-JP" sz="1050" dirty="0"/>
           </a:p>
         </p:txBody>
       </p:sp>
@@ -8437,16 +8437,16 @@
         </p:nvSpPr>
         <p:spPr>
           <a:xfrm>
-            <a:off x="11000232" y="457200"/>
-            <a:ext cx="685800" cy="585216"/>
+            <a:off x="11384280" y="54864"/>
+            <a:ext cx="621792" cy="585216"/>
           </a:xfrm>
           <a:prstGeom prst="roundRect">
             <a:avLst>
-              <a:gd name="adj" fmla="val 12500"/>
+              <a:gd name="adj" fmla="val 7813"/>
             </a:avLst>
           </a:prstGeom>
           <a:solidFill>
-            <a:srgbClr val="007C80"/>
+            <a:srgbClr val="00A8AA"/>
           </a:solidFill>
           <a:ln/>
         </p:spPr>
@@ -8458,7 +8458,7 @@
               <a:buNone/>
             </a:pPr>
             <a:r>
-              <a:rPr lang="ja-JP" altLang="en-US" sz="1200" b="1" dirty="0">
+              <a:rPr lang="ja-JP" altLang="en-US" sz="1050" b="1" dirty="0">
                 <a:solidFill>
                   <a:srgbClr val="FFFFFF"/>
                 </a:solidFill>
@@ -8468,7 +8468,7 @@
               </a:rPr>
               <a:t>使い分け</a:t>
             </a:r>
-            <a:endParaRPr lang="ja-JP" sz="1200" dirty="0"/>
+            <a:endParaRPr lang="ja-JP" sz="1050" dirty="0"/>
           </a:p>
         </p:txBody>
       </p:sp>
@@ -8480,7 +8480,7 @@
         </p:nvSpPr>
         <p:spPr>
           <a:xfrm>
-            <a:off x="11247120" y="6263640"/>
+            <a:off x="11247120" y="6446520"/>
             <a:ext cx="731520" cy="320040"/>
           </a:xfrm>
           <a:prstGeom prst="rect">
@@ -8519,8 +8519,8 @@
         </p:nvSpPr>
         <p:spPr>
           <a:xfrm>
-            <a:off x="502920" y="5943600"/>
-            <a:ext cx="10424160" cy="640080"/>
+            <a:off x="502920" y="6099048"/>
+            <a:ext cx="10424160" cy="621792"/>
           </a:xfrm>
           <a:prstGeom prst="rect">
             <a:avLst/>
@@ -9583,7 +9583,7 @@
         <p:spPr>
           <a:xfrm>
             <a:off x="502920" y="320040"/>
-            <a:ext cx="7562088" cy="868680"/>
+            <a:ext cx="8503920" cy="868680"/>
           </a:xfrm>
           <a:prstGeom prst="rect">
             <a:avLst/>
@@ -9649,12 +9649,12 @@
         </p:nvSpPr>
         <p:spPr>
           <a:xfrm>
-            <a:off x="8110728" y="457200"/>
-            <a:ext cx="685800" cy="585216"/>
+            <a:off x="8677656" y="54864"/>
+            <a:ext cx="621792" cy="585216"/>
           </a:xfrm>
           <a:prstGeom prst="roundRect">
             <a:avLst>
-              <a:gd name="adj" fmla="val 12500"/>
+              <a:gd name="adj" fmla="val 7813"/>
             </a:avLst>
           </a:prstGeom>
           <a:solidFill>
@@ -9670,7 +9670,7 @@
               <a:buNone/>
             </a:pPr>
             <a:r>
-              <a:rPr lang="ja-JP" altLang="en-US" sz="1200" dirty="0">
+              <a:rPr lang="ja-JP" altLang="en-US" sz="1050" dirty="0">
                 <a:solidFill>
                   <a:srgbClr val="404040"/>
                 </a:solidFill>
@@ -9680,7 +9680,7 @@
               </a:rPr>
               <a:t>共通</a:t>
             </a:r>
-            <a:endParaRPr lang="ja-JP" sz="1200" dirty="0"/>
+            <a:endParaRPr lang="ja-JP" sz="1050" dirty="0"/>
           </a:p>
         </p:txBody>
       </p:sp>
@@ -9692,12 +9692,12 @@
         </p:nvSpPr>
         <p:spPr>
           <a:xfrm>
-            <a:off x="8833104" y="457200"/>
-            <a:ext cx="685800" cy="585216"/>
+            <a:off x="9354312" y="54864"/>
+            <a:ext cx="621792" cy="585216"/>
           </a:xfrm>
           <a:prstGeom prst="roundRect">
             <a:avLst>
-              <a:gd name="adj" fmla="val 12500"/>
+              <a:gd name="adj" fmla="val 7813"/>
             </a:avLst>
           </a:prstGeom>
           <a:solidFill>
@@ -9713,7 +9713,7 @@
               <a:buNone/>
             </a:pPr>
             <a:r>
-              <a:rPr lang="ja-JP" altLang="en-US" sz="1200" dirty="0">
+              <a:rPr lang="ja-JP" altLang="en-US" sz="1050" dirty="0">
                 <a:solidFill>
                   <a:srgbClr val="404040"/>
                 </a:solidFill>
@@ -9723,14 +9723,14 @@
               </a:rPr>
               <a:t>プロポ</a:t>
             </a:r>
-            <a:endParaRPr lang="ja-JP" sz="1200" dirty="0"/>
+            <a:endParaRPr lang="ja-JP" sz="1050" dirty="0"/>
           </a:p>
           <a:p>
             <a:pPr algn="ctr" indent="0" marL="0">
               <a:buNone/>
             </a:pPr>
             <a:r>
-              <a:rPr lang="ja-JP" altLang="en-US" sz="1200" dirty="0">
+              <a:rPr lang="ja-JP" altLang="en-US" sz="1050" dirty="0">
                 <a:solidFill>
                   <a:srgbClr val="404040"/>
                 </a:solidFill>
@@ -9740,7 +9740,7 @@
               </a:rPr>
               <a:t>フォール</a:t>
             </a:r>
-            <a:endParaRPr lang="ja-JP" sz="1200" dirty="0"/>
+            <a:endParaRPr lang="ja-JP" sz="1050" dirty="0"/>
           </a:p>
         </p:txBody>
       </p:sp>
@@ -9752,12 +9752,12 @@
         </p:nvSpPr>
         <p:spPr>
           <a:xfrm>
-            <a:off x="9555480" y="457200"/>
-            <a:ext cx="685800" cy="585216"/>
+            <a:off x="10030968" y="54864"/>
+            <a:ext cx="621792" cy="585216"/>
           </a:xfrm>
           <a:prstGeom prst="roundRect">
             <a:avLst>
-              <a:gd name="adj" fmla="val 12500"/>
+              <a:gd name="adj" fmla="val 7813"/>
             </a:avLst>
           </a:prstGeom>
           <a:solidFill>
@@ -9773,7 +9773,7 @@
               <a:buNone/>
             </a:pPr>
             <a:r>
-              <a:rPr lang="ja-JP" altLang="en-US" sz="1200" dirty="0">
+              <a:rPr lang="ja-JP" altLang="en-US" sz="1050" dirty="0">
                 <a:solidFill>
                   <a:srgbClr val="404040"/>
                 </a:solidFill>
@@ -9783,14 +9783,14 @@
               </a:rPr>
               <a:t>レミマ</a:t>
             </a:r>
-            <a:endParaRPr lang="ja-JP" sz="1200" dirty="0"/>
+            <a:endParaRPr lang="ja-JP" sz="1050" dirty="0"/>
           </a:p>
           <a:p>
             <a:pPr algn="ctr" indent="0" marL="0">
               <a:buNone/>
             </a:pPr>
             <a:r>
-              <a:rPr lang="ja-JP" altLang="en-US" sz="1200" dirty="0">
+              <a:rPr lang="ja-JP" altLang="en-US" sz="1050" dirty="0">
                 <a:solidFill>
                   <a:srgbClr val="404040"/>
                 </a:solidFill>
@@ -9800,7 +9800,7 @@
               </a:rPr>
               <a:t>ゾラム</a:t>
             </a:r>
-            <a:endParaRPr lang="ja-JP" sz="1200" dirty="0"/>
+            <a:endParaRPr lang="ja-JP" sz="1050" dirty="0"/>
           </a:p>
         </p:txBody>
       </p:sp>
@@ -9812,12 +9812,12 @@
         </p:nvSpPr>
         <p:spPr>
           <a:xfrm>
-            <a:off x="10277856" y="457200"/>
-            <a:ext cx="685800" cy="585216"/>
+            <a:off x="10707624" y="54864"/>
+            <a:ext cx="621792" cy="585216"/>
           </a:xfrm>
           <a:prstGeom prst="roundRect">
             <a:avLst>
-              <a:gd name="adj" fmla="val 12500"/>
+              <a:gd name="adj" fmla="val 7813"/>
             </a:avLst>
           </a:prstGeom>
           <a:solidFill>
@@ -9833,7 +9833,7 @@
               <a:buNone/>
             </a:pPr>
             <a:r>
-              <a:rPr lang="ja-JP" altLang="en-US" sz="1200" dirty="0">
+              <a:rPr lang="ja-JP" altLang="en-US" sz="1050" dirty="0">
                 <a:solidFill>
                   <a:srgbClr val="404040"/>
                 </a:solidFill>
@@ -9843,14 +9843,14 @@
               </a:rPr>
               <a:t>ミダ・</a:t>
             </a:r>
-            <a:endParaRPr lang="ja-JP" sz="1200" dirty="0"/>
+            <a:endParaRPr lang="ja-JP" sz="1050" dirty="0"/>
           </a:p>
           <a:p>
             <a:pPr algn="ctr" indent="0" marL="0">
               <a:buNone/>
             </a:pPr>
             <a:r>
-              <a:rPr lang="ja-JP" altLang="en-US" sz="1200" dirty="0">
+              <a:rPr lang="ja-JP" altLang="en-US" sz="1050" dirty="0">
                 <a:solidFill>
                   <a:srgbClr val="404040"/>
                 </a:solidFill>
@@ -9860,7 +9860,7 @@
               </a:rPr>
               <a:t>ケタ</a:t>
             </a:r>
-            <a:endParaRPr lang="ja-JP" sz="1200" dirty="0"/>
+            <a:endParaRPr lang="ja-JP" sz="1050" dirty="0"/>
           </a:p>
         </p:txBody>
       </p:sp>
@@ -9872,16 +9872,16 @@
         </p:nvSpPr>
         <p:spPr>
           <a:xfrm>
-            <a:off x="11000232" y="457200"/>
-            <a:ext cx="685800" cy="585216"/>
+            <a:off x="11384280" y="54864"/>
+            <a:ext cx="621792" cy="585216"/>
           </a:xfrm>
           <a:prstGeom prst="roundRect">
             <a:avLst>
-              <a:gd name="adj" fmla="val 12500"/>
+              <a:gd name="adj" fmla="val 7813"/>
             </a:avLst>
           </a:prstGeom>
           <a:solidFill>
-            <a:srgbClr val="007C80"/>
+            <a:srgbClr val="00A8AA"/>
           </a:solidFill>
           <a:ln/>
         </p:spPr>
@@ -9893,7 +9893,7 @@
               <a:buNone/>
             </a:pPr>
             <a:r>
-              <a:rPr lang="ja-JP" altLang="en-US" sz="1200" b="1" dirty="0">
+              <a:rPr lang="ja-JP" altLang="en-US" sz="1050" b="1" dirty="0">
                 <a:solidFill>
                   <a:srgbClr val="FFFFFF"/>
                 </a:solidFill>
@@ -9903,7 +9903,7 @@
               </a:rPr>
               <a:t>使い分け</a:t>
             </a:r>
-            <a:endParaRPr lang="ja-JP" sz="1200" dirty="0"/>
+            <a:endParaRPr lang="ja-JP" sz="1050" dirty="0"/>
           </a:p>
         </p:txBody>
       </p:sp>
@@ -9915,7 +9915,7 @@
         </p:nvSpPr>
         <p:spPr>
           <a:xfrm>
-            <a:off x="11247120" y="6263640"/>
+            <a:off x="11247120" y="6446520"/>
             <a:ext cx="731520" cy="320040"/>
           </a:xfrm>
           <a:prstGeom prst="rect">
@@ -9954,8 +9954,8 @@
         </p:nvSpPr>
         <p:spPr>
           <a:xfrm>
-            <a:off x="502920" y="5943600"/>
-            <a:ext cx="10424160" cy="640080"/>
+            <a:off x="502920" y="6099048"/>
+            <a:ext cx="10424160" cy="621792"/>
           </a:xfrm>
           <a:prstGeom prst="rect">
             <a:avLst/>
@@ -10011,7 +10011,7 @@
         <p:spPr>
           <a:xfrm>
             <a:off x="502920" y="1737360"/>
-            <a:ext cx="11155680" cy="2926080"/>
+            <a:ext cx="11155680" cy="3026664"/>
           </a:xfrm>
           <a:prstGeom prst="rect">
             <a:avLst/>
@@ -10025,7 +10025,7 @@
           <a:p>
             <a:pPr algn="l" marL="406400" indent="-406400">
               <a:spcAft>
-                <a:spcPts val="2000"/>
+                <a:spcPts val="2200"/>
               </a:spcAft>
               <a:buSzPct val="100000"/>
               <a:buChar char="•"/>
@@ -10046,7 +10046,7 @@
           <a:p>
             <a:pPr algn="l" marL="406400" indent="-406400">
               <a:spcAft>
-                <a:spcPts val="2000"/>
+                <a:spcPts val="2200"/>
               </a:spcAft>
               <a:buSzPct val="100000"/>
               <a:buChar char="•"/>
@@ -10067,7 +10067,7 @@
           <a:p>
             <a:pPr algn="l" marL="406400" indent="-406400">
               <a:spcAft>
-                <a:spcPts val="2000"/>
+                <a:spcPts val="2200"/>
               </a:spcAft>
               <a:buSzPct val="100000"/>
               <a:buChar char="•"/>
@@ -10088,7 +10088,7 @@
           <a:p>
             <a:pPr algn="l" marL="406400" indent="-406400">
               <a:spcAft>
-                <a:spcPts val="2000"/>
+                <a:spcPts val="2200"/>
               </a:spcAft>
               <a:buSzPct val="100000"/>
               <a:buChar char="•"/>
@@ -10116,7 +10116,7 @@
         </p:nvSpPr>
         <p:spPr>
           <a:xfrm>
-            <a:off x="502920" y="4882896"/>
+            <a:off x="502920" y="4983480"/>
             <a:ext cx="11183112" cy="777240"/>
           </a:xfrm>
           <a:prstGeom prst="roundRect">
@@ -10215,7 +10215,7 @@
         <p:spPr>
           <a:xfrm>
             <a:off x="502920" y="320040"/>
-            <a:ext cx="7562088" cy="868680"/>
+            <a:ext cx="8503920" cy="868680"/>
           </a:xfrm>
           <a:prstGeom prst="rect">
             <a:avLst/>
@@ -10281,12 +10281,12 @@
         </p:nvSpPr>
         <p:spPr>
           <a:xfrm>
-            <a:off x="8110728" y="457200"/>
-            <a:ext cx="685800" cy="585216"/>
+            <a:off x="8677656" y="54864"/>
+            <a:ext cx="621792" cy="585216"/>
           </a:xfrm>
           <a:prstGeom prst="roundRect">
             <a:avLst>
-              <a:gd name="adj" fmla="val 12500"/>
+              <a:gd name="adj" fmla="val 7813"/>
             </a:avLst>
           </a:prstGeom>
           <a:solidFill>
@@ -10302,7 +10302,7 @@
               <a:buNone/>
             </a:pPr>
             <a:r>
-              <a:rPr lang="ja-JP" altLang="en-US" sz="1200" dirty="0">
+              <a:rPr lang="ja-JP" altLang="en-US" sz="1050" dirty="0">
                 <a:solidFill>
                   <a:srgbClr val="404040"/>
                 </a:solidFill>
@@ -10312,7 +10312,7 @@
               </a:rPr>
               <a:t>共通</a:t>
             </a:r>
-            <a:endParaRPr lang="ja-JP" sz="1200" dirty="0"/>
+            <a:endParaRPr lang="ja-JP" sz="1050" dirty="0"/>
           </a:p>
         </p:txBody>
       </p:sp>
@@ -10324,12 +10324,12 @@
         </p:nvSpPr>
         <p:spPr>
           <a:xfrm>
-            <a:off x="8833104" y="457200"/>
-            <a:ext cx="685800" cy="585216"/>
+            <a:off x="9354312" y="54864"/>
+            <a:ext cx="621792" cy="585216"/>
           </a:xfrm>
           <a:prstGeom prst="roundRect">
             <a:avLst>
-              <a:gd name="adj" fmla="val 12500"/>
+              <a:gd name="adj" fmla="val 7813"/>
             </a:avLst>
           </a:prstGeom>
           <a:solidFill>
@@ -10345,7 +10345,7 @@
               <a:buNone/>
             </a:pPr>
             <a:r>
-              <a:rPr lang="ja-JP" altLang="en-US" sz="1200" dirty="0">
+              <a:rPr lang="ja-JP" altLang="en-US" sz="1050" dirty="0">
                 <a:solidFill>
                   <a:srgbClr val="404040"/>
                 </a:solidFill>
@@ -10355,14 +10355,14 @@
               </a:rPr>
               <a:t>プロポ</a:t>
             </a:r>
-            <a:endParaRPr lang="ja-JP" sz="1200" dirty="0"/>
+            <a:endParaRPr lang="ja-JP" sz="1050" dirty="0"/>
           </a:p>
           <a:p>
             <a:pPr algn="ctr" indent="0" marL="0">
               <a:buNone/>
             </a:pPr>
             <a:r>
-              <a:rPr lang="ja-JP" altLang="en-US" sz="1200" dirty="0">
+              <a:rPr lang="ja-JP" altLang="en-US" sz="1050" dirty="0">
                 <a:solidFill>
                   <a:srgbClr val="404040"/>
                 </a:solidFill>
@@ -10372,7 +10372,7 @@
               </a:rPr>
               <a:t>フォール</a:t>
             </a:r>
-            <a:endParaRPr lang="ja-JP" sz="1200" dirty="0"/>
+            <a:endParaRPr lang="ja-JP" sz="1050" dirty="0"/>
           </a:p>
         </p:txBody>
       </p:sp>
@@ -10384,12 +10384,12 @@
         </p:nvSpPr>
         <p:spPr>
           <a:xfrm>
-            <a:off x="9555480" y="457200"/>
-            <a:ext cx="685800" cy="585216"/>
+            <a:off x="10030968" y="54864"/>
+            <a:ext cx="621792" cy="585216"/>
           </a:xfrm>
           <a:prstGeom prst="roundRect">
             <a:avLst>
-              <a:gd name="adj" fmla="val 12500"/>
+              <a:gd name="adj" fmla="val 7813"/>
             </a:avLst>
           </a:prstGeom>
           <a:solidFill>
@@ -10405,7 +10405,7 @@
               <a:buNone/>
             </a:pPr>
             <a:r>
-              <a:rPr lang="ja-JP" altLang="en-US" sz="1200" dirty="0">
+              <a:rPr lang="ja-JP" altLang="en-US" sz="1050" dirty="0">
                 <a:solidFill>
                   <a:srgbClr val="404040"/>
                 </a:solidFill>
@@ -10415,14 +10415,14 @@
               </a:rPr>
               <a:t>レミマ</a:t>
             </a:r>
-            <a:endParaRPr lang="ja-JP" sz="1200" dirty="0"/>
+            <a:endParaRPr lang="ja-JP" sz="1050" dirty="0"/>
           </a:p>
           <a:p>
             <a:pPr algn="ctr" indent="0" marL="0">
               <a:buNone/>
             </a:pPr>
             <a:r>
-              <a:rPr lang="ja-JP" altLang="en-US" sz="1200" dirty="0">
+              <a:rPr lang="ja-JP" altLang="en-US" sz="1050" dirty="0">
                 <a:solidFill>
                   <a:srgbClr val="404040"/>
                 </a:solidFill>
@@ -10432,7 +10432,7 @@
               </a:rPr>
               <a:t>ゾラム</a:t>
             </a:r>
-            <a:endParaRPr lang="ja-JP" sz="1200" dirty="0"/>
+            <a:endParaRPr lang="ja-JP" sz="1050" dirty="0"/>
           </a:p>
         </p:txBody>
       </p:sp>
@@ -10444,12 +10444,12 @@
         </p:nvSpPr>
         <p:spPr>
           <a:xfrm>
-            <a:off x="10277856" y="457200"/>
-            <a:ext cx="685800" cy="585216"/>
+            <a:off x="10707624" y="54864"/>
+            <a:ext cx="621792" cy="585216"/>
           </a:xfrm>
           <a:prstGeom prst="roundRect">
             <a:avLst>
-              <a:gd name="adj" fmla="val 12500"/>
+              <a:gd name="adj" fmla="val 7813"/>
             </a:avLst>
           </a:prstGeom>
           <a:solidFill>
@@ -10465,7 +10465,7 @@
               <a:buNone/>
             </a:pPr>
             <a:r>
-              <a:rPr lang="ja-JP" altLang="en-US" sz="1200" dirty="0">
+              <a:rPr lang="ja-JP" altLang="en-US" sz="1050" dirty="0">
                 <a:solidFill>
                   <a:srgbClr val="404040"/>
                 </a:solidFill>
@@ -10475,14 +10475,14 @@
               </a:rPr>
               <a:t>ミダ・</a:t>
             </a:r>
-            <a:endParaRPr lang="ja-JP" sz="1200" dirty="0"/>
+            <a:endParaRPr lang="ja-JP" sz="1050" dirty="0"/>
           </a:p>
           <a:p>
             <a:pPr algn="ctr" indent="0" marL="0">
               <a:buNone/>
             </a:pPr>
             <a:r>
-              <a:rPr lang="ja-JP" altLang="en-US" sz="1200" dirty="0">
+              <a:rPr lang="ja-JP" altLang="en-US" sz="1050" dirty="0">
                 <a:solidFill>
                   <a:srgbClr val="404040"/>
                 </a:solidFill>
@@ -10492,7 +10492,7 @@
               </a:rPr>
               <a:t>ケタ</a:t>
             </a:r>
-            <a:endParaRPr lang="ja-JP" sz="1200" dirty="0"/>
+            <a:endParaRPr lang="ja-JP" sz="1050" dirty="0"/>
           </a:p>
         </p:txBody>
       </p:sp>
@@ -10504,16 +10504,16 @@
         </p:nvSpPr>
         <p:spPr>
           <a:xfrm>
-            <a:off x="11000232" y="457200"/>
-            <a:ext cx="685800" cy="585216"/>
+            <a:off x="11384280" y="54864"/>
+            <a:ext cx="621792" cy="585216"/>
           </a:xfrm>
           <a:prstGeom prst="roundRect">
             <a:avLst>
-              <a:gd name="adj" fmla="val 12500"/>
+              <a:gd name="adj" fmla="val 7813"/>
             </a:avLst>
           </a:prstGeom>
           <a:solidFill>
-            <a:srgbClr val="007C80"/>
+            <a:srgbClr val="00A8AA"/>
           </a:solidFill>
           <a:ln/>
         </p:spPr>
@@ -10525,7 +10525,7 @@
               <a:buNone/>
             </a:pPr>
             <a:r>
-              <a:rPr lang="ja-JP" altLang="en-US" sz="1200" b="1" dirty="0">
+              <a:rPr lang="ja-JP" altLang="en-US" sz="1050" b="1" dirty="0">
                 <a:solidFill>
                   <a:srgbClr val="FFFFFF"/>
                 </a:solidFill>
@@ -10535,7 +10535,7 @@
               </a:rPr>
               <a:t>使い分け</a:t>
             </a:r>
-            <a:endParaRPr lang="ja-JP" sz="1200" dirty="0"/>
+            <a:endParaRPr lang="ja-JP" sz="1050" dirty="0"/>
           </a:p>
         </p:txBody>
       </p:sp>
@@ -10547,7 +10547,7 @@
         </p:nvSpPr>
         <p:spPr>
           <a:xfrm>
-            <a:off x="11247120" y="6263640"/>
+            <a:off x="11247120" y="6446520"/>
             <a:ext cx="731520" cy="320040"/>
           </a:xfrm>
           <a:prstGeom prst="rect">
@@ -10586,8 +10586,8 @@
         </p:nvSpPr>
         <p:spPr>
           <a:xfrm>
-            <a:off x="502920" y="6263640"/>
-            <a:ext cx="10424160" cy="320040"/>
+            <a:off x="502920" y="6409944"/>
+            <a:ext cx="10424160" cy="310896"/>
           </a:xfrm>
           <a:prstGeom prst="rect">
             <a:avLst/>
@@ -10625,8 +10625,8 @@
         </p:nvSpPr>
         <p:spPr>
           <a:xfrm>
-            <a:off x="502920" y="1737360"/>
-            <a:ext cx="11183112" cy="4050792"/>
+            <a:off x="502920" y="1783080"/>
+            <a:ext cx="11183112" cy="4306824"/>
           </a:xfrm>
           <a:prstGeom prst="rect">
             <a:avLst/>
@@ -10640,7 +10640,7 @@
           <a:p>
             <a:pPr algn="l" marL="368300" indent="-368300">
               <a:spcAft>
-                <a:spcPts val="3000"/>
+                <a:spcPts val="3400"/>
               </a:spcAft>
               <a:buSzPct val="100000"/>
               <a:buChar char="•"/>
@@ -10672,7 +10672,7 @@
           <a:p>
             <a:pPr algn="l" marL="368300" indent="-368300">
               <a:spcAft>
-                <a:spcPts val="3000"/>
+                <a:spcPts val="3400"/>
               </a:spcAft>
               <a:buSzPct val="100000"/>
               <a:buChar char="•"/>
@@ -10704,7 +10704,7 @@
           <a:p>
             <a:pPr algn="l" marL="368300" indent="-368300">
               <a:spcAft>
-                <a:spcPts val="3000"/>
+                <a:spcPts val="3400"/>
               </a:spcAft>
               <a:buSzPct val="100000"/>
               <a:buChar char="•"/>
@@ -10736,7 +10736,7 @@
           <a:p>
             <a:pPr algn="l" marL="368300" indent="-368300">
               <a:spcAft>
-                <a:spcPts val="3000"/>
+                <a:spcPts val="3400"/>
               </a:spcAft>
               <a:buSzPct val="100000"/>
               <a:buChar char="•"/>
@@ -10757,7 +10757,7 @@
           <a:p>
             <a:pPr algn="l" marL="368300" indent="-368300">
               <a:spcAft>
-                <a:spcPts val="3000"/>
+                <a:spcPts val="3400"/>
               </a:spcAft>
               <a:buSzPct val="100000"/>
               <a:buChar char="•"/>
